--- a/deck/سديد-عرض-تنفيذي.pptx
+++ b/deck/سديد-عرض-تنفيذي.pptx
@@ -141,7 +141,7 @@
               <c:strCache>
                 <c:ptCount val="1"/>
                 <c:pt idx="0">
-                  <c:v>نسبة التحصيل</c:v>
+                  <c:v>نسبة الاعتماد</c:v>
                 </c:pt>
               </c:strCache>
             </c:strRef>
@@ -1008,7 +1008,7 @@
           <a:p>
             <a:r>
               <a:rPr lang="en-US" dirty="0"/>
-              <a:t>افتتاحية: سديد يجيب عن سؤال واحد قبل إرسال المطالبة للضامن، وهو هل ستُحصَّل بالكامل. المنصّة مبنيّة بالكامل وجاهزة، والعرض اليوم عن العائد لا عن التمويل.</a:t>
+              <a:t>افتتاحية: سديد يجيب عن سؤال واحد قبل رفع الطلب للضامن، وهو هل سيُعتمد بالكامل. المنصّة مبنيّة بالكامل وجاهزة، والعرض اليوم عن العائد لا عن التمويل.</a:t>
             </a:r>
             <a:endParaRPr lang="en-US" dirty="0"/>
           </a:p>
@@ -1536,7 +1536,7 @@
           <a:p>
             <a:r>
               <a:rPr lang="en-US" dirty="0"/>
-              <a:t>الرقم الثالث هو الأكثر تحفّظاً في العرض كله: يفترض أن خُمس الحالات المُشخَّصة فقط قابلة للإصلاح قبل الإرسال. تفصيله في شريحة نموذج العائد.</a:t>
+              <a:t>الرقم الثالث هو الأكثر تحفّظاً في العرض كله: يفترض أن خُمس الحالات المُشخَّصة فقط قابلة للإصلاح قبل الرفع. تفصيله في شريحة نموذج العائد.</a:t>
             </a:r>
             <a:endParaRPr lang="en-US" dirty="0"/>
           </a:p>
@@ -1624,7 +1624,7 @@
           <a:p>
             <a:r>
               <a:rPr lang="en-US" dirty="0"/>
-              <a:t>الرسالة أن الفرق بين النتيجتين ليس تدريجياً بل قفزة. تحويل مطالبة واحدة من الفئة الخاسرة إلى المقبولة يستعيد نحو 84 نقطة من قيمتها.</a:t>
+              <a:t>الرسالة أن الفرق بين النتيجتين ليس تدريجياً بل قفزة. تحويل طلب واحد من الفئة الخاسرة إلى المقبولة يستعيد نحو 84 نقطة من قيمته.</a:t>
             </a:r>
             <a:endParaRPr lang="en-US" dirty="0"/>
           </a:p>
@@ -1712,7 +1712,7 @@
           <a:p>
             <a:r>
               <a:rPr lang="en-US" dirty="0"/>
-              <a:t>النقطة الجوهرية أن سديد لا يستبدل فريق الاستئناف، بل يقلّص ما يصل إليه أصلاً.</a:t>
+              <a:t>النقطة الجوهرية أن سديد لا يستبدل فريق معالجة المرفوضات، بل يقلّص ما يصل إليه أصلاً.</a:t>
             </a:r>
             <a:endParaRPr lang="en-US" dirty="0"/>
           </a:p>
@@ -2527,7 +2527,7 @@
       </p:grpSpPr>
       <p:pic>
         <p:nvPicPr>
-          <p:cNvPr id="2" name="Image 0" descr="/tmp/claude-0/-home-user-RCM/4705accb-a6ec-57be-a738-b36f9990c4f1/scratchpad/sadeed.png">    </p:cNvPr>
+          <p:cNvPr id="2" name="Image 0" descr="./sadeed.png">    </p:cNvPr>
           <p:cNvPicPr>
             <a:picLocks noChangeAspect="1"/>
           </p:cNvPicPr>
@@ -2621,7 +2621,7 @@
                 <a:ea typeface="Arial" pitchFamily="34" charset="-122"/>
                 <a:cs typeface="Arial" pitchFamily="34" charset="-120"/>
               </a:rPr>
-              <a:t>منصّة التنبؤ بالموافقة التأمينية</a:t>
+              <a:t>منصّة التنبؤ بالموافقة التأمينية المسبقة</a:t>
             </a:r>
             <a:endParaRPr lang="en-US" sz="2700" dirty="0"/>
           </a:p>
@@ -2660,7 +2660,7 @@
                 <a:ea typeface="Arial" pitchFamily="34" charset="-122"/>
                 <a:cs typeface="Arial" pitchFamily="34" charset="-120"/>
               </a:rPr>
-              <a:t>هل تُحصَّل هذه المطالبة بالكامل؟ الجواب قبل الإرسال، لا بعد الرفض.</a:t>
+              <a:t>هل يُعتمد هذا الطلب بالكامل؟ الجواب قبل الرفع، لا بعد الرفض.</a:t>
             </a:r>
             <a:endParaRPr lang="en-US" sz="1700" dirty="0"/>
           </a:p>
@@ -2695,7 +2695,7 @@
       </p:sp>
       <p:pic>
         <p:nvPicPr>
-          <p:cNvPr id="7" name="Image 1" descr="/tmp/claude-0/-home-user-RCM/4705accb-a6ec-57be-a738-b36f9990c4f1/scratchpad/cluster.png">    </p:cNvPr>
+          <p:cNvPr id="7" name="Image 1" descr="./cluster.png">    </p:cNvPr>
           <p:cNvPicPr>
             <a:picLocks noChangeAspect="1"/>
           </p:cNvPicPr>
@@ -3830,7 +3830,7 @@
                 <a:ea typeface="Arial" pitchFamily="34" charset="-122"/>
                 <a:cs typeface="Arial" pitchFamily="34" charset="-120"/>
               </a:rPr>
-              <a:t>مسار القيمة من 1,000 مطالبة مُرسَلة إلى ريال مُستعاد</a:t>
+              <a:t>مسار القيمة من 1,000 طلب موافقة إلى ريال مُستعاد</a:t>
             </a:r>
             <a:endParaRPr lang="en-US" sz="3200" dirty="0"/>
           </a:p>
@@ -3974,7 +3974,7 @@
                 <a:ea typeface="Arial" pitchFamily="34" charset="-122"/>
                 <a:cs typeface="Arial" pitchFamily="34" charset="-120"/>
               </a:rPr>
-              <a:t>مطالبة تُرسَل للضامن</a:t>
+              <a:t>طلب يُرفَع للضامن</a:t>
             </a:r>
             <a:endParaRPr lang="en-US" sz="1300" dirty="0"/>
           </a:p>
@@ -4079,7 +4079,7 @@
                 <a:ea typeface="Arial" pitchFamily="34" charset="-122"/>
                 <a:cs typeface="Arial" pitchFamily="34" charset="-120"/>
               </a:rPr>
-              <a:t>لن تصدر موافقتها كاملة</a:t>
+              <a:t>لن تصدر موافقته كاملة</a:t>
             </a:r>
             <a:endParaRPr lang="en-US" sz="1300" dirty="0"/>
           </a:p>
@@ -4118,7 +4118,7 @@
                 <a:ea typeface="Arial" pitchFamily="34" charset="-122"/>
                 <a:cs typeface="Arial" pitchFamily="34" charset="-120"/>
               </a:rPr>
-              <a:t>49.4% من المُرسَل</a:t>
+              <a:t>49.4% من المرفوع</a:t>
             </a:r>
             <a:endParaRPr lang="en-US" sz="1050" dirty="0"/>
           </a:p>
@@ -4223,7 +4223,7 @@
                 <a:ea typeface="Arial" pitchFamily="34" charset="-122"/>
                 <a:cs typeface="Arial" pitchFamily="34" charset="-120"/>
               </a:rPr>
-              <a:t>يلتقطها سديد قبل الإرسال</a:t>
+              <a:t>يلتقطه سديد قبل الرفع</a:t>
             </a:r>
             <a:endParaRPr lang="en-US" sz="1300" dirty="0"/>
           </a:p>
@@ -4367,7 +4367,7 @@
                 <a:ea typeface="Arial" pitchFamily="34" charset="-122"/>
                 <a:cs typeface="Arial" pitchFamily="34" charset="-120"/>
               </a:rPr>
-              <a:t>يُشخَّص سببها الصحيح</a:t>
+              <a:t>يُشخَّص سببه الصحيح</a:t>
             </a:r>
             <a:endParaRPr lang="en-US" sz="1300" dirty="0"/>
           </a:p>
@@ -4511,7 +4511,7 @@
                 <a:ea typeface="Arial" pitchFamily="34" charset="-122"/>
                 <a:cs typeface="Arial" pitchFamily="34" charset="-120"/>
               </a:rPr>
-              <a:t>تُصحَّح وتُرسَل مكتملة</a:t>
+              <a:t>يُصحَّح ويُرفَع مكتملاً</a:t>
             </a:r>
             <a:endParaRPr lang="en-US" sz="1300" dirty="0"/>
           </a:p>
@@ -4616,7 +4616,7 @@
                 <a:ea typeface="Arial" pitchFamily="34" charset="-122"/>
                 <a:cs typeface="Arial" pitchFamily="34" charset="-120"/>
               </a:rPr>
-              <a:t>كل مطالبة تتحوّل من «غير مكتملة» إلى «مقبولة كاملة» تستعيد 83.8 بالمئة من قيمتها، فيرتفع التحصيل بمقدار 4.2 إلى 10.5 نقطة على قيمة كل ما يُرسَل.</a:t>
+              <a:t>كل طلب يتحوّل من «غير مكتمل» إلى «معتمد كاملاً» يستعيد 83.8 بالمئة من قيمته، فترتفع التغطية المعتمدة بمقدار 4.2 إلى 10.5 نقطة على قيمة كل ما يُرفَع.</a:t>
             </a:r>
             <a:endParaRPr lang="en-US" sz="1350" dirty="0"/>
           </a:p>
@@ -4765,7 +4765,7 @@
                 <a:ea typeface="Arial" pitchFamily="34" charset="-122"/>
                 <a:cs typeface="Arial" pitchFamily="34" charset="-120"/>
               </a:rPr>
-              <a:t>نحو 181,000 مطالبة سنوياً تمرّ عبر الفحص · القيم بملايين الريالات، إيراداً مستعاداً سنوياً · الأعمدة تمثّل نسبة الإصلاح المفترضة.</a:t>
+              <a:t>نحو 181,000 طلب موافقة سنوياً يمرّ عبر الفحص · القيم بملايين الريالات، تغطيةً معتمدة إضافية سنوياً · الأعمدة تمثّل نسبة الإصلاح المفترضة.</a:t>
             </a:r>
             <a:endParaRPr lang="en-US" sz="1400" dirty="0"/>
           </a:p>
@@ -4829,7 +4829,7 @@
                 <a:ea typeface="Arial" pitchFamily="34" charset="-122"/>
                 <a:cs typeface="Arial" pitchFamily="34" charset="-120"/>
               </a:rPr>
-              <a:t>متوسط قيمة الفاتورة</a:t>
+              <a:t>متوسط قيمة الطلب</a:t>
             </a:r>
             <a:endParaRPr lang="en-US" sz="1300" dirty="0"/>
           </a:p>
@@ -6480,7 +6480,7 @@
                 <a:ea typeface="Arial" pitchFamily="34" charset="-122"/>
                 <a:cs typeface="Arial" pitchFamily="34" charset="-120"/>
               </a:rPr>
-              <a:t>عائد كل ساعة مراجعة قبل الإرسال، بأدنى قيمة فاتورة وأدنى نسبة إصلاح. يرتفع إلى 4,865 ريالاً عند متوسط فاتورة 3,000 ريال.</a:t>
+              <a:t>تغطية معتمدة إضافية عن كل ساعة مراجعة قبل الرفع، بأدنى قيمة طلب وأدنى نسبة إصلاح. ترتفع إلى 4,865 ريالاً عند متوسط طلب 3,000 ريال.</a:t>
             </a:r>
             <a:endParaRPr lang="en-US" sz="1150" dirty="0"/>
           </a:p>
@@ -6595,7 +6595,7 @@
                 <a:ea typeface="Arial" pitchFamily="34" charset="-122"/>
                 <a:cs typeface="Arial" pitchFamily="34" charset="-120"/>
               </a:rPr>
-              <a:t>يفترض أن خُمس الحالات المُشخَّصة فقط قابلة للإصلاح قبل الإرسال. أي رقم فوقه مكسب إضافي، لا شرط للجدوى.</a:t>
+              <a:t>يفترض أن خُمس الحالات المُشخَّصة فقط قابلة للإصلاح قبل الرفع. أي رقم فوقه مكسب إضافي، لا شرط للجدوى.</a:t>
             </a:r>
             <a:endParaRPr lang="en-US" sz="1200" dirty="0"/>
           </a:p>
@@ -6634,7 +6634,7 @@
                 <a:ea typeface="Arial" pitchFamily="34" charset="-122"/>
                 <a:cs typeface="Arial" pitchFamily="34" charset="-120"/>
               </a:rPr>
-              <a:t>متوسط قيمة الفاتورة غير متاح في بيانات النموذج، فعُرض العائد كجدول حساسية تُسقِط عليه الإدارة رقمها الفعلي مباشرة.</a:t>
+              <a:t>متوسط قيمة الطلب غير متاح في بيانات النموذج، فعُرض العائد كجدول حساسية تُسقِط عليه الإدارة رقمها الفعلي مباشرة.</a:t>
             </a:r>
             <a:endParaRPr lang="en-US" sz="950" dirty="0"/>
           </a:p>
@@ -7018,7 +7018,7 @@
                 <a:ea typeface="Arial" pitchFamily="34" charset="-122"/>
                 <a:cs typeface="Arial" pitchFamily="34" charset="-120"/>
               </a:rPr>
-              <a:t>تعمل داخل المتصفّح، بلا خادم ولا قاعدة بيانات ولا كلفة لكل مطالبة.</a:t>
+              <a:t>تعمل داخل المتصفّح، بلا خادم ولا قاعدة بيانات ولا كلفة لكل طلب.</a:t>
             </a:r>
             <a:endParaRPr lang="en-US" sz="1150" dirty="0"/>
           </a:p>
@@ -7099,7 +7099,7 @@
                 <a:ea typeface="Arial" pitchFamily="34" charset="-122"/>
                 <a:cs typeface="Arial" pitchFamily="34" charset="-120"/>
               </a:rPr>
-              <a:t>بيانات المطالبة لا تغادر جهاز المستخدم، ولا يستعمل النموذج أي معرّف شخصي.</a:t>
+              <a:t>بيانات الطلب لا تغادر جهاز المستخدم، ولا يستعمل النموذج أي معرّف شخصي.</a:t>
             </a:r>
             <a:endParaRPr lang="en-US" sz="1150" dirty="0"/>
           </a:p>
@@ -7180,7 +7180,7 @@
                 <a:ea typeface="Arial" pitchFamily="34" charset="-122"/>
                 <a:cs typeface="Arial" pitchFamily="34" charset="-120"/>
               </a:rPr>
-              <a:t>يُعلَّم 516 من كل 1,000 مطالبة للمراجعة المسبقة، والعتبة قابلة للرفع لتضييق هذا العدد.</a:t>
+              <a:t>يُعلَّم 516 من كل 1,000 طلب للمراجعة قبل الرفع، والعتبة قابلة للرفع لتضييق هذا العدد.</a:t>
             </a:r>
             <a:endParaRPr lang="en-US" sz="1150" dirty="0"/>
           </a:p>
@@ -7415,7 +7415,7 @@
                 <a:ea typeface="Arial" pitchFamily="34" charset="-122"/>
                 <a:cs typeface="Arial" pitchFamily="34" charset="-120"/>
               </a:rPr>
-              <a:t>نحو 29 بالمئة ممّا يُعلَّم يُقبل فعلاً بالكامل، وهو ثمن مقصود مقابل التقاط 74 بالمئة من الخاسرة.</a:t>
+              <a:t>نحو 29 بالمئة ممّا يُعلَّم يُعتمد فعلاً بالكامل، وهو ثمن مقصود مقابل التقاط 74 بالمئة من غير المكتملة.</a:t>
             </a:r>
             <a:endParaRPr lang="en-US" sz="1150" dirty="0"/>
           </a:p>
@@ -8109,7 +8109,7 @@
                 <a:ea typeface="Arial" pitchFamily="34" charset="-122"/>
                 <a:cs typeface="Arial" pitchFamily="34" charset="-120"/>
               </a:rPr>
-              <a:t>إدخال سديد خطوةً إلزامية قبل الإرسال في المسار المعتمد، وربط مخرجاته بلوحة Power BI القائمة.</a:t>
+              <a:t>إدخال سديد خطوةً إلزامية قبل رفع الطلب في المسار المعتمد، وربط مخرجاته بلوحة Power BI القائمة.</a:t>
             </a:r>
             <a:endParaRPr lang="en-US" sz="1250" dirty="0"/>
           </a:p>
@@ -8320,7 +8320,7 @@
                 <a:ea typeface="Arial" pitchFamily="34" charset="-122"/>
                 <a:cs typeface="Arial" pitchFamily="34" charset="-120"/>
               </a:rPr>
-              <a:t>التوسّع على مستوى التجمع، وإعادة تدريب ربع سنوية، ومتابعة أثر التحصيل شهرياً.</a:t>
+              <a:t>التوسّع على مستوى التجمع، وإعادة تدريب ربع سنوية، ومتابعة أثر الاعتماد شهرياً.</a:t>
             </a:r>
             <a:endParaRPr lang="en-US" sz="1250" dirty="0"/>
           </a:p>
@@ -8655,7 +8655,7 @@
                 <a:ea typeface="Arial" pitchFamily="34" charset="-122"/>
                 <a:cs typeface="Arial" pitchFamily="34" charset="-120"/>
               </a:rPr>
-              <a:t>كل الأرقام مقيسة على 41,042 مطالبة صدر فيها قرار نهائي، بتقسيم زمني يدرّب على الفترة الأقدم ويختبر على الأحدث.</a:t>
+              <a:t>كل الأرقام مقيسة على 41,042 طلباً صدر فيها قرار نهائي، بتقسيم زمني يدرّب على الفترة الأقدم ويختبر على الأحدث.</a:t>
             </a:r>
             <a:endParaRPr lang="en-US" sz="1400" dirty="0"/>
           </a:p>
@@ -8767,7 +8767,7 @@
                 <a:ea typeface="Arial" pitchFamily="34" charset="-122"/>
                 <a:cs typeface="Arial" pitchFamily="34" charset="-120"/>
               </a:rPr>
-              <a:t>من قيمة المطالبات المُرسَلة لا تُحصَّل</a:t>
+              <a:t>من قيمة ما يُطلب من الضامن لا يُعتمد</a:t>
             </a:r>
             <a:endParaRPr lang="en-US" sz="1500" dirty="0"/>
           </a:p>
@@ -8806,7 +8806,7 @@
                 <a:ea typeface="Arial" pitchFamily="34" charset="-122"/>
                 <a:cs typeface="Arial" pitchFamily="34" charset="-120"/>
               </a:rPr>
-              <a:t>الفجوة بين ما يُفوتر وما يُحصَّل فعلاً، قبل أي تدخّل.</a:t>
+              <a:t>الفجوة بين المبلغ المطلوب والمبلغ المعتمد، قبل أي تدخّل.</a:t>
             </a:r>
             <a:endParaRPr lang="en-US" sz="1150" dirty="0"/>
           </a:p>
@@ -8918,7 +8918,7 @@
                 <a:ea typeface="Arial" pitchFamily="34" charset="-122"/>
                 <a:cs typeface="Arial" pitchFamily="34" charset="-120"/>
               </a:rPr>
-              <a:t>من المطالبات الخاسرة يلتقطها سديد</a:t>
+              <a:t>من الطلبات غير المكتملة يلتقطها سديد</a:t>
             </a:r>
             <a:endParaRPr lang="en-US" sz="1500" dirty="0"/>
           </a:p>
@@ -8957,7 +8957,7 @@
                 <a:ea typeface="Arial" pitchFamily="34" charset="-122"/>
                 <a:cs typeface="Arial" pitchFamily="34" charset="-120"/>
               </a:rPr>
-              <a:t>قبل الإرسال، مع ترتيب أسبابها المرجّحة وإجراء تصحيحي لكل سبب.</a:t>
+              <a:t>قبل الرفع، مع ترتيب أسبابها المرجّحة وإجراء تصحيحي لكل سبب.</a:t>
             </a:r>
             <a:endParaRPr lang="en-US" sz="1150" dirty="0"/>
           </a:p>
@@ -9069,7 +9069,7 @@
                 <a:ea typeface="Arial" pitchFamily="34" charset="-122"/>
                 <a:cs typeface="Arial" pitchFamily="34" charset="-120"/>
               </a:rPr>
-              <a:t>حدّ أدنى لارتفاع التحصيل</a:t>
+              <a:t>حدّ أدنى لارتفاع التغطية المعتمدة</a:t>
             </a:r>
             <a:endParaRPr lang="en-US" sz="1500" dirty="0"/>
           </a:p>
@@ -9108,7 +9108,7 @@
                 <a:ea typeface="Arial" pitchFamily="34" charset="-122"/>
                 <a:cs typeface="Arial" pitchFamily="34" charset="-120"/>
               </a:rPr>
-              <a:t>على قيمة ما يُرسَل، بأشدّ الافتراضات تحفّظاً، ويصل إلى 10.5 نقطة.</a:t>
+              <a:t>على قيمة ما يُرفَع، بأشدّ الافتراضات تحفّظاً، ويصل إلى 10.5 نقطة.</a:t>
             </a:r>
             <a:endParaRPr lang="en-US" sz="1150" dirty="0"/>
           </a:p>
@@ -9223,7 +9223,7 @@
                 <a:ea typeface="Arial" pitchFamily="34" charset="-122"/>
                 <a:cs typeface="Arial" pitchFamily="34" charset="-120"/>
               </a:rPr>
-              <a:t>المنصّة مبنيّة ومُختبَرة وتعمل بالكامل، فلا ميزانية تطوير مطلوبة ولا خادم ولا كلفة تشغيل لكل مطالبة.</a:t>
+              <a:t>المنصّة مبنيّة ومُختبَرة وتعمل بالكامل، فلا ميزانية تطوير مطلوبة ولا خادم ولا كلفة تشغيل لكل طلب.</a:t>
             </a:r>
             <a:endParaRPr lang="en-US" sz="1500" dirty="0"/>
           </a:p>
@@ -9243,7 +9243,7 @@
                 <a:ea typeface="Arial" pitchFamily="34" charset="-122"/>
                 <a:cs typeface="Arial" pitchFamily="34" charset="-120"/>
               </a:rPr>
-              <a:t>المطلوب قرار تشغيلي واحد، وهو إدخال فحص سديد خطوةً إلزامية قبل إرسال المطالبة للضامن.</a:t>
+              <a:t>المطلوب قرار تشغيلي واحد، وهو إدخال فحص سديد خطوةً إلزامية قبل رفع الطلب للضامن.</a:t>
             </a:r>
             <a:endParaRPr lang="en-US" sz="1500" dirty="0"/>
           </a:p>
@@ -9392,7 +9392,7 @@
                 <a:ea typeface="Arial" pitchFamily="34" charset="-122"/>
                 <a:cs typeface="Arial" pitchFamily="34" charset="-120"/>
               </a:rPr>
-              <a:t>نتيجة الموافقة تحسم التحصيل، لا التفاوض بعدها</a:t>
+              <a:t>قرار الضامن يحسم الإيراد، لا التفاوض بعده</a:t>
             </a:r>
             <a:endParaRPr lang="en-US" sz="3200" dirty="0"/>
           </a:p>
@@ -9431,7 +9431,7 @@
                 <a:ea typeface="Arial" pitchFamily="34" charset="-122"/>
                 <a:cs typeface="Arial" pitchFamily="34" charset="-120"/>
               </a:rPr>
-              <a:t>نسبة المبلغ المحصَّل فعلياً من إجمالي الفاتورة، محسوبة من السجل التاريخي لكل نتيجة.</a:t>
+              <a:t>نسبة المبلغ المعتمد من إجمالي المبلغ المطلوب، محسوبة من السجل التاريخي لكل نتيجة قرار.</a:t>
             </a:r>
             <a:endParaRPr lang="en-US" sz="1400" dirty="0"/>
           </a:p>
@@ -9559,7 +9559,7 @@
                 <a:ea typeface="Arial" pitchFamily="34" charset="-122"/>
                 <a:cs typeface="Arial" pitchFamily="34" charset="-120"/>
               </a:rPr>
-              <a:t>من كل ريال يُفوتر لا يصل إلى الحساب</a:t>
+              <a:t>من كل ريال يُطلب لا يصدر اعتماده</a:t>
             </a:r>
             <a:endParaRPr lang="en-US" sz="1300" dirty="0"/>
           </a:p>
@@ -9664,7 +9664,7 @@
                 <a:ea typeface="Arial" pitchFamily="34" charset="-122"/>
                 <a:cs typeface="Arial" pitchFamily="34" charset="-120"/>
               </a:rPr>
-              <a:t>من المطالبات لا تصدر موافقتها كاملة</a:t>
+              <a:t>من الطلبات لا تصدر موافقتها كاملة</a:t>
             </a:r>
             <a:endParaRPr lang="en-US" sz="1100" dirty="0"/>
           </a:p>
@@ -9769,7 +9769,7 @@
                 <a:ea typeface="Arial" pitchFamily="34" charset="-122"/>
                 <a:cs typeface="Arial" pitchFamily="34" charset="-120"/>
               </a:rPr>
-              <a:t>فقط تُحصَّل من قيمة المطالبة غير المكتملة</a:t>
+              <a:t>فقط يُعتمد من قيمة الطلب غير المكتمل</a:t>
             </a:r>
             <a:endParaRPr lang="en-US" sz="1100" dirty="0"/>
           </a:p>
@@ -9874,7 +9874,7 @@
                 <a:ea typeface="Arial" pitchFamily="34" charset="-122"/>
                 <a:cs typeface="Arial" pitchFamily="34" charset="-120"/>
               </a:rPr>
-              <a:t>تُحصَّل من قيمة المطالبة المقبولة كاملة</a:t>
+              <a:t>يُعتمد من قيمة الطلب المعتمد كاملاً</a:t>
             </a:r>
             <a:endParaRPr lang="en-US" sz="1100" dirty="0"/>
           </a:p>
@@ -9913,7 +9913,7 @@
                 <a:ea typeface="Arial" pitchFamily="34" charset="-122"/>
                 <a:cs typeface="Arial" pitchFamily="34" charset="-120"/>
               </a:rPr>
-              <a:t>«الموافقة الجزئية» خسارة إيراد فعلية، إذ تُحصّل نصف الفاتورة تقريباً، ولذلك تُحسب مع الفئة الخاسرة في النموذج.</a:t>
+              <a:t>«الموافقة الجزئية» خسارة إيراد فعلية، إذ لا يُعتمد منها إلا نصف المبلغ المطلوب تقريباً، ولذلك تُحسب مع الفئة الخاسرة في النموذج.</a:t>
             </a:r>
             <a:endParaRPr lang="en-US" sz="950" dirty="0"/>
           </a:p>
@@ -10023,7 +10023,7 @@
                 <a:ea typeface="Arial" pitchFamily="34" charset="-122"/>
                 <a:cs typeface="Arial" pitchFamily="34" charset="-120"/>
               </a:rPr>
-              <a:t>نكتشف الخلل بعد أن يصير استئنافاً</a:t>
+              <a:t>نكتشف الخلل بعد أن يصدر الرفض</a:t>
             </a:r>
             <a:endParaRPr lang="en-US" sz="3200" dirty="0"/>
           </a:p>
@@ -10213,7 +10213,7 @@
                 <a:ea typeface="Arial" pitchFamily="34" charset="-122"/>
                 <a:cs typeface="Arial" pitchFamily="34" charset="-120"/>
               </a:rPr>
-              <a:t>تُرسَل المطالبة كما هي</a:t>
+              <a:t>يُرفَع الطلب كما هو</a:t>
             </a:r>
             <a:endParaRPr lang="en-US" sz="1200" dirty="0"/>
           </a:p>
@@ -10487,7 +10487,7 @@
                 <a:ea typeface="Arial" pitchFamily="34" charset="-122"/>
                 <a:cs typeface="Arial" pitchFamily="34" charset="-120"/>
               </a:rPr>
-              <a:t>يُفتَح ملف استئناف ويُجمَّع الناقص</a:t>
+              <a:t>يُجمَّع الناقص ويُعاد رفع الطلب</a:t>
             </a:r>
             <a:endParaRPr lang="en-US" sz="1200" dirty="0"/>
           </a:p>
@@ -10617,7 +10617,7 @@
                 <a:ea typeface="Arial" pitchFamily="34" charset="-122"/>
                 <a:cs typeface="Arial" pitchFamily="34" charset="-120"/>
               </a:rPr>
-              <a:t>تأخّر في التحصيل، وجزء يُشطب نهائياً</a:t>
+              <a:t>تأخّر في بدء الخدمة، وجزء يُرفض نهائياً</a:t>
             </a:r>
             <a:endParaRPr lang="en-US" sz="1200" dirty="0"/>
           </a:p>
@@ -11042,7 +11042,7 @@
                 <a:ea typeface="Arial" pitchFamily="34" charset="-122"/>
                 <a:cs typeface="Arial" pitchFamily="34" charset="-120"/>
               </a:rPr>
-              <a:t>يُستكمَل الناقص قبل الإرسال</a:t>
+              <a:t>يُستكمَل الناقص قبل الرفع</a:t>
             </a:r>
             <a:endParaRPr lang="en-US" sz="1200" dirty="0"/>
           </a:p>
@@ -11172,7 +11172,7 @@
                 <a:ea typeface="Arial" pitchFamily="34" charset="-122"/>
                 <a:cs typeface="Arial" pitchFamily="34" charset="-120"/>
               </a:rPr>
-              <a:t>تُرسَل مكتملة، بلا دورة استئناف</a:t>
+              <a:t>يُرفَع مكتملاً من أول مرّة</a:t>
             </a:r>
             <a:endParaRPr lang="en-US" sz="1200" dirty="0"/>
           </a:p>
@@ -11238,7 +11238,7 @@
                 <a:ea typeface="Arial" pitchFamily="34" charset="-122"/>
                 <a:cs typeface="Arial" pitchFamily="34" charset="-120"/>
               </a:rPr>
-              <a:t>التصحيح المسبق أرخص من الاستئناف، فهو لا يستهلك دورة مراجعة لدى الضامن ولا يؤخّر التدفّق النقدي.</a:t>
+              <a:t>التصحيح قبل الرفع أرخص من إعادة الطلب بعد الرفض، فهو لا يستهلك دورة مراجعة لدى الضامن ولا يؤخّر بدء الخدمة.</a:t>
             </a:r>
             <a:endParaRPr lang="en-US" sz="1400" dirty="0"/>
           </a:p>
@@ -11348,7 +11348,7 @@
                 <a:ea typeface="Arial" pitchFamily="34" charset="-122"/>
                 <a:cs typeface="Arial" pitchFamily="34" charset="-120"/>
               </a:rPr>
-              <a:t>ثلاث طبقات فوق المطالبة الواحدة</a:t>
+              <a:t>ثلاث طبقات فوق الطلب الواحد</a:t>
             </a:r>
             <a:endParaRPr lang="en-US" sz="3200" dirty="0"/>
           </a:p>
@@ -11387,7 +11387,7 @@
                 <a:ea typeface="Arial" pitchFamily="34" charset="-122"/>
                 <a:cs typeface="Arial" pitchFamily="34" charset="-120"/>
               </a:rPr>
-              <a:t>تعمل جميعها داخل المتصفّح، بلا خادم ولا واجهة برمجية، ولا تغادر بيانات المطالبة جهاز المستخدم.</a:t>
+              <a:t>تعمل جميعها داخل المتصفّح، بلا خادم ولا واجهة برمجية، ولا تغادر بيانات الطلب جهاز المستخدم.</a:t>
             </a:r>
             <a:endParaRPr lang="en-US" sz="1400" dirty="0"/>
           </a:p>
@@ -11566,7 +11566,7 @@
                 <a:ea typeface="Arial" pitchFamily="34" charset="-122"/>
                 <a:cs typeface="Arial" pitchFamily="34" charset="-120"/>
               </a:rPr>
-              <a:t>احتمال ألّا تصدر الموافقة كاملة، مقارَناً بالمعدّل العام، مع تقدير الإيراد المتوقّع والمبلغ المعرّض للخطر بالريال.</a:t>
+              <a:t>احتمال ألّا تصدر الموافقة كاملة، مقارَناً بالمعدّل العام، مع تقدير المبلغ المتوقّع اعتماده والمبلغ المعرّض للخطر بالريال.</a:t>
             </a:r>
             <a:endParaRPr lang="en-US" sz="1300" dirty="0"/>
           </a:p>
@@ -11784,7 +11784,7 @@
                 <a:ea typeface="Arial" pitchFamily="34" charset="-122"/>
                 <a:cs typeface="Arial" pitchFamily="34" charset="-120"/>
               </a:rPr>
-              <a:t>أرجح أسباب عدم الموافقة مرتّبة، ومع كل سبب إجراء تصحيحي محدّد يُنفَّذ قبل الإرسال، لا تنبيه مجرّد.</a:t>
+              <a:t>أرجح أسباب عدم الموافقة مرتّبة، ومع كل سبب إجراء تصحيحي محدّد يُنفَّذ قبل الرفع، لا تنبيه مجرّد.</a:t>
             </a:r>
             <a:endParaRPr lang="en-US" sz="1300" dirty="0"/>
           </a:p>
@@ -12224,7 +12224,7 @@
                 <a:ea typeface="Arial" pitchFamily="34" charset="-122"/>
                 <a:cs typeface="Arial" pitchFamily="34" charset="-120"/>
               </a:rPr>
-              <a:t>مخرَج واحد يفهمه موظّف التحصيل فوراً</a:t>
+              <a:t>مخرَج واحد يفهمه موظّف الموافقات فوراً</a:t>
             </a:r>
             <a:endParaRPr lang="en-US" sz="3200" dirty="0"/>
           </a:p>
@@ -12263,7 +12263,7 @@
                 <a:ea typeface="Arial" pitchFamily="34" charset="-122"/>
                 <a:cs typeface="Arial" pitchFamily="34" charset="-120"/>
               </a:rPr>
-              <a:t>لقطة فعلية من صفحة التنبؤ، بعد إدخال بيانات مطالبة واحدة قبل إرسالها.</a:t>
+              <a:t>لقطة فعلية من صفحة التنبؤ، بعد إدخال بيانات طلب واحد قبل رفعه للضامن.</a:t>
             </a:r>
             <a:endParaRPr lang="en-US" sz="1400" dirty="0"/>
           </a:p>
@@ -12271,7 +12271,7 @@
       </p:sp>
       <p:pic>
         <p:nvPicPr>
-          <p:cNvPr id="5" name="Image 0" descr="/home/user/RCM/docs/img/result.png">    </p:cNvPr>
+          <p:cNvPr id="5" name="Image 0" descr="../docs/img/result.png">    </p:cNvPr>
           <p:cNvPicPr>
             <a:picLocks noChangeAspect="1"/>
           </p:cNvPicPr>
@@ -12395,7 +12395,7 @@
                 <a:ea typeface="Arial" pitchFamily="34" charset="-122"/>
                 <a:cs typeface="Arial" pitchFamily="34" charset="-120"/>
               </a:rPr>
-              <a:t>89.6 بالمئة احتمال ألّا تصدر الموافقة كاملة، ومقارنته بالمعدّل العام للمطالبات.</a:t>
+              <a:t>89.6 بالمئة احتمال ألّا تصدر الموافقة كاملة، ومقارنته بالمعدّل العام لطلبات الموافقة.</a:t>
             </a:r>
             <a:endParaRPr lang="en-US" sz="1150" dirty="0"/>
           </a:p>
@@ -12503,7 +12503,7 @@
                 <a:ea typeface="Arial" pitchFamily="34" charset="-122"/>
                 <a:cs typeface="Arial" pitchFamily="34" charset="-120"/>
               </a:rPr>
-              <a:t>الإيراد المتوقّع تحصيله والمبلغ المعرّض للخطر، بلغة الإدارة المالية لا بلغة النموذج.</a:t>
+              <a:t>المبلغ المتوقّع اعتماده والمبلغ المعرّض للخطر، بلغة الإدارة المالية لا بلغة النموذج.</a:t>
             </a:r>
             <a:endParaRPr lang="en-US" sz="1150" dirty="0"/>
           </a:p>
@@ -12611,7 +12611,7 @@
                 <a:ea typeface="Arial" pitchFamily="34" charset="-122"/>
                 <a:cs typeface="Arial" pitchFamily="34" charset="-120"/>
               </a:rPr>
-              <a:t>إحالة مباشرة إلى الأسباب المرجّحة وإجرائها التصحيحي قبل الإرسال.</a:t>
+              <a:t>إحالة مباشرة إلى الأسباب المرجّحة وإجرائها التصحيحي قبل الرفع.</a:t>
             </a:r>
             <a:endParaRPr lang="en-US" sz="1150" dirty="0"/>
           </a:p>
@@ -12650,7 +12650,7 @@
                 <a:ea typeface="Arial" pitchFamily="34" charset="-122"/>
                 <a:cs typeface="Arial" pitchFamily="34" charset="-120"/>
               </a:rPr>
-              <a:t>المطالبة في المثال قيمتها 1,450 ريالاً، والمعرّض للخطر منها 1,196 ريالاً.</a:t>
+              <a:t>الطلب في المثال قيمته 1,450 ريالاً، والمعرّض للخطر منه 1,196 ريالاً.</a:t>
             </a:r>
             <a:endParaRPr lang="en-US" sz="950" dirty="0"/>
           </a:p>
@@ -12807,7 +12807,7 @@
       </p:sp>
       <p:pic>
         <p:nvPicPr>
-          <p:cNvPr id="5" name="Image 0" descr="/home/user/RCM/docs/img/case-card.png">    </p:cNvPr>
+          <p:cNvPr id="5" name="Image 0" descr="../docs/img/case-card.png">    </p:cNvPr>
           <p:cNvPicPr>
             <a:picLocks noChangeAspect="1"/>
           </p:cNvPicPr>
@@ -13088,7 +13088,7 @@
                 <a:ea typeface="Arial" pitchFamily="34" charset="-122"/>
                 <a:cs typeface="Arial" pitchFamily="34" charset="-120"/>
               </a:rPr>
-              <a:t>أرفق تقرير الطوارئ والتاريخ المرضي ونتائج التحاليل قبل الإرسال.</a:t>
+              <a:t>أرفق تقرير الطوارئ والتاريخ المرضي ونتائج التحاليل قبل الرفع.</a:t>
             </a:r>
             <a:endParaRPr lang="en-US" sz="1100" dirty="0"/>
           </a:p>
@@ -13500,7 +13500,7 @@
       </p:sp>
       <p:pic>
         <p:nvPicPr>
-          <p:cNvPr id="5" name="Image 0" descr="/home/user/RCM/docs/img/chat-analysis.png">    </p:cNvPr>
+          <p:cNvPr id="5" name="Image 0" descr="../docs/img/chat-analysis.png">    </p:cNvPr>
           <p:cNvPicPr>
             <a:picLocks noChangeAspect="1"/>
           </p:cNvPicPr>
@@ -14287,7 +14287,7 @@
                 <a:ea typeface="Arial" pitchFamily="34" charset="-122"/>
                 <a:cs typeface="Arial" pitchFamily="34" charset="-120"/>
               </a:rPr>
-              <a:t>من المطالبات الخاسرة تُلتقط</a:t>
+              <a:t>من الطلبات غير المكتملة تُلتقط</a:t>
             </a:r>
             <a:endParaRPr lang="en-US" sz="1100" dirty="0"/>
           </a:p>
@@ -14641,7 +14641,7 @@
                 <a:ea typeface="Arial" pitchFamily="34" charset="-122"/>
                 <a:cs typeface="Arial" pitchFamily="34" charset="-120"/>
               </a:rPr>
-              <a:t>مقيسة على 8,209 مطالبة من آخر الفترة لم يرها النموذج أثناء التدريب · عتبة القرار 0.45 مختارة على شريحة تحقّق منفصلة.</a:t>
+              <a:t>مقيسة على 8,209 طلبات من آخر الفترة لم يرها النموذج أثناء التدريب · عتبة القرار 0.45 مختارة على شريحة تحقّق منفصلة.</a:t>
             </a:r>
             <a:endParaRPr lang="en-US" sz="950" dirty="0"/>
           </a:p>

--- a/deck/سديد-عرض-تنفيذي.pptx
+++ b/deck/سديد-عرض-تنفيذي.pptx
@@ -1008,7 +1008,7 @@
           <a:p>
             <a:r>
               <a:rPr lang="en-US" dirty="0"/>
-              <a:t>افتتاحية: سديد يجيب عن سؤال واحد قبل رفع الطلب للضامن، وهو هل سيُعتمد بالكامل. المنصّة مبنيّة بالكامل وجاهزة، والعرض اليوم عن العائد لا عن التمويل.</a:t>
+              <a:t>افتتاحية: سديد يجيب عن سؤال واحد قبل رفع الطلب لشركة التأمين، وهو هل سيُعتمد بالكامل. المنصّة مبنيّة بالكامل وجاهزة، والعرض اليوم عن العائد لا عن التمويل.</a:t>
             </a:r>
             <a:endParaRPr lang="en-US" dirty="0"/>
           </a:p>
@@ -1800,7 +1800,7 @@
           <a:p>
             <a:r>
               <a:rPr lang="en-US" dirty="0"/>
-              <a:t>طبقة الإسناد النظامي هي ما يميّز سديد عن أداة تنبّؤ عادية، إذ تحوّل التنبّؤ إلى حجّة نظامية قابلة للاستعمال أمام الضامن.</a:t>
+              <a:t>طبقة الإسناد النظامي هي ما يميّز سديد عن أداة تنبّؤ عادية، إذ تحوّل التنبّؤ إلى حجّة نظامية قابلة للاستعمال أمام شركة التأمين.</a:t>
             </a:r>
             <a:endParaRPr lang="en-US" dirty="0"/>
           </a:p>
@@ -3254,7 +3254,7 @@
                 <a:ea typeface="Arial" pitchFamily="34" charset="-122"/>
                 <a:cs typeface="Arial" pitchFamily="34" charset="-120"/>
               </a:rPr>
-              <a:t>حذف كل عمود يُعرف بعد قرار الضامن</a:t>
+              <a:t>حذف كل عمود يُعرف بعد قرار شركة التأمين</a:t>
             </a:r>
             <a:endParaRPr lang="en-US" sz="1600" dirty="0"/>
           </a:p>
@@ -3475,7 +3475,7 @@
                 <a:ea typeface="Arial" pitchFamily="34" charset="-122"/>
                 <a:cs typeface="Arial" pitchFamily="34" charset="-120"/>
               </a:rPr>
-              <a:t>حُذف «حالة الفاتورة» رغم مساهمته بنحو 12.7 بالمئة من أهمية النموذج، لأنه قد يُحدَّث بعد قرار الضامن. كلّف ذلك نحو 3 نقاط دقّة.</a:t>
+              <a:t>حُذف «حالة الفاتورة» رغم مساهمته بنحو 12.7 بالمئة من أهمية النموذج، لأنه قد يُحدَّث بعد قرار شركة التأمين. كلّف ذلك نحو 3 نقاط دقّة.</a:t>
             </a:r>
             <a:endParaRPr lang="en-US" sz="1200" dirty="0"/>
           </a:p>
@@ -3974,7 +3974,7 @@
                 <a:ea typeface="Arial" pitchFamily="34" charset="-122"/>
                 <a:cs typeface="Arial" pitchFamily="34" charset="-120"/>
               </a:rPr>
-              <a:t>طلب يُرفَع للضامن</a:t>
+              <a:t>طلب يُرفَع لشركة التأمين</a:t>
             </a:r>
             <a:endParaRPr lang="en-US" sz="1300" dirty="0"/>
           </a:p>
@@ -7535,7 +7535,7 @@
                 <a:ea typeface="Arial" pitchFamily="34" charset="-122"/>
                 <a:cs typeface="Arial" pitchFamily="34" charset="-120"/>
               </a:rPr>
-              <a:t>يتدهور بتغيّر سياسات الضامنين</a:t>
+              <a:t>يتدهور بتغيّر سياسات شركات التأمين</a:t>
             </a:r>
             <a:endParaRPr lang="en-US" sz="1350" dirty="0"/>
           </a:p>
@@ -8767,7 +8767,7 @@
                 <a:ea typeface="Arial" pitchFamily="34" charset="-122"/>
                 <a:cs typeface="Arial" pitchFamily="34" charset="-120"/>
               </a:rPr>
-              <a:t>من قيمة ما يُطلب من الضامن لا يُعتمد</a:t>
+              <a:t>من قيمة ما يُطلب من شركة التأمين لا يُعتمد</a:t>
             </a:r>
             <a:endParaRPr lang="en-US" sz="1500" dirty="0"/>
           </a:p>
@@ -9243,7 +9243,7 @@
                 <a:ea typeface="Arial" pitchFamily="34" charset="-122"/>
                 <a:cs typeface="Arial" pitchFamily="34" charset="-120"/>
               </a:rPr>
-              <a:t>المطلوب قرار تشغيلي واحد، وهو إدخال فحص سديد خطوةً إلزامية قبل رفع الطلب للضامن.</a:t>
+              <a:t>المطلوب قرار تشغيلي واحد، وهو إدخال فحص سديد خطوةً إلزامية قبل رفع الطلب لشركة التأمين.</a:t>
             </a:r>
             <a:endParaRPr lang="en-US" sz="1500" dirty="0"/>
           </a:p>
@@ -9392,7 +9392,7 @@
                 <a:ea typeface="Arial" pitchFamily="34" charset="-122"/>
                 <a:cs typeface="Arial" pitchFamily="34" charset="-120"/>
               </a:rPr>
-              <a:t>قرار الضامن يحسم الإيراد، لا التفاوض بعده</a:t>
+              <a:t>قرار شركة التأمين يحسم الإيراد، لا التفاوض بعده</a:t>
             </a:r>
             <a:endParaRPr lang="en-US" sz="3200" dirty="0"/>
           </a:p>
@@ -10350,7 +10350,7 @@
                 <a:ea typeface="Arial" pitchFamily="34" charset="-122"/>
                 <a:cs typeface="Arial" pitchFamily="34" charset="-120"/>
               </a:rPr>
-              <a:t>يردّ الضامن بالرفض أو الخصم</a:t>
+              <a:t>تردّ شركة التأمين بالرفض أو الخصم</a:t>
             </a:r>
             <a:endParaRPr lang="en-US" sz="1200" dirty="0"/>
           </a:p>
@@ -11238,7 +11238,7 @@
                 <a:ea typeface="Arial" pitchFamily="34" charset="-122"/>
                 <a:cs typeface="Arial" pitchFamily="34" charset="-120"/>
               </a:rPr>
-              <a:t>التصحيح قبل الرفع أرخص من إعادة الطلب بعد الرفض، فهو لا يستهلك دورة مراجعة لدى الضامن ولا يؤخّر بدء الخدمة.</a:t>
+              <a:t>التصحيح قبل الرفع أرخص من إعادة الطلب بعد الرفض، فهو لا يستهلك دورة مراجعة لدى شركة التأمين ولا يؤخّر بدء الخدمة.</a:t>
             </a:r>
             <a:endParaRPr lang="en-US" sz="1400" dirty="0"/>
           </a:p>
@@ -12263,7 +12263,7 @@
                 <a:ea typeface="Arial" pitchFamily="34" charset="-122"/>
                 <a:cs typeface="Arial" pitchFamily="34" charset="-120"/>
               </a:rPr>
-              <a:t>لقطة فعلية من صفحة التنبؤ، بعد إدخال بيانات طلب واحد قبل رفعه للضامن.</a:t>
+              <a:t>لقطة فعلية من صفحة التنبؤ، بعد إدخال بيانات طلب واحد قبل رفعه لشركة التأمين.</a:t>
             </a:r>
             <a:endParaRPr lang="en-US" sz="1400" dirty="0"/>
           </a:p>
@@ -13453,7 +13453,7 @@
                 <a:ea typeface="Arial" pitchFamily="34" charset="-122"/>
                 <a:cs typeface="Arial" pitchFamily="34" charset="-120"/>
               </a:rPr>
-              <a:t>الحجّة أمام الضامن تحتاج نصّاً، لا رأياً</a:t>
+              <a:t>الحجّة أمام شركة التأمين تحتاج نصّاً، لا رأياً</a:t>
             </a:r>
             <a:endParaRPr lang="en-US" sz="3200" dirty="0"/>
           </a:p>

--- a/deck/سديد-عرض-تنفيذي.pptx
+++ b/deck/سديد-عرض-تنفيذي.pptx
@@ -19,9 +19,10 @@
     <p:sldId id="267" r:id="rId13"/>
     <p:sldId id="268" r:id="rId14"/>
     <p:sldId id="269" r:id="rId15"/>
+    <p:sldId id="270" r:id="rId16"/>
   </p:sldIdLst>
   <p:notesMasterIdLst>
-    <p:notesMasterId r:id="rId16"/>
+    <p:notesMasterId r:id="rId17"/>
   </p:notesMasterIdLst>
   <p:sldSz cx="12192000" cy="6858000"/>
   <p:notesSz cx="6858000" cy="12192000"/>
@@ -1448,7 +1449,7 @@
           <a:p>
             <a:r>
               <a:rPr lang="en-US" dirty="0"/>
-              <a:t>الطلب مقصود صغيراً: قرار تشغيلي واحد بلا ميزانية، ونتيجته تحسم التعميم من عدمه.</a:t>
+              <a:t>هذه الشريحة تحوّل الحدّين الأخيرين في الشريحة السابقة إلى خطة. لا تَعِد بتحسّن في الدقّة — المكسب المؤكّد هو قابلية التنفيذ، وهي التي ترفع سقف نسبة الإصلاح في نموذج العائد.</a:t>
             </a:r>
             <a:endParaRPr lang="en-US" dirty="0"/>
           </a:p>
@@ -1472,6 +1473,94 @@
             <a:fld id="{F7021451-1387-4CA6-816F-3879F97B5CBC}" type="slidenum">
               <a:rPr lang="en-US"/>
               <a:t>14</a:t>
+            </a:fld>
+            <a:endParaRPr lang="en-US"/>
+          </a:p>
+        </p:txBody>
+      </p:sp>
+    </p:spTree>
+    <p:extLst>
+      <p:ext uri="{BB962C8B-B14F-4D97-AF65-F5344CB8AC3E}">
+        <p14:creationId xmlns:p14="http://schemas.microsoft.com/office/powerpoint/2010/main" val="1024086991"/>
+      </p:ext>
+    </p:extLst>
+  </p:cSld>
+  <p:clrMapOvr>
+    <a:masterClrMapping/>
+  </p:clrMapOvr>
+</p:notes>
+</file>
+
+<file path=ppt/notesSlides/notesSlide15.xml><?xml version="1.0" encoding="utf-8"?>
+<p:notes xmlns:a="http://schemas.openxmlformats.org/drawingml/2006/main" xmlns:r="http://schemas.openxmlformats.org/officeDocument/2006/relationships" xmlns:p="http://schemas.openxmlformats.org/presentationml/2006/main">
+  <p:cSld>
+    <p:spTree>
+      <p:nvGrpSpPr>
+        <p:cNvPr id="1" name=""/>
+        <p:cNvGrpSpPr/>
+        <p:nvPr/>
+      </p:nvGrpSpPr>
+      <p:grpSpPr>
+        <a:xfrm>
+          <a:off x="0" y="0"/>
+          <a:ext cx="0" cy="0"/>
+          <a:chOff x="0" y="0"/>
+          <a:chExt cx="0" cy="0"/>
+        </a:xfrm>
+      </p:grpSpPr>
+      <p:sp>
+        <p:nvSpPr>
+          <p:cNvPr id="2" name="Slide Image Placeholder 1"/>
+          <p:cNvSpPr>
+            <a:spLocks noGrp="1" noRot="1" noChangeAspect="1"/>
+          </p:cNvSpPr>
+          <p:nvPr>
+            <p:ph type="sldImg"/>
+          </p:nvPr>
+        </p:nvSpPr>
+        <p:spPr/>
+      </p:sp>
+      <p:sp>
+        <p:nvSpPr>
+          <p:cNvPr id="3" name="Notes Placeholder 2"/>
+          <p:cNvSpPr>
+            <a:spLocks noGrp="1"/>
+          </p:cNvSpPr>
+          <p:nvPr>
+            <p:ph type="body" idx="1"/>
+          </p:nvPr>
+        </p:nvSpPr>
+        <p:spPr/>
+        <p:txBody>
+          <a:bodyPr/>
+          <a:lstStyle/>
+          <a:p>
+            <a:r>
+              <a:rPr lang="en-US" dirty="0"/>
+              <a:t>الطلب مقصود صغيراً: قرار تشغيلي واحد بلا ميزانية، ونتيجته تحسم التعميم من عدمه.</a:t>
+            </a:r>
+            <a:endParaRPr lang="en-US" dirty="0"/>
+          </a:p>
+        </p:txBody>
+      </p:sp>
+      <p:sp>
+        <p:nvSpPr>
+          <p:cNvPr id="4" name="Slide Number Placeholder 3"/>
+          <p:cNvSpPr>
+            <a:spLocks noGrp="1"/>
+          </p:cNvSpPr>
+          <p:nvPr>
+            <p:ph type="sldNum" sz="quarter" idx="10"/>
+          </p:nvPr>
+        </p:nvSpPr>
+        <p:spPr/>
+        <p:txBody>
+          <a:bodyPr/>
+          <a:lstStyle/>
+          <a:p>
+            <a:fld id="{F7021451-1387-4CA6-816F-3879F97B5CBC}" type="slidenum">
+              <a:rPr lang="en-US"/>
+              <a:t>15</a:t>
             </a:fld>
             <a:endParaRPr lang="en-US"/>
           </a:p>
@@ -3117,7 +3206,7 @@
                 <a:ea typeface="Arial" pitchFamily="34" charset="-122"/>
                 <a:cs typeface="Arial" pitchFamily="34" charset="-120"/>
               </a:rPr>
-              <a:t>التدريب على الفترة الأقدم والاختبار على الأحدث، وهو تقييم أقسى من التقسيم العشوائي الذي يبالغ عادةً في تقدير الأداء.</a:t>
+              <a:t>32,833 طلباً للتدريب من الفترة الأقدم، و8,209 للاختبار من الأحدث. تقييم أقسى من التقسيم العشوائي الذي يبالغ عادةً في تقدير الأداء.</a:t>
             </a:r>
             <a:endParaRPr lang="en-US" sz="1200" dirty="0"/>
           </a:p>
@@ -3712,7 +3801,7 @@
               <a:buNone/>
             </a:pPr>
             <a:r>
-              <a:rPr lang="en-US" sz="1350" b="1" dirty="0">
+              <a:rPr lang="en-US" sz="1250" b="1" dirty="0">
                 <a:solidFill>
                   <a:srgbClr val="12384F"/>
                 </a:solidFill>
@@ -3720,9 +3809,9 @@
                 <a:ea typeface="Arial" pitchFamily="34" charset="-122"/>
                 <a:cs typeface="Arial" pitchFamily="34" charset="-120"/>
               </a:rPr>
-              <a:t>الرقم المعروض هو ما ينبغي توقّعه عند التشغيل، لا سقفاً مثالياً في المختبر.</a:t>
-            </a:r>
-            <a:endParaRPr lang="en-US" sz="1350" dirty="0"/>
+              <a:t>والنموذج المنشور أُعيد تدريبه على 41,042 طلباً كاملةً بعد تثبيت المعاملات، فالأرقام المعروضة تقدير متحفّظ لأدائه لا مبالغة فيه.</a:t>
+            </a:r>
+            <a:endParaRPr lang="en-US" sz="1250" dirty="0"/>
           </a:p>
         </p:txBody>
       </p:sp>
@@ -6797,12 +6886,12 @@
         </p:nvSpPr>
         <p:spPr>
           <a:xfrm>
-            <a:off x="6199632" y="1737360"/>
-            <a:ext cx="5404104" cy="4160520"/>
+            <a:off x="6199632" y="1691640"/>
+            <a:ext cx="5404104" cy="4370832"/>
           </a:xfrm>
           <a:prstGeom prst="roundRect">
             <a:avLst>
-              <a:gd name="adj" fmla="val 1319"/>
+              <a:gd name="adj" fmla="val 1255"/>
             </a:avLst>
           </a:prstGeom>
           <a:solidFill>
@@ -6831,24 +6920,24 @@
         </p:nvSpPr>
         <p:spPr>
           <a:xfrm>
-            <a:off x="6455664" y="1901952"/>
-            <a:ext cx="4892040" cy="365760"/>
-          </a:xfrm>
-          <a:prstGeom prst="rect">
-            <a:avLst/>
-          </a:prstGeom>
-          <a:noFill/>
-          <a:ln/>
-        </p:spPr>
-        <p:txBody>
-          <a:bodyPr wrap="square" lIns="0" tIns="0" rIns="0" bIns="0" rtlCol="0" anchor="ctr"/>
-          <a:lstStyle/>
-          <a:p>
-            <a:pPr rtl="1" algn="r" indent="0" marL="0">
-              <a:buNone/>
-            </a:pPr>
-            <a:r>
-              <a:rPr lang="en-US" sz="2000" b="1" dirty="0">
+            <a:off x="6455664" y="1828800"/>
+            <a:ext cx="4892040" cy="347472"/>
+          </a:xfrm>
+          <a:prstGeom prst="rect">
+            <a:avLst/>
+          </a:prstGeom>
+          <a:noFill/>
+          <a:ln/>
+        </p:spPr>
+        <p:txBody>
+          <a:bodyPr wrap="square" lIns="0" tIns="0" rIns="0" bIns="0" rtlCol="0" anchor="ctr"/>
+          <a:lstStyle/>
+          <a:p>
+            <a:pPr rtl="1" algn="r" indent="0" marL="0">
+              <a:buNone/>
+            </a:pPr>
+            <a:r>
+              <a:rPr lang="en-US" sz="1900" b="1" dirty="0">
                 <a:solidFill>
                   <a:srgbClr val="0B7A5E"/>
                 </a:solidFill>
@@ -6858,7 +6947,7 @@
               </a:rPr>
               <a:t>التكلفة</a:t>
             </a:r>
-            <a:endParaRPr lang="en-US" sz="2000" dirty="0"/>
+            <a:endParaRPr lang="en-US" sz="1900" dirty="0"/>
           </a:p>
         </p:txBody>
       </p:sp>
@@ -6870,24 +6959,24 @@
         </p:nvSpPr>
         <p:spPr>
           <a:xfrm>
-            <a:off x="6455664" y="2414016"/>
-            <a:ext cx="4892040" cy="274320"/>
-          </a:xfrm>
-          <a:prstGeom prst="rect">
-            <a:avLst/>
-          </a:prstGeom>
-          <a:noFill/>
-          <a:ln/>
-        </p:spPr>
-        <p:txBody>
-          <a:bodyPr wrap="square" lIns="0" tIns="0" rIns="0" bIns="0" rtlCol="0" anchor="ctr"/>
-          <a:lstStyle/>
-          <a:p>
-            <a:pPr rtl="1" algn="r" indent="0" marL="0">
-              <a:buNone/>
-            </a:pPr>
-            <a:r>
-              <a:rPr lang="en-US" sz="1350" b="1" dirty="0">
+            <a:off x="6455664" y="2286000"/>
+            <a:ext cx="4892040" cy="256032"/>
+          </a:xfrm>
+          <a:prstGeom prst="rect">
+            <a:avLst/>
+          </a:prstGeom>
+          <a:noFill/>
+          <a:ln/>
+        </p:spPr>
+        <p:txBody>
+          <a:bodyPr wrap="square" lIns="0" tIns="0" rIns="0" bIns="0" rtlCol="0" anchor="ctr"/>
+          <a:lstStyle/>
+          <a:p>
+            <a:pPr rtl="1" algn="r" indent="0" marL="0">
+              <a:buNone/>
+            </a:pPr>
+            <a:r>
+              <a:rPr lang="en-US" sz="1250" b="1" dirty="0">
                 <a:solidFill>
                   <a:srgbClr val="12384F"/>
                 </a:solidFill>
@@ -6897,7 +6986,7 @@
               </a:rPr>
               <a:t>لا ميزانية تطوير</a:t>
             </a:r>
-            <a:endParaRPr lang="en-US" sz="1350" dirty="0"/>
+            <a:endParaRPr lang="en-US" sz="1250" dirty="0"/>
           </a:p>
         </p:txBody>
       </p:sp>
@@ -6909,8 +6998,8 @@
         </p:nvSpPr>
         <p:spPr>
           <a:xfrm>
-            <a:off x="6455664" y="2706624"/>
-            <a:ext cx="4892040" cy="512064"/>
+            <a:off x="6455664" y="2551176"/>
+            <a:ext cx="4892040" cy="457200"/>
           </a:xfrm>
           <a:prstGeom prst="rect">
             <a:avLst/>
@@ -6924,12 +7013,12 @@
           <a:p>
             <a:pPr rtl="1" algn="r" indent="0" marL="0">
               <a:lnSpc>
-                <a:spcPct val="120000"/>
+                <a:spcPct val="118000"/>
               </a:lnSpc>
               <a:buNone/>
             </a:pPr>
             <a:r>
-              <a:rPr lang="en-US" sz="1150" dirty="0">
+              <a:rPr lang="en-US" sz="1050" dirty="0">
                 <a:solidFill>
                   <a:srgbClr val="4E657A"/>
                 </a:solidFill>
@@ -6939,7 +7028,7 @@
               </a:rPr>
               <a:t>المنصّة مبنيّة ومُختبَرة ومُوثَّقة بالكامل.</a:t>
             </a:r>
-            <a:endParaRPr lang="en-US" sz="1150" dirty="0"/>
+            <a:endParaRPr lang="en-US" sz="1050" dirty="0"/>
           </a:p>
         </p:txBody>
       </p:sp>
@@ -6951,24 +7040,24 @@
         </p:nvSpPr>
         <p:spPr>
           <a:xfrm>
-            <a:off x="6455664" y="3282696"/>
-            <a:ext cx="4892040" cy="274320"/>
-          </a:xfrm>
-          <a:prstGeom prst="rect">
-            <a:avLst/>
-          </a:prstGeom>
-          <a:noFill/>
-          <a:ln/>
-        </p:spPr>
-        <p:txBody>
-          <a:bodyPr wrap="square" lIns="0" tIns="0" rIns="0" bIns="0" rtlCol="0" anchor="ctr"/>
-          <a:lstStyle/>
-          <a:p>
-            <a:pPr rtl="1" algn="r" indent="0" marL="0">
-              <a:buNone/>
-            </a:pPr>
-            <a:r>
-              <a:rPr lang="en-US" sz="1350" b="1" dirty="0">
+            <a:off x="6455664" y="3035808"/>
+            <a:ext cx="4892040" cy="256032"/>
+          </a:xfrm>
+          <a:prstGeom prst="rect">
+            <a:avLst/>
+          </a:prstGeom>
+          <a:noFill/>
+          <a:ln/>
+        </p:spPr>
+        <p:txBody>
+          <a:bodyPr wrap="square" lIns="0" tIns="0" rIns="0" bIns="0" rtlCol="0" anchor="ctr"/>
+          <a:lstStyle/>
+          <a:p>
+            <a:pPr rtl="1" algn="r" indent="0" marL="0">
+              <a:buNone/>
+            </a:pPr>
+            <a:r>
+              <a:rPr lang="en-US" sz="1250" b="1" dirty="0">
                 <a:solidFill>
                   <a:srgbClr val="12384F"/>
                 </a:solidFill>
@@ -6978,7 +7067,7 @@
               </a:rPr>
               <a:t>لا كلفة بنية تحتية</a:t>
             </a:r>
-            <a:endParaRPr lang="en-US" sz="1350" dirty="0"/>
+            <a:endParaRPr lang="en-US" sz="1250" dirty="0"/>
           </a:p>
         </p:txBody>
       </p:sp>
@@ -6990,8 +7079,8 @@
         </p:nvSpPr>
         <p:spPr>
           <a:xfrm>
-            <a:off x="6455664" y="3575304"/>
-            <a:ext cx="4892040" cy="512064"/>
+            <a:off x="6455664" y="3300984"/>
+            <a:ext cx="4892040" cy="457200"/>
           </a:xfrm>
           <a:prstGeom prst="rect">
             <a:avLst/>
@@ -7005,12 +7094,12 @@
           <a:p>
             <a:pPr rtl="1" algn="r" indent="0" marL="0">
               <a:lnSpc>
-                <a:spcPct val="120000"/>
+                <a:spcPct val="118000"/>
               </a:lnSpc>
               <a:buNone/>
             </a:pPr>
             <a:r>
-              <a:rPr lang="en-US" sz="1150" dirty="0">
+              <a:rPr lang="en-US" sz="1050" dirty="0">
                 <a:solidFill>
                   <a:srgbClr val="4E657A"/>
                 </a:solidFill>
@@ -7020,7 +7109,7 @@
               </a:rPr>
               <a:t>تعمل داخل المتصفّح، بلا خادم ولا قاعدة بيانات ولا كلفة لكل طلب.</a:t>
             </a:r>
-            <a:endParaRPr lang="en-US" sz="1150" dirty="0"/>
+            <a:endParaRPr lang="en-US" sz="1050" dirty="0"/>
           </a:p>
         </p:txBody>
       </p:sp>
@@ -7032,24 +7121,24 @@
         </p:nvSpPr>
         <p:spPr>
           <a:xfrm>
-            <a:off x="6455664" y="4151376"/>
-            <a:ext cx="4892040" cy="274320"/>
-          </a:xfrm>
-          <a:prstGeom prst="rect">
-            <a:avLst/>
-          </a:prstGeom>
-          <a:noFill/>
-          <a:ln/>
-        </p:spPr>
-        <p:txBody>
-          <a:bodyPr wrap="square" lIns="0" tIns="0" rIns="0" bIns="0" rtlCol="0" anchor="ctr"/>
-          <a:lstStyle/>
-          <a:p>
-            <a:pPr rtl="1" algn="r" indent="0" marL="0">
-              <a:buNone/>
-            </a:pPr>
-            <a:r>
-              <a:rPr lang="en-US" sz="1350" b="1" dirty="0">
+            <a:off x="6455664" y="3785616"/>
+            <a:ext cx="4892040" cy="256032"/>
+          </a:xfrm>
+          <a:prstGeom prst="rect">
+            <a:avLst/>
+          </a:prstGeom>
+          <a:noFill/>
+          <a:ln/>
+        </p:spPr>
+        <p:txBody>
+          <a:bodyPr wrap="square" lIns="0" tIns="0" rIns="0" bIns="0" rtlCol="0" anchor="ctr"/>
+          <a:lstStyle/>
+          <a:p>
+            <a:pPr rtl="1" algn="r" indent="0" marL="0">
+              <a:buNone/>
+            </a:pPr>
+            <a:r>
+              <a:rPr lang="en-US" sz="1250" b="1" dirty="0">
                 <a:solidFill>
                   <a:srgbClr val="12384F"/>
                 </a:solidFill>
@@ -7059,7 +7148,7 @@
               </a:rPr>
               <a:t>لا مخاطرة خصوصية</a:t>
             </a:r>
-            <a:endParaRPr lang="en-US" sz="1350" dirty="0"/>
+            <a:endParaRPr lang="en-US" sz="1250" dirty="0"/>
           </a:p>
         </p:txBody>
       </p:sp>
@@ -7071,8 +7160,8 @@
         </p:nvSpPr>
         <p:spPr>
           <a:xfrm>
-            <a:off x="6455664" y="4443984"/>
-            <a:ext cx="4892040" cy="512064"/>
+            <a:off x="6455664" y="4050792"/>
+            <a:ext cx="4892040" cy="457200"/>
           </a:xfrm>
           <a:prstGeom prst="rect">
             <a:avLst/>
@@ -7086,12 +7175,12 @@
           <a:p>
             <a:pPr rtl="1" algn="r" indent="0" marL="0">
               <a:lnSpc>
-                <a:spcPct val="120000"/>
+                <a:spcPct val="118000"/>
               </a:lnSpc>
               <a:buNone/>
             </a:pPr>
             <a:r>
-              <a:rPr lang="en-US" sz="1150" dirty="0">
+              <a:rPr lang="en-US" sz="1050" dirty="0">
                 <a:solidFill>
                   <a:srgbClr val="4E657A"/>
                 </a:solidFill>
@@ -7101,7 +7190,7 @@
               </a:rPr>
               <a:t>بيانات الطلب لا تغادر جهاز المستخدم، ولا يستعمل النموذج أي معرّف شخصي.</a:t>
             </a:r>
-            <a:endParaRPr lang="en-US" sz="1150" dirty="0"/>
+            <a:endParaRPr lang="en-US" sz="1050" dirty="0"/>
           </a:p>
         </p:txBody>
       </p:sp>
@@ -7113,24 +7202,24 @@
         </p:nvSpPr>
         <p:spPr>
           <a:xfrm>
-            <a:off x="6455664" y="5020056"/>
-            <a:ext cx="4892040" cy="274320"/>
-          </a:xfrm>
-          <a:prstGeom prst="rect">
-            <a:avLst/>
-          </a:prstGeom>
-          <a:noFill/>
-          <a:ln/>
-        </p:spPr>
-        <p:txBody>
-          <a:bodyPr wrap="square" lIns="0" tIns="0" rIns="0" bIns="0" rtlCol="0" anchor="ctr"/>
-          <a:lstStyle/>
-          <a:p>
-            <a:pPr rtl="1" algn="r" indent="0" marL="0">
-              <a:buNone/>
-            </a:pPr>
-            <a:r>
-              <a:rPr lang="en-US" sz="1350" b="1" dirty="0">
+            <a:off x="6455664" y="4535424"/>
+            <a:ext cx="4892040" cy="256032"/>
+          </a:xfrm>
+          <a:prstGeom prst="rect">
+            <a:avLst/>
+          </a:prstGeom>
+          <a:noFill/>
+          <a:ln/>
+        </p:spPr>
+        <p:txBody>
+          <a:bodyPr wrap="square" lIns="0" tIns="0" rIns="0" bIns="0" rtlCol="0" anchor="ctr"/>
+          <a:lstStyle/>
+          <a:p>
+            <a:pPr rtl="1" algn="r" indent="0" marL="0">
+              <a:buNone/>
+            </a:pPr>
+            <a:r>
+              <a:rPr lang="en-US" sz="1250" b="1" dirty="0">
                 <a:solidFill>
                   <a:srgbClr val="12384F"/>
                 </a:solidFill>
@@ -7140,7 +7229,7 @@
               </a:rPr>
               <a:t>الكلفة الوحيدة هي وقت المراجعة</a:t>
             </a:r>
-            <a:endParaRPr lang="en-US" sz="1350" dirty="0"/>
+            <a:endParaRPr lang="en-US" sz="1250" dirty="0"/>
           </a:p>
         </p:txBody>
       </p:sp>
@@ -7152,8 +7241,8 @@
         </p:nvSpPr>
         <p:spPr>
           <a:xfrm>
-            <a:off x="6455664" y="5312664"/>
-            <a:ext cx="4892040" cy="512064"/>
+            <a:off x="6455664" y="4800600"/>
+            <a:ext cx="4892040" cy="457200"/>
           </a:xfrm>
           <a:prstGeom prst="rect">
             <a:avLst/>
@@ -7167,12 +7256,12 @@
           <a:p>
             <a:pPr rtl="1" algn="r" indent="0" marL="0">
               <a:lnSpc>
-                <a:spcPct val="120000"/>
+                <a:spcPct val="118000"/>
               </a:lnSpc>
               <a:buNone/>
             </a:pPr>
             <a:r>
-              <a:rPr lang="en-US" sz="1150" dirty="0">
+              <a:rPr lang="en-US" sz="1050" dirty="0">
                 <a:solidFill>
                   <a:srgbClr val="4E657A"/>
                 </a:solidFill>
@@ -7182,24 +7271,105 @@
               </a:rPr>
               <a:t>يُعلَّم 516 من كل 1,000 طلب للمراجعة قبل الرفع، والعتبة قابلة للرفع لتضييق هذا العدد.</a:t>
             </a:r>
-            <a:endParaRPr lang="en-US" sz="1150" dirty="0"/>
-          </a:p>
-        </p:txBody>
-      </p:sp>
-      <p:sp>
-        <p:nvSpPr>
-          <p:cNvPr id="15" name="Shape 13"/>
-          <p:cNvSpPr/>
-          <p:nvPr/>
-        </p:nvSpPr>
-        <p:spPr>
-          <a:xfrm>
-            <a:off x="576072" y="1737360"/>
-            <a:ext cx="5404104" cy="4160520"/>
+            <a:endParaRPr lang="en-US" sz="1050" dirty="0"/>
+          </a:p>
+        </p:txBody>
+      </p:sp>
+      <p:sp>
+        <p:nvSpPr>
+          <p:cNvPr id="15" name="Text 13"/>
+          <p:cNvSpPr/>
+          <p:nvPr/>
+        </p:nvSpPr>
+        <p:spPr>
+          <a:xfrm>
+            <a:off x="6455664" y="5285232"/>
+            <a:ext cx="4892040" cy="256032"/>
+          </a:xfrm>
+          <a:prstGeom prst="rect">
+            <a:avLst/>
+          </a:prstGeom>
+          <a:noFill/>
+          <a:ln/>
+        </p:spPr>
+        <p:txBody>
+          <a:bodyPr wrap="square" lIns="0" tIns="0" rIns="0" bIns="0" rtlCol="0" anchor="ctr"/>
+          <a:lstStyle/>
+          <a:p>
+            <a:pPr rtl="1" algn="r" indent="0" marL="0">
+              <a:buNone/>
+            </a:pPr>
+            <a:r>
+              <a:rPr lang="en-US" sz="1250" b="1" dirty="0">
+                <a:solidFill>
+                  <a:srgbClr val="12384F"/>
+                </a:solidFill>
+                <a:latin typeface="Arial" pitchFamily="34" charset="0"/>
+                <a:ea typeface="Arial" pitchFamily="34" charset="-122"/>
+                <a:cs typeface="Arial" pitchFamily="34" charset="-120"/>
+              </a:rPr>
+              <a:t>لا كلفة لإعادة التدريب</a:t>
+            </a:r>
+            <a:endParaRPr lang="en-US" sz="1250" dirty="0"/>
+          </a:p>
+        </p:txBody>
+      </p:sp>
+      <p:sp>
+        <p:nvSpPr>
+          <p:cNvPr id="16" name="Text 14"/>
+          <p:cNvSpPr/>
+          <p:nvPr/>
+        </p:nvSpPr>
+        <p:spPr>
+          <a:xfrm>
+            <a:off x="6455664" y="5550408"/>
+            <a:ext cx="4892040" cy="457200"/>
+          </a:xfrm>
+          <a:prstGeom prst="rect">
+            <a:avLst/>
+          </a:prstGeom>
+          <a:noFill/>
+          <a:ln/>
+        </p:spPr>
+        <p:txBody>
+          <a:bodyPr wrap="square" lIns="0" tIns="0" rIns="0" bIns="0" rtlCol="0" anchor="ctr"/>
+          <a:lstStyle/>
+          <a:p>
+            <a:pPr rtl="1" algn="r" indent="0" marL="0">
+              <a:lnSpc>
+                <a:spcPct val="118000"/>
+              </a:lnSpc>
+              <a:buNone/>
+            </a:pPr>
+            <a:r>
+              <a:rPr lang="en-US" sz="1050" dirty="0">
+                <a:solidFill>
+                  <a:srgbClr val="4E657A"/>
+                </a:solidFill>
+                <a:latin typeface="Arial" pitchFamily="34" charset="0"/>
+                <a:ea typeface="Arial" pitchFamily="34" charset="-122"/>
+                <a:cs typeface="Arial" pitchFamily="34" charset="-120"/>
+              </a:rPr>
+              <a:t>إجراء مؤتمت بأمر واحد على البيانات الجديدة، بلا تدخّل هندسي.</a:t>
+            </a:r>
+            <a:endParaRPr lang="en-US" sz="1050" dirty="0"/>
+          </a:p>
+        </p:txBody>
+      </p:sp>
+      <p:sp>
+        <p:nvSpPr>
+          <p:cNvPr id="17" name="Shape 15"/>
+          <p:cNvSpPr/>
+          <p:nvPr/>
+        </p:nvSpPr>
+        <p:spPr>
+          <a:xfrm>
+            <a:off x="576072" y="1691640"/>
+            <a:ext cx="5404104" cy="4370832"/>
           </a:xfrm>
           <a:prstGeom prst="roundRect">
             <a:avLst>
-              <a:gd name="adj" fmla="val 1319"/>
+              <a:gd name="adj" fmla="val 1255"/>
             </a:avLst>
           </a:prstGeom>
           <a:solidFill>
@@ -7222,30 +7392,30 @@
       </p:sp>
       <p:sp>
         <p:nvSpPr>
-          <p:cNvPr id="16" name="Text 14"/>
-          <p:cNvSpPr/>
-          <p:nvPr/>
-        </p:nvSpPr>
-        <p:spPr>
-          <a:xfrm>
-            <a:off x="832104" y="1901952"/>
-            <a:ext cx="4892040" cy="365760"/>
-          </a:xfrm>
-          <a:prstGeom prst="rect">
-            <a:avLst/>
-          </a:prstGeom>
-          <a:noFill/>
-          <a:ln/>
-        </p:spPr>
-        <p:txBody>
-          <a:bodyPr wrap="square" lIns="0" tIns="0" rIns="0" bIns="0" rtlCol="0" anchor="ctr"/>
-          <a:lstStyle/>
-          <a:p>
-            <a:pPr rtl="1" algn="r" indent="0" marL="0">
-              <a:buNone/>
-            </a:pPr>
-            <a:r>
-              <a:rPr lang="en-US" sz="2000" b="1" dirty="0">
+          <p:cNvPr id="18" name="Text 16"/>
+          <p:cNvSpPr/>
+          <p:nvPr/>
+        </p:nvSpPr>
+        <p:spPr>
+          <a:xfrm>
+            <a:off x="832104" y="1828800"/>
+            <a:ext cx="4892040" cy="347472"/>
+          </a:xfrm>
+          <a:prstGeom prst="rect">
+            <a:avLst/>
+          </a:prstGeom>
+          <a:noFill/>
+          <a:ln/>
+        </p:spPr>
+        <p:txBody>
+          <a:bodyPr wrap="square" lIns="0" tIns="0" rIns="0" bIns="0" rtlCol="0" anchor="ctr"/>
+          <a:lstStyle/>
+          <a:p>
+            <a:pPr rtl="1" algn="r" indent="0" marL="0">
+              <a:buNone/>
+            </a:pPr>
+            <a:r>
+              <a:rPr lang="en-US" sz="1900" b="1" dirty="0">
                 <a:solidFill>
                   <a:srgbClr val="96590F"/>
                 </a:solidFill>
@@ -7255,36 +7425,36 @@
               </a:rPr>
               <a:t>الحدود</a:t>
             </a:r>
-            <a:endParaRPr lang="en-US" sz="2000" dirty="0"/>
-          </a:p>
-        </p:txBody>
-      </p:sp>
-      <p:sp>
-        <p:nvSpPr>
-          <p:cNvPr id="17" name="Text 15"/>
-          <p:cNvSpPr/>
-          <p:nvPr/>
-        </p:nvSpPr>
-        <p:spPr>
-          <a:xfrm>
-            <a:off x="832104" y="2414016"/>
-            <a:ext cx="4892040" cy="274320"/>
-          </a:xfrm>
-          <a:prstGeom prst="rect">
-            <a:avLst/>
-          </a:prstGeom>
-          <a:noFill/>
-          <a:ln/>
-        </p:spPr>
-        <p:txBody>
-          <a:bodyPr wrap="square" lIns="0" tIns="0" rIns="0" bIns="0" rtlCol="0" anchor="ctr"/>
-          <a:lstStyle/>
-          <a:p>
-            <a:pPr rtl="1" algn="r" indent="0" marL="0">
-              <a:buNone/>
-            </a:pPr>
-            <a:r>
-              <a:rPr lang="en-US" sz="1350" b="1" dirty="0">
+            <a:endParaRPr lang="en-US" sz="1900" dirty="0"/>
+          </a:p>
+        </p:txBody>
+      </p:sp>
+      <p:sp>
+        <p:nvSpPr>
+          <p:cNvPr id="19" name="Text 17"/>
+          <p:cNvSpPr/>
+          <p:nvPr/>
+        </p:nvSpPr>
+        <p:spPr>
+          <a:xfrm>
+            <a:off x="832104" y="2286000"/>
+            <a:ext cx="4892040" cy="256032"/>
+          </a:xfrm>
+          <a:prstGeom prst="rect">
+            <a:avLst/>
+          </a:prstGeom>
+          <a:noFill/>
+          <a:ln/>
+        </p:spPr>
+        <p:txBody>
+          <a:bodyPr wrap="square" lIns="0" tIns="0" rIns="0" bIns="0" rtlCol="0" anchor="ctr"/>
+          <a:lstStyle/>
+          <a:p>
+            <a:pPr rtl="1" algn="r" indent="0" marL="0">
+              <a:buNone/>
+            </a:pPr>
+            <a:r>
+              <a:rPr lang="en-US" sz="1250" b="1" dirty="0">
                 <a:solidFill>
                   <a:srgbClr val="12384F"/>
                 </a:solidFill>
@@ -7294,20 +7464,20 @@
               </a:rPr>
               <a:t>مساعد قرار لا بديل عن المراجعة</a:t>
             </a:r>
-            <a:endParaRPr lang="en-US" sz="1350" dirty="0"/>
-          </a:p>
-        </p:txBody>
-      </p:sp>
-      <p:sp>
-        <p:nvSpPr>
-          <p:cNvPr id="18" name="Text 16"/>
-          <p:cNvSpPr/>
-          <p:nvPr/>
-        </p:nvSpPr>
-        <p:spPr>
-          <a:xfrm>
-            <a:off x="832104" y="2706624"/>
-            <a:ext cx="4892040" cy="512064"/>
+            <a:endParaRPr lang="en-US" sz="1250" dirty="0"/>
+          </a:p>
+        </p:txBody>
+      </p:sp>
+      <p:sp>
+        <p:nvSpPr>
+          <p:cNvPr id="20" name="Text 18"/>
+          <p:cNvSpPr/>
+          <p:nvPr/>
+        </p:nvSpPr>
+        <p:spPr>
+          <a:xfrm>
+            <a:off x="832104" y="2551176"/>
+            <a:ext cx="4892040" cy="457200"/>
           </a:xfrm>
           <a:prstGeom prst="rect">
             <a:avLst/>
@@ -7321,12 +7491,12 @@
           <a:p>
             <a:pPr rtl="1" algn="r" indent="0" marL="0">
               <a:lnSpc>
-                <a:spcPct val="120000"/>
+                <a:spcPct val="118000"/>
               </a:lnSpc>
               <a:buNone/>
             </a:pPr>
             <a:r>
-              <a:rPr lang="en-US" sz="1150" dirty="0">
+              <a:rPr lang="en-US" sz="1050" dirty="0">
                 <a:solidFill>
                   <a:srgbClr val="4E657A"/>
                 </a:solidFill>
@@ -7334,38 +7504,38 @@
                 <a:ea typeface="Arial" pitchFamily="34" charset="-122"/>
                 <a:cs typeface="Arial" pitchFamily="34" charset="-120"/>
               </a:rPr>
-              <a:t>لا يُتّخذ قرار برفض خدمة لمريض بناءً عليه إطلاقاً.</a:t>
-            </a:r>
-            <a:endParaRPr lang="en-US" sz="1150" dirty="0"/>
-          </a:p>
-        </p:txBody>
-      </p:sp>
-      <p:sp>
-        <p:nvSpPr>
-          <p:cNvPr id="19" name="Text 17"/>
-          <p:cNvSpPr/>
-          <p:nvPr/>
-        </p:nvSpPr>
-        <p:spPr>
-          <a:xfrm>
-            <a:off x="832104" y="3282696"/>
-            <a:ext cx="4892040" cy="274320"/>
-          </a:xfrm>
-          <a:prstGeom prst="rect">
-            <a:avLst/>
-          </a:prstGeom>
-          <a:noFill/>
-          <a:ln/>
-        </p:spPr>
-        <p:txBody>
-          <a:bodyPr wrap="square" lIns="0" tIns="0" rIns="0" bIns="0" rtlCol="0" anchor="ctr"/>
-          <a:lstStyle/>
-          <a:p>
-            <a:pPr rtl="1" algn="r" indent="0" marL="0">
-              <a:buNone/>
-            </a:pPr>
-            <a:r>
-              <a:rPr lang="en-US" sz="1350" b="1" dirty="0">
+              <a:t>لا يُتّخذ قرار برفض خدمة لمريض بناءً عليه إطلاقاً، وهو لا يميّز الرفض الكامل من الخصم الجزئي.</a:t>
+            </a:r>
+            <a:endParaRPr lang="en-US" sz="1050" dirty="0"/>
+          </a:p>
+        </p:txBody>
+      </p:sp>
+      <p:sp>
+        <p:nvSpPr>
+          <p:cNvPr id="21" name="Text 19"/>
+          <p:cNvSpPr/>
+          <p:nvPr/>
+        </p:nvSpPr>
+        <p:spPr>
+          <a:xfrm>
+            <a:off x="832104" y="3035808"/>
+            <a:ext cx="4892040" cy="256032"/>
+          </a:xfrm>
+          <a:prstGeom prst="rect">
+            <a:avLst/>
+          </a:prstGeom>
+          <a:noFill/>
+          <a:ln/>
+        </p:spPr>
+        <p:txBody>
+          <a:bodyPr wrap="square" lIns="0" tIns="0" rIns="0" bIns="0" rtlCol="0" anchor="ctr"/>
+          <a:lstStyle/>
+          <a:p>
+            <a:pPr rtl="1" algn="r" indent="0" marL="0">
+              <a:buNone/>
+            </a:pPr>
+            <a:r>
+              <a:rPr lang="en-US" sz="1250" b="1" dirty="0">
                 <a:solidFill>
                   <a:srgbClr val="12384F"/>
                 </a:solidFill>
@@ -7375,20 +7545,20 @@
               </a:rPr>
               <a:t>يميل إلى الإنذار عمداً</a:t>
             </a:r>
-            <a:endParaRPr lang="en-US" sz="1350" dirty="0"/>
-          </a:p>
-        </p:txBody>
-      </p:sp>
-      <p:sp>
-        <p:nvSpPr>
-          <p:cNvPr id="20" name="Text 18"/>
-          <p:cNvSpPr/>
-          <p:nvPr/>
-        </p:nvSpPr>
-        <p:spPr>
-          <a:xfrm>
-            <a:off x="832104" y="3575304"/>
-            <a:ext cx="4892040" cy="512064"/>
+            <a:endParaRPr lang="en-US" sz="1250" dirty="0"/>
+          </a:p>
+        </p:txBody>
+      </p:sp>
+      <p:sp>
+        <p:nvSpPr>
+          <p:cNvPr id="22" name="Text 20"/>
+          <p:cNvSpPr/>
+          <p:nvPr/>
+        </p:nvSpPr>
+        <p:spPr>
+          <a:xfrm>
+            <a:off x="832104" y="3300984"/>
+            <a:ext cx="4892040" cy="457200"/>
           </a:xfrm>
           <a:prstGeom prst="rect">
             <a:avLst/>
@@ -7402,12 +7572,12 @@
           <a:p>
             <a:pPr rtl="1" algn="r" indent="0" marL="0">
               <a:lnSpc>
-                <a:spcPct val="120000"/>
+                <a:spcPct val="118000"/>
               </a:lnSpc>
               <a:buNone/>
             </a:pPr>
             <a:r>
-              <a:rPr lang="en-US" sz="1150" dirty="0">
+              <a:rPr lang="en-US" sz="1050" dirty="0">
                 <a:solidFill>
                   <a:srgbClr val="4E657A"/>
                 </a:solidFill>
@@ -7417,36 +7587,36 @@
               </a:rPr>
               <a:t>نحو 29 بالمئة ممّا يُعلَّم يُعتمد فعلاً بالكامل، وهو ثمن مقصود مقابل التقاط 74 بالمئة من غير المكتملة.</a:t>
             </a:r>
-            <a:endParaRPr lang="en-US" sz="1150" dirty="0"/>
-          </a:p>
-        </p:txBody>
-      </p:sp>
-      <p:sp>
-        <p:nvSpPr>
-          <p:cNvPr id="21" name="Text 19"/>
-          <p:cNvSpPr/>
-          <p:nvPr/>
-        </p:nvSpPr>
-        <p:spPr>
-          <a:xfrm>
-            <a:off x="832104" y="4151376"/>
-            <a:ext cx="4892040" cy="274320"/>
-          </a:xfrm>
-          <a:prstGeom prst="rect">
-            <a:avLst/>
-          </a:prstGeom>
-          <a:noFill/>
-          <a:ln/>
-        </p:spPr>
-        <p:txBody>
-          <a:bodyPr wrap="square" lIns="0" tIns="0" rIns="0" bIns="0" rtlCol="0" anchor="ctr"/>
-          <a:lstStyle/>
-          <a:p>
-            <a:pPr rtl="1" algn="r" indent="0" marL="0">
-              <a:buNone/>
-            </a:pPr>
-            <a:r>
-              <a:rPr lang="en-US" sz="1350" b="1" dirty="0">
+            <a:endParaRPr lang="en-US" sz="1050" dirty="0"/>
+          </a:p>
+        </p:txBody>
+      </p:sp>
+      <p:sp>
+        <p:nvSpPr>
+          <p:cNvPr id="23" name="Text 21"/>
+          <p:cNvSpPr/>
+          <p:nvPr/>
+        </p:nvSpPr>
+        <p:spPr>
+          <a:xfrm>
+            <a:off x="832104" y="3785616"/>
+            <a:ext cx="4892040" cy="256032"/>
+          </a:xfrm>
+          <a:prstGeom prst="rect">
+            <a:avLst/>
+          </a:prstGeom>
+          <a:noFill/>
+          <a:ln/>
+        </p:spPr>
+        <p:txBody>
+          <a:bodyPr wrap="square" lIns="0" tIns="0" rIns="0" bIns="0" rtlCol="0" anchor="ctr"/>
+          <a:lstStyle/>
+          <a:p>
+            <a:pPr rtl="1" algn="r" indent="0" marL="0">
+              <a:buNone/>
+            </a:pPr>
+            <a:r>
+              <a:rPr lang="en-US" sz="1250" b="1" dirty="0">
                 <a:solidFill>
                   <a:srgbClr val="12384F"/>
                 </a:solidFill>
@@ -7454,22 +7624,22 @@
                 <a:ea typeface="Arial" pitchFamily="34" charset="-122"/>
                 <a:cs typeface="Arial" pitchFamily="34" charset="-120"/>
               </a:rPr>
-              <a:t>لا يميّز الرفض من الخصم الجزئي</a:t>
-            </a:r>
-            <a:endParaRPr lang="en-US" sz="1350" dirty="0"/>
-          </a:p>
-        </p:txBody>
-      </p:sp>
-      <p:sp>
-        <p:nvSpPr>
-          <p:cNvPr id="22" name="Text 20"/>
-          <p:cNvSpPr/>
-          <p:nvPr/>
-        </p:nvSpPr>
-        <p:spPr>
-          <a:xfrm>
-            <a:off x="832104" y="4443984"/>
-            <a:ext cx="4892040" cy="512064"/>
+              <a:t>ثقله في حقول لا تتغيّر</a:t>
+            </a:r>
+            <a:endParaRPr lang="en-US" sz="1250" dirty="0"/>
+          </a:p>
+        </p:txBody>
+      </p:sp>
+      <p:sp>
+        <p:nvSpPr>
+          <p:cNvPr id="24" name="Text 22"/>
+          <p:cNvSpPr/>
+          <p:nvPr/>
+        </p:nvSpPr>
+        <p:spPr>
+          <a:xfrm>
+            <a:off x="832104" y="4050792"/>
+            <a:ext cx="4892040" cy="457200"/>
           </a:xfrm>
           <a:prstGeom prst="rect">
             <a:avLst/>
@@ -7483,12 +7653,12 @@
           <a:p>
             <a:pPr rtl="1" algn="r" indent="0" marL="0">
               <a:lnSpc>
-                <a:spcPct val="120000"/>
+                <a:spcPct val="118000"/>
               </a:lnSpc>
               <a:buNone/>
             </a:pPr>
             <a:r>
-              <a:rPr lang="en-US" sz="1150" dirty="0">
+              <a:rPr lang="en-US" sz="1050" dirty="0">
                 <a:solidFill>
                   <a:srgbClr val="4E657A"/>
                 </a:solidFill>
@@ -7496,38 +7666,38 @@
                 <a:ea typeface="Arial" pitchFamily="34" charset="-122"/>
                 <a:cs typeface="Arial" pitchFamily="34" charset="-120"/>
               </a:rPr>
-              <a:t>ينذر بأن الموافقة لن تكتمل، دون تحديد أيّهما.</a:t>
-            </a:r>
-            <a:endParaRPr lang="en-US" sz="1150" dirty="0"/>
-          </a:p>
-        </p:txBody>
-      </p:sp>
-      <p:sp>
-        <p:nvSpPr>
-          <p:cNvPr id="23" name="Text 21"/>
-          <p:cNvSpPr/>
-          <p:nvPr/>
-        </p:nvSpPr>
-        <p:spPr>
-          <a:xfrm>
-            <a:off x="832104" y="5020056"/>
-            <a:ext cx="4892040" cy="274320"/>
-          </a:xfrm>
-          <a:prstGeom prst="rect">
-            <a:avLst/>
-          </a:prstGeom>
-          <a:noFill/>
-          <a:ln/>
-        </p:spPr>
-        <p:txBody>
-          <a:bodyPr wrap="square" lIns="0" tIns="0" rIns="0" bIns="0" rtlCol="0" anchor="ctr"/>
-          <a:lstStyle/>
-          <a:p>
-            <a:pPr rtl="1" algn="r" indent="0" marL="0">
-              <a:buNone/>
-            </a:pPr>
-            <a:r>
-              <a:rPr lang="en-US" sz="1350" b="1" dirty="0">
+              <a:t>نحو 70 بالمئة من قوّته التنبّؤية في العقد والمستشفى والقسم، وهي حقول لا يملك الموظّف تغييرها قبل الرفع.</a:t>
+            </a:r>
+            <a:endParaRPr lang="en-US" sz="1050" dirty="0"/>
+          </a:p>
+        </p:txBody>
+      </p:sp>
+      <p:sp>
+        <p:nvSpPr>
+          <p:cNvPr id="25" name="Text 23"/>
+          <p:cNvSpPr/>
+          <p:nvPr/>
+        </p:nvSpPr>
+        <p:spPr>
+          <a:xfrm>
+            <a:off x="832104" y="4535424"/>
+            <a:ext cx="4892040" cy="256032"/>
+          </a:xfrm>
+          <a:prstGeom prst="rect">
+            <a:avLst/>
+          </a:prstGeom>
+          <a:noFill/>
+          <a:ln/>
+        </p:spPr>
+        <p:txBody>
+          <a:bodyPr wrap="square" lIns="0" tIns="0" rIns="0" bIns="0" rtlCol="0" anchor="ctr"/>
+          <a:lstStyle/>
+          <a:p>
+            <a:pPr rtl="1" algn="r" indent="0" marL="0">
+              <a:buNone/>
+            </a:pPr>
+            <a:r>
+              <a:rPr lang="en-US" sz="1250" b="1" dirty="0">
                 <a:solidFill>
                   <a:srgbClr val="12384F"/>
                 </a:solidFill>
@@ -7535,22 +7705,103 @@
                 <a:ea typeface="Arial" pitchFamily="34" charset="-122"/>
                 <a:cs typeface="Arial" pitchFamily="34" charset="-120"/>
               </a:rPr>
+              <a:t>يستنتج السبب ولا يفحص المستندات</a:t>
+            </a:r>
+            <a:endParaRPr lang="en-US" sz="1250" dirty="0"/>
+          </a:p>
+        </p:txBody>
+      </p:sp>
+      <p:sp>
+        <p:nvSpPr>
+          <p:cNvPr id="26" name="Text 24"/>
+          <p:cNvSpPr/>
+          <p:nvPr/>
+        </p:nvSpPr>
+        <p:spPr>
+          <a:xfrm>
+            <a:off x="832104" y="4800600"/>
+            <a:ext cx="4892040" cy="457200"/>
+          </a:xfrm>
+          <a:prstGeom prst="rect">
+            <a:avLst/>
+          </a:prstGeom>
+          <a:noFill/>
+          <a:ln/>
+        </p:spPr>
+        <p:txBody>
+          <a:bodyPr wrap="square" lIns="0" tIns="0" rIns="0" bIns="0" rtlCol="0" anchor="ctr"/>
+          <a:lstStyle/>
+          <a:p>
+            <a:pPr rtl="1" algn="r" indent="0" marL="0">
+              <a:lnSpc>
+                <a:spcPct val="118000"/>
+              </a:lnSpc>
+              <a:buNone/>
+            </a:pPr>
+            <a:r>
+              <a:rPr lang="en-US" sz="1050" dirty="0">
+                <a:solidFill>
+                  <a:srgbClr val="4E657A"/>
+                </a:solidFill>
+                <a:latin typeface="Arial" pitchFamily="34" charset="0"/>
+                <a:ea typeface="Arial" pitchFamily="34" charset="-122"/>
+                <a:cs typeface="Arial" pitchFamily="34" charset="-120"/>
+              </a:rPr>
+              <a:t>لا يقرأ المرفقات؛ بل يرتّب الأسباب الأرجح من أنماط 19,741 طلباً سابقاً.</a:t>
+            </a:r>
+            <a:endParaRPr lang="en-US" sz="1050" dirty="0"/>
+          </a:p>
+        </p:txBody>
+      </p:sp>
+      <p:sp>
+        <p:nvSpPr>
+          <p:cNvPr id="27" name="Text 25"/>
+          <p:cNvSpPr/>
+          <p:nvPr/>
+        </p:nvSpPr>
+        <p:spPr>
+          <a:xfrm>
+            <a:off x="832104" y="5285232"/>
+            <a:ext cx="4892040" cy="256032"/>
+          </a:xfrm>
+          <a:prstGeom prst="rect">
+            <a:avLst/>
+          </a:prstGeom>
+          <a:noFill/>
+          <a:ln/>
+        </p:spPr>
+        <p:txBody>
+          <a:bodyPr wrap="square" lIns="0" tIns="0" rIns="0" bIns="0" rtlCol="0" anchor="ctr"/>
+          <a:lstStyle/>
+          <a:p>
+            <a:pPr rtl="1" algn="r" indent="0" marL="0">
+              <a:buNone/>
+            </a:pPr>
+            <a:r>
+              <a:rPr lang="en-US" sz="1250" b="1" dirty="0">
+                <a:solidFill>
+                  <a:srgbClr val="12384F"/>
+                </a:solidFill>
+                <a:latin typeface="Arial" pitchFamily="34" charset="0"/>
+                <a:ea typeface="Arial" pitchFamily="34" charset="-122"/>
+                <a:cs typeface="Arial" pitchFamily="34" charset="-120"/>
+              </a:rPr>
               <a:t>يتدهور بتغيّر سياسات شركات التأمين</a:t>
             </a:r>
-            <a:endParaRPr lang="en-US" sz="1350" dirty="0"/>
-          </a:p>
-        </p:txBody>
-      </p:sp>
-      <p:sp>
-        <p:nvSpPr>
-          <p:cNvPr id="24" name="Text 22"/>
-          <p:cNvSpPr/>
-          <p:nvPr/>
-        </p:nvSpPr>
-        <p:spPr>
-          <a:xfrm>
-            <a:off x="832104" y="5312664"/>
-            <a:ext cx="4892040" cy="512064"/>
+            <a:endParaRPr lang="en-US" sz="1250" dirty="0"/>
+          </a:p>
+        </p:txBody>
+      </p:sp>
+      <p:sp>
+        <p:nvSpPr>
+          <p:cNvPr id="28" name="Text 26"/>
+          <p:cNvSpPr/>
+          <p:nvPr/>
+        </p:nvSpPr>
+        <p:spPr>
+          <a:xfrm>
+            <a:off x="832104" y="5550408"/>
+            <a:ext cx="4892040" cy="457200"/>
           </a:xfrm>
           <a:prstGeom prst="rect">
             <a:avLst/>
@@ -7564,12 +7815,12 @@
           <a:p>
             <a:pPr rtl="1" algn="r" indent="0" marL="0">
               <a:lnSpc>
-                <a:spcPct val="120000"/>
+                <a:spcPct val="118000"/>
               </a:lnSpc>
               <a:buNone/>
             </a:pPr>
             <a:r>
-              <a:rPr lang="en-US" sz="1150" dirty="0">
+              <a:rPr lang="en-US" sz="1050" dirty="0">
                 <a:solidFill>
                   <a:srgbClr val="4E657A"/>
                 </a:solidFill>
@@ -7579,13 +7830,13 @@
               </a:rPr>
               <a:t>يُعاد التدريب كل ربع سنة، وهو إجراء مؤتمت بأمر واحد.</a:t>
             </a:r>
-            <a:endParaRPr lang="en-US" sz="1150" dirty="0"/>
-          </a:p>
-        </p:txBody>
-      </p:sp>
-      <p:sp>
-        <p:nvSpPr>
-          <p:cNvPr id="25" name="Text 23"/>
+            <a:endParaRPr lang="en-US" sz="1050" dirty="0"/>
+          </a:p>
+        </p:txBody>
+      </p:sp>
+      <p:sp>
+        <p:nvSpPr>
+          <p:cNvPr id="29" name="Text 27"/>
           <p:cNvSpPr/>
           <p:nvPr/>
         </p:nvSpPr>
@@ -7616,7 +7867,7 @@
                 <a:ea typeface="Arial" pitchFamily="34" charset="-122"/>
                 <a:cs typeface="Arial" pitchFamily="34" charset="-120"/>
               </a:rPr>
-              <a:t>المخاطرة الأساسية ليست في النموذج بل في التبنّي، فأداة لا تُدخَل في المسار الإلزامي لا تُنتج عائداً.</a:t>
+              <a:t>الحدّان الثالث والرابع ليسا عيباً دائماً، والشريحة التالية تعرض كيف يُرفعان.</a:t>
             </a:r>
             <a:endParaRPr lang="en-US" sz="950" dirty="0"/>
           </a:p>
@@ -7633,6 +7884,1210 @@
 <file path=ppt/slides/slide14.xml><?xml version="1.0" encoding="utf-8"?>
 <p:sld xmlns:a="http://schemas.openxmlformats.org/drawingml/2006/main" xmlns:r="http://schemas.openxmlformats.org/officeDocument/2006/relationships" xmlns:p="http://schemas.openxmlformats.org/presentationml/2006/main">
   <p:cSld name="Slide 14">
+    <p:bg>
+      <p:bgPr>
+        <a:solidFill>
+          <a:srgbClr val="FFFFFF"/>
+        </a:solidFill>
+      </p:bgPr>
+    </p:bg>
+    <p:spTree>
+      <p:nvGrpSpPr>
+        <p:cNvPr id="1" name=""/>
+        <p:cNvGrpSpPr/>
+        <p:nvPr/>
+      </p:nvGrpSpPr>
+      <p:grpSpPr>
+        <a:xfrm>
+          <a:off x="0" y="0"/>
+          <a:ext cx="0" cy="0"/>
+          <a:chOff x="0" y="0"/>
+          <a:chExt cx="0" cy="0"/>
+        </a:xfrm>
+      </p:grpSpPr>
+      <p:sp>
+        <p:nvSpPr>
+          <p:cNvPr id="2" name="Text 0"/>
+          <p:cNvSpPr/>
+          <p:nvPr/>
+        </p:nvSpPr>
+        <p:spPr>
+          <a:xfrm>
+            <a:off x="548640" y="329184"/>
+            <a:ext cx="11064240" cy="274320"/>
+          </a:xfrm>
+          <a:prstGeom prst="rect">
+            <a:avLst/>
+          </a:prstGeom>
+          <a:noFill/>
+          <a:ln/>
+        </p:spPr>
+        <p:txBody>
+          <a:bodyPr wrap="square" lIns="0" tIns="0" rIns="0" bIns="0" rtlCol="0" anchor="ctr"/>
+          <a:lstStyle/>
+          <a:p>
+            <a:pPr rtl="1" algn="r" indent="0" marL="0">
+              <a:buNone/>
+            </a:pPr>
+            <a:r>
+              <a:rPr lang="en-US" sz="1200" b="1" spc="100" kern="0" dirty="0">
+                <a:solidFill>
+                  <a:srgbClr val="1B6FA8"/>
+                </a:solidFill>
+                <a:latin typeface="Arial" pitchFamily="34" charset="0"/>
+                <a:ea typeface="Arial" pitchFamily="34" charset="-122"/>
+                <a:cs typeface="Arial" pitchFamily="34" charset="-120"/>
+              </a:rPr>
+              <a:t>رفع السقف</a:t>
+            </a:r>
+            <a:endParaRPr lang="en-US" sz="1200" dirty="0"/>
+          </a:p>
+        </p:txBody>
+      </p:sp>
+      <p:sp>
+        <p:nvSpPr>
+          <p:cNvPr id="3" name="Text 1"/>
+          <p:cNvSpPr/>
+          <p:nvPr/>
+        </p:nvSpPr>
+        <p:spPr>
+          <a:xfrm>
+            <a:off x="548640" y="621792"/>
+            <a:ext cx="11064240" cy="566928"/>
+          </a:xfrm>
+          <a:prstGeom prst="rect">
+            <a:avLst/>
+          </a:prstGeom>
+          <a:noFill/>
+          <a:ln/>
+        </p:spPr>
+        <p:txBody>
+          <a:bodyPr wrap="square" lIns="0" tIns="0" rIns="0" bIns="0" rtlCol="0" anchor="ctr"/>
+          <a:lstStyle/>
+          <a:p>
+            <a:pPr rtl="1" algn="r" indent="0" marL="0">
+              <a:buNone/>
+            </a:pPr>
+            <a:r>
+              <a:rPr lang="en-US" sz="3200" b="1" dirty="0">
+                <a:solidFill>
+                  <a:srgbClr val="12384F"/>
+                </a:solidFill>
+                <a:latin typeface="Arial" pitchFamily="34" charset="0"/>
+                <a:ea typeface="Arial" pitchFamily="34" charset="-122"/>
+                <a:cs typeface="Arial" pitchFamily="34" charset="-120"/>
+              </a:rPr>
+              <a:t>الحدّ الأكبر اليوم هو ما لا يراه النموذج</a:t>
+            </a:r>
+            <a:endParaRPr lang="en-US" sz="3200" dirty="0"/>
+          </a:p>
+        </p:txBody>
+      </p:sp>
+      <p:sp>
+        <p:nvSpPr>
+          <p:cNvPr id="4" name="Text 2"/>
+          <p:cNvSpPr/>
+          <p:nvPr/>
+        </p:nvSpPr>
+        <p:spPr>
+          <a:xfrm>
+            <a:off x="548640" y="1207008"/>
+            <a:ext cx="11064240" cy="347472"/>
+          </a:xfrm>
+          <a:prstGeom prst="rect">
+            <a:avLst/>
+          </a:prstGeom>
+          <a:noFill/>
+          <a:ln/>
+        </p:spPr>
+        <p:txBody>
+          <a:bodyPr wrap="square" lIns="0" tIns="0" rIns="0" bIns="0" rtlCol="0" anchor="ctr"/>
+          <a:lstStyle/>
+          <a:p>
+            <a:pPr rtl="1" algn="r" indent="0" marL="0">
+              <a:buNone/>
+            </a:pPr>
+            <a:r>
+              <a:rPr lang="en-US" sz="1400" dirty="0">
+                <a:solidFill>
+                  <a:srgbClr val="4E657A"/>
+                </a:solidFill>
+                <a:latin typeface="Arial" pitchFamily="34" charset="0"/>
+                <a:ea typeface="Arial" pitchFamily="34" charset="-122"/>
+                <a:cs typeface="Arial" pitchFamily="34" charset="-120"/>
+              </a:rPr>
+              <a:t>النموذج يعرف «مَن مقدّم الطلب» أكثر ممّا يعرف «ماذا قُدّم فيه». وهذه فجوة قابلة للإغلاق.</a:t>
+            </a:r>
+            <a:endParaRPr lang="en-US" sz="1400" dirty="0"/>
+          </a:p>
+        </p:txBody>
+      </p:sp>
+      <p:sp>
+        <p:nvSpPr>
+          <p:cNvPr id="5" name="Shape 3"/>
+          <p:cNvSpPr/>
+          <p:nvPr/>
+        </p:nvSpPr>
+        <p:spPr>
+          <a:xfrm>
+            <a:off x="8110728" y="1783080"/>
+            <a:ext cx="3493008" cy="2194560"/>
+          </a:xfrm>
+          <a:prstGeom prst="roundRect">
+            <a:avLst>
+              <a:gd name="adj" fmla="val 2500"/>
+            </a:avLst>
+          </a:prstGeom>
+          <a:solidFill>
+            <a:srgbClr val="12384F"/>
+          </a:solidFill>
+          <a:ln w="12700">
+            <a:solidFill>
+              <a:srgbClr val="12384F"/>
+            </a:solidFill>
+            <a:prstDash val="solid"/>
+          </a:ln>
+          <a:effectLst>
+            <a:outerShdw sx="100000" sy="100000" kx="0" ky="0" algn="bl" rotWithShape="0" blurRad="127000" dist="25400" dir="5400000">
+              <a:srgbClr val="12384F">
+                <a:alpha val="10000"/>
+              </a:srgbClr>
+            </a:outerShdw>
+          </a:effectLst>
+        </p:spPr>
+      </p:sp>
+      <p:sp>
+        <p:nvSpPr>
+          <p:cNvPr id="6" name="Text 4"/>
+          <p:cNvSpPr/>
+          <p:nvPr/>
+        </p:nvSpPr>
+        <p:spPr>
+          <a:xfrm>
+            <a:off x="8339328" y="1956816"/>
+            <a:ext cx="3035808" cy="713232"/>
+          </a:xfrm>
+          <a:prstGeom prst="rect">
+            <a:avLst/>
+          </a:prstGeom>
+          <a:noFill/>
+          <a:ln/>
+        </p:spPr>
+        <p:txBody>
+          <a:bodyPr wrap="square" lIns="0" tIns="0" rIns="0" bIns="0" rtlCol="0" anchor="ctr"/>
+          <a:lstStyle/>
+          <a:p>
+            <a:pPr rtl="1" algn="r" indent="0" marL="0">
+              <a:buNone/>
+            </a:pPr>
+            <a:r>
+              <a:rPr lang="en-US" sz="4400" b="1" dirty="0">
+                <a:solidFill>
+                  <a:srgbClr val="FFFFFF"/>
+                </a:solidFill>
+                <a:latin typeface="Arial" pitchFamily="34" charset="0"/>
+                <a:ea typeface="Arial" pitchFamily="34" charset="-122"/>
+                <a:cs typeface="Arial" pitchFamily="34" charset="-120"/>
+              </a:rPr>
+              <a:t>42%</a:t>
+            </a:r>
+            <a:endParaRPr lang="en-US" sz="4400" dirty="0"/>
+          </a:p>
+        </p:txBody>
+      </p:sp>
+      <p:sp>
+        <p:nvSpPr>
+          <p:cNvPr id="7" name="Text 5"/>
+          <p:cNvSpPr/>
+          <p:nvPr/>
+        </p:nvSpPr>
+        <p:spPr>
+          <a:xfrm>
+            <a:off x="8339328" y="2724912"/>
+            <a:ext cx="3035808" cy="658368"/>
+          </a:xfrm>
+          <a:prstGeom prst="rect">
+            <a:avLst/>
+          </a:prstGeom>
+          <a:noFill/>
+          <a:ln/>
+        </p:spPr>
+        <p:txBody>
+          <a:bodyPr wrap="square" lIns="0" tIns="0" rIns="0" bIns="0" rtlCol="0" anchor="ctr"/>
+          <a:lstStyle/>
+          <a:p>
+            <a:pPr rtl="1" algn="r" indent="0" marL="0">
+              <a:lnSpc>
+                <a:spcPct val="122000"/>
+              </a:lnSpc>
+              <a:buNone/>
+            </a:pPr>
+            <a:r>
+              <a:rPr lang="en-US" sz="1300" dirty="0">
+                <a:solidFill>
+                  <a:srgbClr val="9FC8E0"/>
+                </a:solidFill>
+                <a:latin typeface="Arial" pitchFamily="34" charset="0"/>
+                <a:ea typeface="Arial" pitchFamily="34" charset="-122"/>
+                <a:cs typeface="Arial" pitchFamily="34" charset="-120"/>
+              </a:rPr>
+              <a:t>من حالات عدم الاعتماد سببها المباشر نقصٌ في الحد الأدنى للبيانات</a:t>
+            </a:r>
+            <a:endParaRPr lang="en-US" sz="1300" dirty="0"/>
+          </a:p>
+        </p:txBody>
+      </p:sp>
+      <p:sp>
+        <p:nvSpPr>
+          <p:cNvPr id="8" name="Text 6"/>
+          <p:cNvSpPr/>
+          <p:nvPr/>
+        </p:nvSpPr>
+        <p:spPr>
+          <a:xfrm>
+            <a:off x="8339328" y="3456432"/>
+            <a:ext cx="3035808" cy="365760"/>
+          </a:xfrm>
+          <a:prstGeom prst="rect">
+            <a:avLst/>
+          </a:prstGeom>
+          <a:noFill/>
+          <a:ln/>
+        </p:spPr>
+        <p:txBody>
+          <a:bodyPr wrap="square" lIns="0" tIns="0" rIns="0" bIns="0" rtlCol="0" anchor="ctr"/>
+          <a:lstStyle/>
+          <a:p>
+            <a:pPr rtl="1" algn="r" indent="0" marL="0">
+              <a:buNone/>
+            </a:pPr>
+            <a:r>
+              <a:rPr lang="en-US" sz="1150" dirty="0">
+                <a:solidFill>
+                  <a:srgbClr val="7BA0B8"/>
+                </a:solidFill>
+                <a:latin typeface="Arial" pitchFamily="34" charset="0"/>
+                <a:ea typeface="Arial" pitchFamily="34" charset="-122"/>
+                <a:cs typeface="Arial" pitchFamily="34" charset="-120"/>
+              </a:rPr>
+              <a:t>وهي بيانات لا يراها النموذج اليوم إطلاقاً.</a:t>
+            </a:r>
+            <a:endParaRPr lang="en-US" sz="1150" dirty="0"/>
+          </a:p>
+        </p:txBody>
+      </p:sp>
+      <p:sp>
+        <p:nvSpPr>
+          <p:cNvPr id="9" name="Shape 7"/>
+          <p:cNvSpPr/>
+          <p:nvPr/>
+        </p:nvSpPr>
+        <p:spPr>
+          <a:xfrm>
+            <a:off x="557784" y="1783080"/>
+            <a:ext cx="7260336" cy="2194560"/>
+          </a:xfrm>
+          <a:prstGeom prst="roundRect">
+            <a:avLst>
+              <a:gd name="adj" fmla="val 2500"/>
+            </a:avLst>
+          </a:prstGeom>
+          <a:solidFill>
+            <a:srgbClr val="FFFFFF"/>
+          </a:solidFill>
+          <a:ln w="12700">
+            <a:solidFill>
+              <a:srgbClr val="D6E2ED"/>
+            </a:solidFill>
+            <a:prstDash val="solid"/>
+          </a:ln>
+          <a:effectLst>
+            <a:outerShdw sx="100000" sy="100000" kx="0" ky="0" algn="bl" rotWithShape="0" blurRad="127000" dist="25400" dir="5400000">
+              <a:srgbClr val="12384F">
+                <a:alpha val="10000"/>
+              </a:srgbClr>
+            </a:outerShdw>
+          </a:effectLst>
+        </p:spPr>
+      </p:sp>
+      <p:sp>
+        <p:nvSpPr>
+          <p:cNvPr id="10" name="Text 8"/>
+          <p:cNvSpPr/>
+          <p:nvPr/>
+        </p:nvSpPr>
+        <p:spPr>
+          <a:xfrm>
+            <a:off x="822960" y="1956816"/>
+            <a:ext cx="6729984" cy="310896"/>
+          </a:xfrm>
+          <a:prstGeom prst="rect">
+            <a:avLst/>
+          </a:prstGeom>
+          <a:noFill/>
+          <a:ln/>
+        </p:spPr>
+        <p:txBody>
+          <a:bodyPr wrap="square" lIns="0" tIns="0" rIns="0" bIns="0" rtlCol="0" anchor="ctr"/>
+          <a:lstStyle/>
+          <a:p>
+            <a:pPr rtl="1" algn="r" indent="0" marL="0">
+              <a:buNone/>
+            </a:pPr>
+            <a:r>
+              <a:rPr lang="en-US" sz="1400" b="1" dirty="0">
+                <a:solidFill>
+                  <a:srgbClr val="1B6FA8"/>
+                </a:solidFill>
+                <a:latin typeface="Arial" pitchFamily="34" charset="0"/>
+                <a:ea typeface="Arial" pitchFamily="34" charset="-122"/>
+                <a:cs typeface="Arial" pitchFamily="34" charset="-120"/>
+              </a:rPr>
+              <a:t>أسباب عدم الاعتماد التي يسبّبها نقص الحد الأدنى للبيانات</a:t>
+            </a:r>
+            <a:endParaRPr lang="en-US" sz="1400" dirty="0"/>
+          </a:p>
+        </p:txBody>
+      </p:sp>
+      <p:sp>
+        <p:nvSpPr>
+          <p:cNvPr id="11" name="Text 9"/>
+          <p:cNvSpPr/>
+          <p:nvPr/>
+        </p:nvSpPr>
+        <p:spPr>
+          <a:xfrm>
+            <a:off x="6364224" y="2340864"/>
+            <a:ext cx="1188720" cy="365760"/>
+          </a:xfrm>
+          <a:prstGeom prst="rect">
+            <a:avLst/>
+          </a:prstGeom>
+          <a:noFill/>
+          <a:ln/>
+        </p:spPr>
+        <p:txBody>
+          <a:bodyPr wrap="square" lIns="0" tIns="0" rIns="0" bIns="0" rtlCol="0" anchor="ctr"/>
+          <a:lstStyle/>
+          <a:p>
+            <a:pPr rtl="1" algn="r" indent="0" marL="0">
+              <a:buNone/>
+            </a:pPr>
+            <a:r>
+              <a:rPr lang="en-US" sz="1600" b="1" dirty="0">
+                <a:solidFill>
+                  <a:srgbClr val="C4362F"/>
+                </a:solidFill>
+                <a:latin typeface="Arial" pitchFamily="34" charset="0"/>
+                <a:ea typeface="Arial" pitchFamily="34" charset="-122"/>
+                <a:cs typeface="Arial" pitchFamily="34" charset="-120"/>
+              </a:rPr>
+              <a:t>19.4%</a:t>
+            </a:r>
+            <a:endParaRPr lang="en-US" sz="1600" dirty="0"/>
+          </a:p>
+        </p:txBody>
+      </p:sp>
+      <p:sp>
+        <p:nvSpPr>
+          <p:cNvPr id="12" name="Text 10"/>
+          <p:cNvSpPr/>
+          <p:nvPr/>
+        </p:nvSpPr>
+        <p:spPr>
+          <a:xfrm>
+            <a:off x="822960" y="2340864"/>
+            <a:ext cx="5358384" cy="365760"/>
+          </a:xfrm>
+          <a:prstGeom prst="rect">
+            <a:avLst/>
+          </a:prstGeom>
+          <a:noFill/>
+          <a:ln/>
+        </p:spPr>
+        <p:txBody>
+          <a:bodyPr wrap="square" lIns="0" tIns="0" rIns="0" bIns="0" rtlCol="0" anchor="ctr"/>
+          <a:lstStyle/>
+          <a:p>
+            <a:pPr rtl="1" algn="r" indent="0" marL="0">
+              <a:buNone/>
+            </a:pPr>
+            <a:r>
+              <a:rPr lang="en-US" sz="1300" dirty="0">
+                <a:solidFill>
+                  <a:srgbClr val="12384F"/>
+                </a:solidFill>
+                <a:latin typeface="Arial" pitchFamily="34" charset="0"/>
+                <a:ea typeface="Arial" pitchFamily="34" charset="-122"/>
+                <a:cs typeface="Arial" pitchFamily="34" charset="-120"/>
+              </a:rPr>
+              <a:t>نقص في المستندات أو التقارير الطبية</a:t>
+            </a:r>
+            <a:endParaRPr lang="en-US" sz="1300" dirty="0"/>
+          </a:p>
+        </p:txBody>
+      </p:sp>
+      <p:sp>
+        <p:nvSpPr>
+          <p:cNvPr id="13" name="Text 11"/>
+          <p:cNvSpPr/>
+          <p:nvPr/>
+        </p:nvSpPr>
+        <p:spPr>
+          <a:xfrm>
+            <a:off x="6364224" y="2779776"/>
+            <a:ext cx="1188720" cy="365760"/>
+          </a:xfrm>
+          <a:prstGeom prst="rect">
+            <a:avLst/>
+          </a:prstGeom>
+          <a:noFill/>
+          <a:ln/>
+        </p:spPr>
+        <p:txBody>
+          <a:bodyPr wrap="square" lIns="0" tIns="0" rIns="0" bIns="0" rtlCol="0" anchor="ctr"/>
+          <a:lstStyle/>
+          <a:p>
+            <a:pPr rtl="1" algn="r" indent="0" marL="0">
+              <a:buNone/>
+            </a:pPr>
+            <a:r>
+              <a:rPr lang="en-US" sz="1600" b="1" dirty="0">
+                <a:solidFill>
+                  <a:srgbClr val="C4362F"/>
+                </a:solidFill>
+                <a:latin typeface="Arial" pitchFamily="34" charset="0"/>
+                <a:ea typeface="Arial" pitchFamily="34" charset="-122"/>
+                <a:cs typeface="Arial" pitchFamily="34" charset="-120"/>
+              </a:rPr>
+              <a:t>18.5%</a:t>
+            </a:r>
+            <a:endParaRPr lang="en-US" sz="1600" dirty="0"/>
+          </a:p>
+        </p:txBody>
+      </p:sp>
+      <p:sp>
+        <p:nvSpPr>
+          <p:cNvPr id="14" name="Text 12"/>
+          <p:cNvSpPr/>
+          <p:nvPr/>
+        </p:nvSpPr>
+        <p:spPr>
+          <a:xfrm>
+            <a:off x="822960" y="2779776"/>
+            <a:ext cx="5358384" cy="365760"/>
+          </a:xfrm>
+          <a:prstGeom prst="rect">
+            <a:avLst/>
+          </a:prstGeom>
+          <a:noFill/>
+          <a:ln/>
+        </p:spPr>
+        <p:txBody>
+          <a:bodyPr wrap="square" lIns="0" tIns="0" rIns="0" bIns="0" rtlCol="0" anchor="ctr"/>
+          <a:lstStyle/>
+          <a:p>
+            <a:pPr rtl="1" algn="r" indent="0" marL="0">
+              <a:buNone/>
+            </a:pPr>
+            <a:r>
+              <a:rPr lang="en-US" sz="1300" dirty="0">
+                <a:solidFill>
+                  <a:srgbClr val="12384F"/>
+                </a:solidFill>
+                <a:latin typeface="Arial" pitchFamily="34" charset="0"/>
+                <a:ea typeface="Arial" pitchFamily="34" charset="-122"/>
+                <a:cs typeface="Arial" pitchFamily="34" charset="-120"/>
+              </a:rPr>
+              <a:t>لا تنطبق عليها معايير الطوارئ</a:t>
+            </a:r>
+            <a:endParaRPr lang="en-US" sz="1300" dirty="0"/>
+          </a:p>
+        </p:txBody>
+      </p:sp>
+      <p:sp>
+        <p:nvSpPr>
+          <p:cNvPr id="15" name="Text 13"/>
+          <p:cNvSpPr/>
+          <p:nvPr/>
+        </p:nvSpPr>
+        <p:spPr>
+          <a:xfrm>
+            <a:off x="6364224" y="3218688"/>
+            <a:ext cx="1188720" cy="365760"/>
+          </a:xfrm>
+          <a:prstGeom prst="rect">
+            <a:avLst/>
+          </a:prstGeom>
+          <a:noFill/>
+          <a:ln/>
+        </p:spPr>
+        <p:txBody>
+          <a:bodyPr wrap="square" lIns="0" tIns="0" rIns="0" bIns="0" rtlCol="0" anchor="ctr"/>
+          <a:lstStyle/>
+          <a:p>
+            <a:pPr rtl="1" algn="r" indent="0" marL="0">
+              <a:buNone/>
+            </a:pPr>
+            <a:r>
+              <a:rPr lang="en-US" sz="1600" b="1" dirty="0">
+                <a:solidFill>
+                  <a:srgbClr val="C4362F"/>
+                </a:solidFill>
+                <a:latin typeface="Arial" pitchFamily="34" charset="0"/>
+                <a:ea typeface="Arial" pitchFamily="34" charset="-122"/>
+                <a:cs typeface="Arial" pitchFamily="34" charset="-120"/>
+              </a:rPr>
+              <a:t>4.2%</a:t>
+            </a:r>
+            <a:endParaRPr lang="en-US" sz="1600" dirty="0"/>
+          </a:p>
+        </p:txBody>
+      </p:sp>
+      <p:sp>
+        <p:nvSpPr>
+          <p:cNvPr id="16" name="Text 14"/>
+          <p:cNvSpPr/>
+          <p:nvPr/>
+        </p:nvSpPr>
+        <p:spPr>
+          <a:xfrm>
+            <a:off x="822960" y="3218688"/>
+            <a:ext cx="5358384" cy="365760"/>
+          </a:xfrm>
+          <a:prstGeom prst="rect">
+            <a:avLst/>
+          </a:prstGeom>
+          <a:noFill/>
+          <a:ln/>
+        </p:spPr>
+        <p:txBody>
+          <a:bodyPr wrap="square" lIns="0" tIns="0" rIns="0" bIns="0" rtlCol="0" anchor="ctr"/>
+          <a:lstStyle/>
+          <a:p>
+            <a:pPr rtl="1" algn="r" indent="0" marL="0">
+              <a:buNone/>
+            </a:pPr>
+            <a:r>
+              <a:rPr lang="en-US" sz="1300" dirty="0">
+                <a:solidFill>
+                  <a:srgbClr val="12384F"/>
+                </a:solidFill>
+                <a:latin typeface="Arial" pitchFamily="34" charset="0"/>
+                <a:ea typeface="Arial" pitchFamily="34" charset="-122"/>
+                <a:cs typeface="Arial" pitchFamily="34" charset="-120"/>
+              </a:rPr>
+              <a:t>عدم كفاية المبرر الطبي</a:t>
+            </a:r>
+            <a:endParaRPr lang="en-US" sz="1300" dirty="0"/>
+          </a:p>
+        </p:txBody>
+      </p:sp>
+      <p:sp>
+        <p:nvSpPr>
+          <p:cNvPr id="17" name="Text 15"/>
+          <p:cNvSpPr/>
+          <p:nvPr/>
+        </p:nvSpPr>
+        <p:spPr>
+          <a:xfrm>
+            <a:off x="822960" y="3657600"/>
+            <a:ext cx="6729984" cy="274320"/>
+          </a:xfrm>
+          <a:prstGeom prst="rect">
+            <a:avLst/>
+          </a:prstGeom>
+          <a:noFill/>
+          <a:ln/>
+        </p:spPr>
+        <p:txBody>
+          <a:bodyPr wrap="square" lIns="0" tIns="0" rIns="0" bIns="0" rtlCol="0" anchor="ctr"/>
+          <a:lstStyle/>
+          <a:p>
+            <a:pPr rtl="1" algn="r" indent="0" marL="0">
+              <a:buNone/>
+            </a:pPr>
+            <a:r>
+              <a:rPr lang="en-US" sz="1050" i="1" dirty="0">
+                <a:solidFill>
+                  <a:srgbClr val="4E657A"/>
+                </a:solidFill>
+                <a:latin typeface="Arial" pitchFamily="34" charset="0"/>
+                <a:ea typeface="Arial" pitchFamily="34" charset="-122"/>
+                <a:cs typeface="Arial" pitchFamily="34" charset="-120"/>
+              </a:rPr>
+              <a:t>الحد الأدنى للبيانات (MDS) في لائحة المجلس ثمانية حقول، منها: الشكوى الرئيسة · الفحص السريري · خطة العلاج · التاريخ المرضي.</a:t>
+            </a:r>
+            <a:endParaRPr lang="en-US" sz="1050" dirty="0"/>
+          </a:p>
+        </p:txBody>
+      </p:sp>
+      <p:sp>
+        <p:nvSpPr>
+          <p:cNvPr id="18" name="Shape 16"/>
+          <p:cNvSpPr/>
+          <p:nvPr/>
+        </p:nvSpPr>
+        <p:spPr>
+          <a:xfrm>
+            <a:off x="8110728" y="4187952"/>
+            <a:ext cx="3493008" cy="1691640"/>
+          </a:xfrm>
+          <a:prstGeom prst="roundRect">
+            <a:avLst>
+              <a:gd name="adj" fmla="val 3243"/>
+            </a:avLst>
+          </a:prstGeom>
+          <a:solidFill>
+            <a:srgbClr val="EFF4F9"/>
+          </a:solidFill>
+          <a:ln w="12700">
+            <a:solidFill>
+              <a:srgbClr val="D6E2ED"/>
+            </a:solidFill>
+            <a:prstDash val="solid"/>
+          </a:ln>
+        </p:spPr>
+      </p:sp>
+      <p:sp>
+        <p:nvSpPr>
+          <p:cNvPr id="19" name="Shape 17"/>
+          <p:cNvSpPr/>
+          <p:nvPr/>
+        </p:nvSpPr>
+        <p:spPr>
+          <a:xfrm>
+            <a:off x="10981944" y="4334256"/>
+            <a:ext cx="384048" cy="384048"/>
+          </a:xfrm>
+          <a:prstGeom prst="ellipse">
+            <a:avLst/>
+          </a:prstGeom>
+          <a:solidFill>
+            <a:srgbClr val="1B6FA8"/>
+          </a:solidFill>
+          <a:ln w="12700">
+            <a:solidFill>
+              <a:srgbClr val="1B6FA8"/>
+            </a:solidFill>
+            <a:prstDash val="solid"/>
+          </a:ln>
+        </p:spPr>
+      </p:sp>
+      <p:sp>
+        <p:nvSpPr>
+          <p:cNvPr id="20" name="Text 18"/>
+          <p:cNvSpPr/>
+          <p:nvPr/>
+        </p:nvSpPr>
+        <p:spPr>
+          <a:xfrm>
+            <a:off x="10981944" y="4334256"/>
+            <a:ext cx="384048" cy="384048"/>
+          </a:xfrm>
+          <a:prstGeom prst="rect">
+            <a:avLst/>
+          </a:prstGeom>
+          <a:noFill/>
+          <a:ln/>
+        </p:spPr>
+        <p:txBody>
+          <a:bodyPr wrap="square" lIns="0" tIns="0" rIns="0" bIns="0" rtlCol="0" anchor="ctr"/>
+          <a:lstStyle/>
+          <a:p>
+            <a:pPr rtl="1" algn="ctr" indent="0" marL="0">
+              <a:buNone/>
+            </a:pPr>
+            <a:r>
+              <a:rPr lang="en-US" sz="1400" b="1" dirty="0">
+                <a:solidFill>
+                  <a:srgbClr val="FFFFFF"/>
+                </a:solidFill>
+                <a:latin typeface="Arial" pitchFamily="34" charset="0"/>
+                <a:ea typeface="Arial" pitchFamily="34" charset="-122"/>
+                <a:cs typeface="Arial" pitchFamily="34" charset="-120"/>
+              </a:rPr>
+              <a:t>1</a:t>
+            </a:r>
+            <a:endParaRPr lang="en-US" sz="1400" dirty="0"/>
+          </a:p>
+        </p:txBody>
+      </p:sp>
+      <p:sp>
+        <p:nvSpPr>
+          <p:cNvPr id="21" name="Text 19"/>
+          <p:cNvSpPr/>
+          <p:nvPr/>
+        </p:nvSpPr>
+        <p:spPr>
+          <a:xfrm>
+            <a:off x="8311896" y="4370832"/>
+            <a:ext cx="2468880" cy="310896"/>
+          </a:xfrm>
+          <a:prstGeom prst="rect">
+            <a:avLst/>
+          </a:prstGeom>
+          <a:noFill/>
+          <a:ln/>
+        </p:spPr>
+        <p:txBody>
+          <a:bodyPr wrap="square" lIns="0" tIns="0" rIns="0" bIns="0" rtlCol="0" anchor="ctr"/>
+          <a:lstStyle/>
+          <a:p>
+            <a:pPr rtl="1" algn="r" indent="0" marL="0">
+              <a:buNone/>
+            </a:pPr>
+            <a:r>
+              <a:rPr lang="en-US" sz="1500" b="1" dirty="0">
+                <a:solidFill>
+                  <a:srgbClr val="12384F"/>
+                </a:solidFill>
+                <a:latin typeface="Arial" pitchFamily="34" charset="0"/>
+                <a:ea typeface="Arial" pitchFamily="34" charset="-122"/>
+                <a:cs typeface="Arial" pitchFamily="34" charset="-120"/>
+              </a:rPr>
+              <a:t>المصدر جاهز</a:t>
+            </a:r>
+            <a:endParaRPr lang="en-US" sz="1500" dirty="0"/>
+          </a:p>
+        </p:txBody>
+      </p:sp>
+      <p:sp>
+        <p:nvSpPr>
+          <p:cNvPr id="22" name="Text 20"/>
+          <p:cNvSpPr/>
+          <p:nvPr/>
+        </p:nvSpPr>
+        <p:spPr>
+          <a:xfrm>
+            <a:off x="8311896" y="4773168"/>
+            <a:ext cx="3090672" cy="969264"/>
+          </a:xfrm>
+          <a:prstGeom prst="rect">
+            <a:avLst/>
+          </a:prstGeom>
+          <a:noFill/>
+          <a:ln/>
+        </p:spPr>
+        <p:txBody>
+          <a:bodyPr wrap="square" lIns="0" tIns="0" rIns="0" bIns="0" rtlCol="0" anchor="ctr"/>
+          <a:lstStyle/>
+          <a:p>
+            <a:pPr rtl="1" algn="r" indent="0" marL="0">
+              <a:lnSpc>
+                <a:spcPct val="122000"/>
+              </a:lnSpc>
+              <a:buNone/>
+            </a:pPr>
+            <a:r>
+              <a:rPr lang="en-US" sz="1100" dirty="0">
+                <a:solidFill>
+                  <a:srgbClr val="12384F"/>
+                </a:solidFill>
+                <a:latin typeface="Arial" pitchFamily="34" charset="0"/>
+                <a:ea typeface="Arial" pitchFamily="34" charset="-122"/>
+                <a:cs typeface="Arial" pitchFamily="34" charset="-120"/>
+              </a:rPr>
+              <a:t>استمارة UCAF تُكتب بالحاسوب، فحقولها تُستخرج نصّاً بلا مسح ضوئي. وهي لقطة لما رُفع فعلاً، فلا يتسرّب إليها المستقبل.</a:t>
+            </a:r>
+            <a:endParaRPr lang="en-US" sz="1100" dirty="0"/>
+          </a:p>
+        </p:txBody>
+      </p:sp>
+      <p:sp>
+        <p:nvSpPr>
+          <p:cNvPr id="23" name="Shape 21"/>
+          <p:cNvSpPr/>
+          <p:nvPr/>
+        </p:nvSpPr>
+        <p:spPr>
+          <a:xfrm>
+            <a:off x="4334256" y="4187952"/>
+            <a:ext cx="3493008" cy="1691640"/>
+          </a:xfrm>
+          <a:prstGeom prst="roundRect">
+            <a:avLst>
+              <a:gd name="adj" fmla="val 3243"/>
+            </a:avLst>
+          </a:prstGeom>
+          <a:solidFill>
+            <a:srgbClr val="EFF4F9"/>
+          </a:solidFill>
+          <a:ln w="12700">
+            <a:solidFill>
+              <a:srgbClr val="D6E2ED"/>
+            </a:solidFill>
+            <a:prstDash val="solid"/>
+          </a:ln>
+        </p:spPr>
+      </p:sp>
+      <p:sp>
+        <p:nvSpPr>
+          <p:cNvPr id="24" name="Shape 22"/>
+          <p:cNvSpPr/>
+          <p:nvPr/>
+        </p:nvSpPr>
+        <p:spPr>
+          <a:xfrm>
+            <a:off x="7205472" y="4334256"/>
+            <a:ext cx="384048" cy="384048"/>
+          </a:xfrm>
+          <a:prstGeom prst="ellipse">
+            <a:avLst/>
+          </a:prstGeom>
+          <a:solidFill>
+            <a:srgbClr val="96590F"/>
+          </a:solidFill>
+          <a:ln w="12700">
+            <a:solidFill>
+              <a:srgbClr val="96590F"/>
+            </a:solidFill>
+            <a:prstDash val="solid"/>
+          </a:ln>
+        </p:spPr>
+      </p:sp>
+      <p:sp>
+        <p:nvSpPr>
+          <p:cNvPr id="25" name="Text 23"/>
+          <p:cNvSpPr/>
+          <p:nvPr/>
+        </p:nvSpPr>
+        <p:spPr>
+          <a:xfrm>
+            <a:off x="7205472" y="4334256"/>
+            <a:ext cx="384048" cy="384048"/>
+          </a:xfrm>
+          <a:prstGeom prst="rect">
+            <a:avLst/>
+          </a:prstGeom>
+          <a:noFill/>
+          <a:ln/>
+        </p:spPr>
+        <p:txBody>
+          <a:bodyPr wrap="square" lIns="0" tIns="0" rIns="0" bIns="0" rtlCol="0" anchor="ctr"/>
+          <a:lstStyle/>
+          <a:p>
+            <a:pPr rtl="1" algn="ctr" indent="0" marL="0">
+              <a:buNone/>
+            </a:pPr>
+            <a:r>
+              <a:rPr lang="en-US" sz="1400" b="1" dirty="0">
+                <a:solidFill>
+                  <a:srgbClr val="FFFFFF"/>
+                </a:solidFill>
+                <a:latin typeface="Arial" pitchFamily="34" charset="0"/>
+                <a:ea typeface="Arial" pitchFamily="34" charset="-122"/>
+                <a:cs typeface="Arial" pitchFamily="34" charset="-120"/>
+              </a:rPr>
+              <a:t>2</a:t>
+            </a:r>
+            <a:endParaRPr lang="en-US" sz="1400" dirty="0"/>
+          </a:p>
+        </p:txBody>
+      </p:sp>
+      <p:sp>
+        <p:nvSpPr>
+          <p:cNvPr id="26" name="Text 24"/>
+          <p:cNvSpPr/>
+          <p:nvPr/>
+        </p:nvSpPr>
+        <p:spPr>
+          <a:xfrm>
+            <a:off x="4535424" y="4370832"/>
+            <a:ext cx="2468880" cy="310896"/>
+          </a:xfrm>
+          <a:prstGeom prst="rect">
+            <a:avLst/>
+          </a:prstGeom>
+          <a:noFill/>
+          <a:ln/>
+        </p:spPr>
+        <p:txBody>
+          <a:bodyPr wrap="square" lIns="0" tIns="0" rIns="0" bIns="0" rtlCol="0" anchor="ctr"/>
+          <a:lstStyle/>
+          <a:p>
+            <a:pPr rtl="1" algn="r" indent="0" marL="0">
+              <a:buNone/>
+            </a:pPr>
+            <a:r>
+              <a:rPr lang="en-US" sz="1500" b="1" dirty="0">
+                <a:solidFill>
+                  <a:srgbClr val="12384F"/>
+                </a:solidFill>
+                <a:latin typeface="Arial" pitchFamily="34" charset="0"/>
+                <a:ea typeface="Arial" pitchFamily="34" charset="-122"/>
+                <a:cs typeface="Arial" pitchFamily="34" charset="-120"/>
+              </a:rPr>
+              <a:t>ما الذي يُضاف</a:t>
+            </a:r>
+            <a:endParaRPr lang="en-US" sz="1500" dirty="0"/>
+          </a:p>
+        </p:txBody>
+      </p:sp>
+      <p:sp>
+        <p:nvSpPr>
+          <p:cNvPr id="27" name="Text 25"/>
+          <p:cNvSpPr/>
+          <p:nvPr/>
+        </p:nvSpPr>
+        <p:spPr>
+          <a:xfrm>
+            <a:off x="4535424" y="4773168"/>
+            <a:ext cx="3090672" cy="969264"/>
+          </a:xfrm>
+          <a:prstGeom prst="rect">
+            <a:avLst/>
+          </a:prstGeom>
+          <a:noFill/>
+          <a:ln/>
+        </p:spPr>
+        <p:txBody>
+          <a:bodyPr wrap="square" lIns="0" tIns="0" rIns="0" bIns="0" rtlCol="0" anchor="ctr"/>
+          <a:lstStyle/>
+          <a:p>
+            <a:pPr rtl="1" algn="r" indent="0" marL="0">
+              <a:lnSpc>
+                <a:spcPct val="122000"/>
+              </a:lnSpc>
+              <a:buNone/>
+            </a:pPr>
+            <a:r>
+              <a:rPr lang="en-US" sz="1100" dirty="0">
+                <a:solidFill>
+                  <a:srgbClr val="12384F"/>
+                </a:solidFill>
+                <a:latin typeface="Arial" pitchFamily="34" charset="0"/>
+                <a:ea typeface="Arial" pitchFamily="34" charset="-122"/>
+                <a:cs typeface="Arial" pitchFamily="34" charset="-120"/>
+              </a:rPr>
+              <a:t>رايات اكتمال لكل حقل ودرجة اكتمال إجمالية، بلا نصّ ولا معرّف شخصي. تُحسب عند الاستخراج ثم يُتلَف المصدر.</a:t>
+            </a:r>
+            <a:endParaRPr lang="en-US" sz="1100" dirty="0"/>
+          </a:p>
+        </p:txBody>
+      </p:sp>
+      <p:sp>
+        <p:nvSpPr>
+          <p:cNvPr id="28" name="Shape 26"/>
+          <p:cNvSpPr/>
+          <p:nvPr/>
+        </p:nvSpPr>
+        <p:spPr>
+          <a:xfrm>
+            <a:off x="557784" y="4187952"/>
+            <a:ext cx="3493008" cy="1691640"/>
+          </a:xfrm>
+          <a:prstGeom prst="roundRect">
+            <a:avLst>
+              <a:gd name="adj" fmla="val 3243"/>
+            </a:avLst>
+          </a:prstGeom>
+          <a:solidFill>
+            <a:srgbClr val="EFF4F9"/>
+          </a:solidFill>
+          <a:ln w="12700">
+            <a:solidFill>
+              <a:srgbClr val="D6E2ED"/>
+            </a:solidFill>
+            <a:prstDash val="solid"/>
+          </a:ln>
+        </p:spPr>
+      </p:sp>
+      <p:sp>
+        <p:nvSpPr>
+          <p:cNvPr id="29" name="Shape 27"/>
+          <p:cNvSpPr/>
+          <p:nvPr/>
+        </p:nvSpPr>
+        <p:spPr>
+          <a:xfrm>
+            <a:off x="3429000" y="4334256"/>
+            <a:ext cx="384048" cy="384048"/>
+          </a:xfrm>
+          <a:prstGeom prst="ellipse">
+            <a:avLst/>
+          </a:prstGeom>
+          <a:solidFill>
+            <a:srgbClr val="0B7A5E"/>
+          </a:solidFill>
+          <a:ln w="12700">
+            <a:solidFill>
+              <a:srgbClr val="0B7A5E"/>
+            </a:solidFill>
+            <a:prstDash val="solid"/>
+          </a:ln>
+        </p:spPr>
+      </p:sp>
+      <p:sp>
+        <p:nvSpPr>
+          <p:cNvPr id="30" name="Text 28"/>
+          <p:cNvSpPr/>
+          <p:nvPr/>
+        </p:nvSpPr>
+        <p:spPr>
+          <a:xfrm>
+            <a:off x="3429000" y="4334256"/>
+            <a:ext cx="384048" cy="384048"/>
+          </a:xfrm>
+          <a:prstGeom prst="rect">
+            <a:avLst/>
+          </a:prstGeom>
+          <a:noFill/>
+          <a:ln/>
+        </p:spPr>
+        <p:txBody>
+          <a:bodyPr wrap="square" lIns="0" tIns="0" rIns="0" bIns="0" rtlCol="0" anchor="ctr"/>
+          <a:lstStyle/>
+          <a:p>
+            <a:pPr rtl="1" algn="ctr" indent="0" marL="0">
+              <a:buNone/>
+            </a:pPr>
+            <a:r>
+              <a:rPr lang="en-US" sz="1400" b="1" dirty="0">
+                <a:solidFill>
+                  <a:srgbClr val="FFFFFF"/>
+                </a:solidFill>
+                <a:latin typeface="Arial" pitchFamily="34" charset="0"/>
+                <a:ea typeface="Arial" pitchFamily="34" charset="-122"/>
+                <a:cs typeface="Arial" pitchFamily="34" charset="-120"/>
+              </a:rPr>
+              <a:t>3</a:t>
+            </a:r>
+            <a:endParaRPr lang="en-US" sz="1400" dirty="0"/>
+          </a:p>
+        </p:txBody>
+      </p:sp>
+      <p:sp>
+        <p:nvSpPr>
+          <p:cNvPr id="31" name="Text 29"/>
+          <p:cNvSpPr/>
+          <p:nvPr/>
+        </p:nvSpPr>
+        <p:spPr>
+          <a:xfrm>
+            <a:off x="758952" y="4370832"/>
+            <a:ext cx="2468880" cy="310896"/>
+          </a:xfrm>
+          <a:prstGeom prst="rect">
+            <a:avLst/>
+          </a:prstGeom>
+          <a:noFill/>
+          <a:ln/>
+        </p:spPr>
+        <p:txBody>
+          <a:bodyPr wrap="square" lIns="0" tIns="0" rIns="0" bIns="0" rtlCol="0" anchor="ctr"/>
+          <a:lstStyle/>
+          <a:p>
+            <a:pPr rtl="1" algn="r" indent="0" marL="0">
+              <a:buNone/>
+            </a:pPr>
+            <a:r>
+              <a:rPr lang="en-US" sz="1500" b="1" dirty="0">
+                <a:solidFill>
+                  <a:srgbClr val="12384F"/>
+                </a:solidFill>
+                <a:latin typeface="Arial" pitchFamily="34" charset="0"/>
+                <a:ea typeface="Arial" pitchFamily="34" charset="-122"/>
+                <a:cs typeface="Arial" pitchFamily="34" charset="-120"/>
+              </a:rPr>
+              <a:t>وما الذي يتغيّر</a:t>
+            </a:r>
+            <a:endParaRPr lang="en-US" sz="1500" dirty="0"/>
+          </a:p>
+        </p:txBody>
+      </p:sp>
+      <p:sp>
+        <p:nvSpPr>
+          <p:cNvPr id="32" name="Text 30"/>
+          <p:cNvSpPr/>
+          <p:nvPr/>
+        </p:nvSpPr>
+        <p:spPr>
+          <a:xfrm>
+            <a:off x="758952" y="4773168"/>
+            <a:ext cx="3090672" cy="969264"/>
+          </a:xfrm>
+          <a:prstGeom prst="rect">
+            <a:avLst/>
+          </a:prstGeom>
+          <a:noFill/>
+          <a:ln/>
+        </p:spPr>
+        <p:txBody>
+          <a:bodyPr wrap="square" lIns="0" tIns="0" rIns="0" bIns="0" rtlCol="0" anchor="ctr"/>
+          <a:lstStyle/>
+          <a:p>
+            <a:pPr rtl="1" algn="r" indent="0" marL="0">
+              <a:lnSpc>
+                <a:spcPct val="122000"/>
+              </a:lnSpc>
+              <a:buNone/>
+            </a:pPr>
+            <a:r>
+              <a:rPr lang="en-US" sz="1100" dirty="0">
+                <a:solidFill>
+                  <a:srgbClr val="12384F"/>
+                </a:solidFill>
+                <a:latin typeface="Arial" pitchFamily="34" charset="0"/>
+                <a:ea typeface="Arial" pitchFamily="34" charset="-122"/>
+                <a:cs typeface="Arial" pitchFamily="34" charset="-120"/>
+              </a:rPr>
+              <a:t>حقول MDS قابلة للتعديل بالكامل، فينتقل ثقل النموذج من «مَن أنت» إلى «ماذا قدّمت»، ويصير الإنذار قابلاً للتنفيذ.</a:t>
+            </a:r>
+            <a:endParaRPr lang="en-US" sz="1100" dirty="0"/>
+          </a:p>
+        </p:txBody>
+      </p:sp>
+      <p:sp>
+        <p:nvSpPr>
+          <p:cNvPr id="33" name="Text 31"/>
+          <p:cNvSpPr/>
+          <p:nvPr/>
+        </p:nvSpPr>
+        <p:spPr>
+          <a:xfrm>
+            <a:off x="548640" y="6345936"/>
+            <a:ext cx="11064240" cy="274320"/>
+          </a:xfrm>
+          <a:prstGeom prst="rect">
+            <a:avLst/>
+          </a:prstGeom>
+          <a:noFill/>
+          <a:ln/>
+        </p:spPr>
+        <p:txBody>
+          <a:bodyPr wrap="square" lIns="0" tIns="0" rIns="0" bIns="0" rtlCol="0" anchor="ctr"/>
+          <a:lstStyle/>
+          <a:p>
+            <a:pPr rtl="1" algn="r" indent="0" marL="0">
+              <a:buNone/>
+            </a:pPr>
+            <a:r>
+              <a:rPr lang="en-US" sz="950" i="1" dirty="0">
+                <a:solidFill>
+                  <a:srgbClr val="4E657A"/>
+                </a:solidFill>
+                <a:latin typeface="Arial" pitchFamily="34" charset="0"/>
+                <a:ea typeface="Arial" pitchFamily="34" charset="-122"/>
+                <a:cs typeface="Arial" pitchFamily="34" charset="-120"/>
+              </a:rPr>
+              <a:t>لا يُعرض هنا وعدٌ برقم. المقياس المقترح ثلاثي: AUC، ودقّة تشخيص السبب، ونسبة الخطر الواقعة في حقول قابلة للتعديل (نحو 30 بالمئة اليوم).</a:t>
+            </a:r>
+            <a:endParaRPr lang="en-US" sz="950" dirty="0"/>
+          </a:p>
+        </p:txBody>
+      </p:sp>
+    </p:spTree>
+  </p:cSld>
+  <p:clrMapOvr>
+    <a:masterClrMapping/>
+  </p:clrMapOvr>
+</p:sld>
+</file>
+
+<file path=ppt/slides/slide15.xml><?xml version="1.0" encoding="utf-8"?>
+<p:sld xmlns:a="http://schemas.openxmlformats.org/drawingml/2006/main" xmlns:r="http://schemas.openxmlformats.org/officeDocument/2006/relationships" xmlns:p="http://schemas.openxmlformats.org/presentationml/2006/main">
+  <p:cSld name="Slide 15">
     <p:bg>
       <p:bgPr>
         <a:solidFill>
@@ -7726,7 +9181,7 @@
                 <a:ea typeface="Arial" pitchFamily="34" charset="-122"/>
                 <a:cs typeface="Arial" pitchFamily="34" charset="-120"/>
               </a:rPr>
-              <a:t>ثلاث مراحل خلال ربع واحد</a:t>
+              <a:t>أربع مراحل — أوّلها قرار واحد</a:t>
             </a:r>
             <a:endParaRPr lang="en-US" sz="3200" dirty="0"/>
           </a:p>
@@ -7740,8 +9195,8 @@
         </p:nvSpPr>
         <p:spPr>
           <a:xfrm>
-            <a:off x="8110728" y="1572768"/>
-            <a:ext cx="3493008" cy="2487168"/>
+            <a:off x="9043416" y="1572768"/>
+            <a:ext cx="2560320" cy="2487168"/>
           </a:xfrm>
           <a:prstGeom prst="roundRect">
             <a:avLst>
@@ -7767,8 +9222,8 @@
         </p:nvSpPr>
         <p:spPr>
           <a:xfrm>
-            <a:off x="10917936" y="1783080"/>
-            <a:ext cx="457200" cy="457200"/>
+            <a:off x="11018520" y="1773936"/>
+            <a:ext cx="420624" cy="420624"/>
           </a:xfrm>
           <a:prstGeom prst="ellipse">
             <a:avLst/>
@@ -7792,8 +9247,8 @@
         </p:nvSpPr>
         <p:spPr>
           <a:xfrm>
-            <a:off x="10917936" y="1783080"/>
-            <a:ext cx="457200" cy="457200"/>
+            <a:off x="11018520" y="1773936"/>
+            <a:ext cx="420624" cy="420624"/>
           </a:xfrm>
           <a:prstGeom prst="rect">
             <a:avLst/>
@@ -7809,7 +9264,7 @@
               <a:buNone/>
             </a:pPr>
             <a:r>
-              <a:rPr lang="en-US" sz="1700" b="1" dirty="0">
+              <a:rPr lang="en-US" sz="1500" b="1" dirty="0">
                 <a:solidFill>
                   <a:srgbClr val="12384F"/>
                 </a:solidFill>
@@ -7819,7 +9274,7 @@
               </a:rPr>
               <a:t>1</a:t>
             </a:r>
-            <a:endParaRPr lang="en-US" sz="1700" dirty="0"/>
+            <a:endParaRPr lang="en-US" sz="1500" dirty="0"/>
           </a:p>
         </p:txBody>
       </p:sp>
@@ -7831,24 +9286,24 @@
         </p:nvSpPr>
         <p:spPr>
           <a:xfrm>
-            <a:off x="8339328" y="1828800"/>
-            <a:ext cx="2468880" cy="384048"/>
-          </a:xfrm>
-          <a:prstGeom prst="rect">
-            <a:avLst/>
-          </a:prstGeom>
-          <a:noFill/>
-          <a:ln/>
-        </p:spPr>
-        <p:txBody>
-          <a:bodyPr wrap="square" lIns="0" tIns="0" rIns="0" bIns="0" rtlCol="0" anchor="ctr"/>
-          <a:lstStyle/>
-          <a:p>
-            <a:pPr rtl="1" algn="r" indent="0" marL="0">
-              <a:buNone/>
-            </a:pPr>
-            <a:r>
-              <a:rPr lang="en-US" sz="1900" b="1" dirty="0">
+            <a:off x="9244584" y="1810512"/>
+            <a:ext cx="1691640" cy="365760"/>
+          </a:xfrm>
+          <a:prstGeom prst="rect">
+            <a:avLst/>
+          </a:prstGeom>
+          <a:noFill/>
+          <a:ln/>
+        </p:spPr>
+        <p:txBody>
+          <a:bodyPr wrap="square" lIns="0" tIns="0" rIns="0" bIns="0" rtlCol="0" anchor="ctr"/>
+          <a:lstStyle/>
+          <a:p>
+            <a:pPr rtl="1" algn="r" indent="0" marL="0">
+              <a:buNone/>
+            </a:pPr>
+            <a:r>
+              <a:rPr lang="en-US" sz="1600" b="1" dirty="0">
                 <a:solidFill>
                   <a:srgbClr val="FFFFFF"/>
                 </a:solidFill>
@@ -7858,7 +9313,7 @@
               </a:rPr>
               <a:t>تشغيل تجريبي</a:t>
             </a:r>
-            <a:endParaRPr lang="en-US" sz="1900" dirty="0"/>
+            <a:endParaRPr lang="en-US" sz="1600" dirty="0"/>
           </a:p>
         </p:txBody>
       </p:sp>
@@ -7870,8 +9325,8 @@
         </p:nvSpPr>
         <p:spPr>
           <a:xfrm>
-            <a:off x="8339328" y="2395728"/>
-            <a:ext cx="3035808" cy="1097280"/>
+            <a:off x="9244584" y="2322576"/>
+            <a:ext cx="2157984" cy="1188720"/>
           </a:xfrm>
           <a:prstGeom prst="rect">
             <a:avLst/>
@@ -7885,12 +9340,12 @@
           <a:p>
             <a:pPr rtl="1" algn="r" indent="0" marL="0">
               <a:lnSpc>
-                <a:spcPct val="130000"/>
+                <a:spcPct val="128000"/>
               </a:lnSpc>
               <a:buNone/>
             </a:pPr>
             <a:r>
-              <a:rPr lang="en-US" sz="1250" dirty="0">
+              <a:rPr lang="en-US" sz="1150" dirty="0">
                 <a:solidFill>
                   <a:srgbClr val="9FC8E0"/>
                 </a:solidFill>
@@ -7900,7 +9355,7 @@
               </a:rPr>
               <a:t>مستشفى واحد وأعلى ثلاثة عقود قيمةً، وتُقاس فيه نسبة الإصلاح الفعلية ميدانياً.</a:t>
             </a:r>
-            <a:endParaRPr lang="en-US" sz="1250" dirty="0"/>
+            <a:endParaRPr lang="en-US" sz="1150" dirty="0"/>
           </a:p>
         </p:txBody>
       </p:sp>
@@ -7912,24 +9367,24 @@
         </p:nvSpPr>
         <p:spPr>
           <a:xfrm>
-            <a:off x="8339328" y="3584448"/>
-            <a:ext cx="3035808" cy="310896"/>
-          </a:xfrm>
-          <a:prstGeom prst="rect">
-            <a:avLst/>
-          </a:prstGeom>
-          <a:noFill/>
-          <a:ln/>
-        </p:spPr>
-        <p:txBody>
-          <a:bodyPr wrap="square" lIns="0" tIns="0" rIns="0" bIns="0" rtlCol="0" anchor="ctr"/>
-          <a:lstStyle/>
-          <a:p>
-            <a:pPr rtl="1" algn="r" indent="0" marL="0">
-              <a:buNone/>
-            </a:pPr>
-            <a:r>
-              <a:rPr lang="en-US" sz="1150" b="1" dirty="0">
+            <a:off x="9244584" y="3602736"/>
+            <a:ext cx="2157984" cy="292608"/>
+          </a:xfrm>
+          <a:prstGeom prst="rect">
+            <a:avLst/>
+          </a:prstGeom>
+          <a:noFill/>
+          <a:ln/>
+        </p:spPr>
+        <p:txBody>
+          <a:bodyPr wrap="square" lIns="0" tIns="0" rIns="0" bIns="0" rtlCol="0" anchor="ctr"/>
+          <a:lstStyle/>
+          <a:p>
+            <a:pPr rtl="1" algn="r" indent="0" marL="0">
+              <a:buNone/>
+            </a:pPr>
+            <a:r>
+              <a:rPr lang="en-US" sz="1100" b="1" dirty="0">
                 <a:solidFill>
                   <a:srgbClr val="7FE3C0"/>
                 </a:solidFill>
@@ -7939,7 +9394,7 @@
               </a:rPr>
               <a:t>4 أسابيع</a:t>
             </a:r>
-            <a:endParaRPr lang="en-US" sz="1150" dirty="0"/>
+            <a:endParaRPr lang="en-US" sz="1100" dirty="0"/>
           </a:p>
         </p:txBody>
       </p:sp>
@@ -7951,8 +9406,8 @@
         </p:nvSpPr>
         <p:spPr>
           <a:xfrm>
-            <a:off x="4334256" y="1572768"/>
-            <a:ext cx="3493008" cy="2487168"/>
+            <a:off x="6217920" y="1572768"/>
+            <a:ext cx="2560320" cy="2487168"/>
           </a:xfrm>
           <a:prstGeom prst="roundRect">
             <a:avLst>
@@ -7978,8 +9433,8 @@
         </p:nvSpPr>
         <p:spPr>
           <a:xfrm>
-            <a:off x="7141464" y="1783080"/>
-            <a:ext cx="457200" cy="457200"/>
+            <a:off x="8193024" y="1773936"/>
+            <a:ext cx="420624" cy="420624"/>
           </a:xfrm>
           <a:prstGeom prst="ellipse">
             <a:avLst/>
@@ -8003,8 +9458,8 @@
         </p:nvSpPr>
         <p:spPr>
           <a:xfrm>
-            <a:off x="7141464" y="1783080"/>
-            <a:ext cx="457200" cy="457200"/>
+            <a:off x="8193024" y="1773936"/>
+            <a:ext cx="420624" cy="420624"/>
           </a:xfrm>
           <a:prstGeom prst="rect">
             <a:avLst/>
@@ -8020,7 +9475,7 @@
               <a:buNone/>
             </a:pPr>
             <a:r>
-              <a:rPr lang="en-US" sz="1700" b="1" dirty="0">
+              <a:rPr lang="en-US" sz="1500" b="1" dirty="0">
                 <a:solidFill>
                   <a:srgbClr val="12384F"/>
                 </a:solidFill>
@@ -8030,7 +9485,7 @@
               </a:rPr>
               <a:t>2</a:t>
             </a:r>
-            <a:endParaRPr lang="en-US" sz="1700" dirty="0"/>
+            <a:endParaRPr lang="en-US" sz="1500" dirty="0"/>
           </a:p>
         </p:txBody>
       </p:sp>
@@ -8042,24 +9497,24 @@
         </p:nvSpPr>
         <p:spPr>
           <a:xfrm>
-            <a:off x="4562856" y="1828800"/>
-            <a:ext cx="2468880" cy="384048"/>
-          </a:xfrm>
-          <a:prstGeom prst="rect">
-            <a:avLst/>
-          </a:prstGeom>
-          <a:noFill/>
-          <a:ln/>
-        </p:spPr>
-        <p:txBody>
-          <a:bodyPr wrap="square" lIns="0" tIns="0" rIns="0" bIns="0" rtlCol="0" anchor="ctr"/>
-          <a:lstStyle/>
-          <a:p>
-            <a:pPr rtl="1" algn="r" indent="0" marL="0">
-              <a:buNone/>
-            </a:pPr>
-            <a:r>
-              <a:rPr lang="en-US" sz="1900" b="1" dirty="0">
+            <a:off x="6419088" y="1810512"/>
+            <a:ext cx="1691640" cy="365760"/>
+          </a:xfrm>
+          <a:prstGeom prst="rect">
+            <a:avLst/>
+          </a:prstGeom>
+          <a:noFill/>
+          <a:ln/>
+        </p:spPr>
+        <p:txBody>
+          <a:bodyPr wrap="square" lIns="0" tIns="0" rIns="0" bIns="0" rtlCol="0" anchor="ctr"/>
+          <a:lstStyle/>
+          <a:p>
+            <a:pPr rtl="1" algn="r" indent="0" marL="0">
+              <a:buNone/>
+            </a:pPr>
+            <a:r>
+              <a:rPr lang="en-US" sz="1600" b="1" dirty="0">
                 <a:solidFill>
                   <a:srgbClr val="FFFFFF"/>
                 </a:solidFill>
@@ -8067,9 +9522,9 @@
                 <a:ea typeface="Arial" pitchFamily="34" charset="-122"/>
                 <a:cs typeface="Arial" pitchFamily="34" charset="-120"/>
               </a:rPr>
-              <a:t>إلزام الفحص المسبق</a:t>
-            </a:r>
-            <a:endParaRPr lang="en-US" sz="1900" dirty="0"/>
+              <a:t>إلزام الفحص</a:t>
+            </a:r>
+            <a:endParaRPr lang="en-US" sz="1600" dirty="0"/>
           </a:p>
         </p:txBody>
       </p:sp>
@@ -8081,8 +9536,8 @@
         </p:nvSpPr>
         <p:spPr>
           <a:xfrm>
-            <a:off x="4562856" y="2395728"/>
-            <a:ext cx="3035808" cy="1097280"/>
+            <a:off x="6419088" y="2322576"/>
+            <a:ext cx="2157984" cy="1188720"/>
           </a:xfrm>
           <a:prstGeom prst="rect">
             <a:avLst/>
@@ -8096,12 +9551,12 @@
           <a:p>
             <a:pPr rtl="1" algn="r" indent="0" marL="0">
               <a:lnSpc>
-                <a:spcPct val="130000"/>
+                <a:spcPct val="128000"/>
               </a:lnSpc>
               <a:buNone/>
             </a:pPr>
             <a:r>
-              <a:rPr lang="en-US" sz="1250" dirty="0">
+              <a:rPr lang="en-US" sz="1150" dirty="0">
                 <a:solidFill>
                   <a:srgbClr val="9FC8E0"/>
                 </a:solidFill>
@@ -8109,9 +9564,9 @@
                 <a:ea typeface="Arial" pitchFamily="34" charset="-122"/>
                 <a:cs typeface="Arial" pitchFamily="34" charset="-120"/>
               </a:rPr>
-              <a:t>إدخال سديد خطوةً إلزامية قبل رفع الطلب في المسار المعتمد، وربط مخرجاته بلوحة Power BI القائمة.</a:t>
-            </a:r>
-            <a:endParaRPr lang="en-US" sz="1250" dirty="0"/>
+              <a:t>إدخال سديد خطوةً إلزامية قبل رفع الطلب، وربط مخرجاته بلوحة Power BI القائمة.</a:t>
+            </a:r>
+            <a:endParaRPr lang="en-US" sz="1150" dirty="0"/>
           </a:p>
         </p:txBody>
       </p:sp>
@@ -8123,24 +9578,24 @@
         </p:nvSpPr>
         <p:spPr>
           <a:xfrm>
-            <a:off x="4562856" y="3584448"/>
-            <a:ext cx="3035808" cy="310896"/>
-          </a:xfrm>
-          <a:prstGeom prst="rect">
-            <a:avLst/>
-          </a:prstGeom>
-          <a:noFill/>
-          <a:ln/>
-        </p:spPr>
-        <p:txBody>
-          <a:bodyPr wrap="square" lIns="0" tIns="0" rIns="0" bIns="0" rtlCol="0" anchor="ctr"/>
-          <a:lstStyle/>
-          <a:p>
-            <a:pPr rtl="1" algn="r" indent="0" marL="0">
-              <a:buNone/>
-            </a:pPr>
-            <a:r>
-              <a:rPr lang="en-US" sz="1150" b="1" dirty="0">
+            <a:off x="6419088" y="3602736"/>
+            <a:ext cx="2157984" cy="292608"/>
+          </a:xfrm>
+          <a:prstGeom prst="rect">
+            <a:avLst/>
+          </a:prstGeom>
+          <a:noFill/>
+          <a:ln/>
+        </p:spPr>
+        <p:txBody>
+          <a:bodyPr wrap="square" lIns="0" tIns="0" rIns="0" bIns="0" rtlCol="0" anchor="ctr"/>
+          <a:lstStyle/>
+          <a:p>
+            <a:pPr rtl="1" algn="r" indent="0" marL="0">
+              <a:buNone/>
+            </a:pPr>
+            <a:r>
+              <a:rPr lang="en-US" sz="1100" b="1" dirty="0">
                 <a:solidFill>
                   <a:srgbClr val="7FE3C0"/>
                 </a:solidFill>
@@ -8150,7 +9605,7 @@
               </a:rPr>
               <a:t>4 أسابيع</a:t>
             </a:r>
-            <a:endParaRPr lang="en-US" sz="1150" dirty="0"/>
+            <a:endParaRPr lang="en-US" sz="1100" dirty="0"/>
           </a:p>
         </p:txBody>
       </p:sp>
@@ -8162,8 +9617,8 @@
         </p:nvSpPr>
         <p:spPr>
           <a:xfrm>
-            <a:off x="557784" y="1572768"/>
-            <a:ext cx="3493008" cy="2487168"/>
+            <a:off x="3392424" y="1572768"/>
+            <a:ext cx="2560320" cy="2487168"/>
           </a:xfrm>
           <a:prstGeom prst="roundRect">
             <a:avLst>
@@ -8189,8 +9644,8 @@
         </p:nvSpPr>
         <p:spPr>
           <a:xfrm>
-            <a:off x="3364992" y="1783080"/>
-            <a:ext cx="457200" cy="457200"/>
+            <a:off x="5367528" y="1773936"/>
+            <a:ext cx="420624" cy="420624"/>
           </a:xfrm>
           <a:prstGeom prst="ellipse">
             <a:avLst/>
@@ -8214,8 +9669,8 @@
         </p:nvSpPr>
         <p:spPr>
           <a:xfrm>
-            <a:off x="3364992" y="1783080"/>
-            <a:ext cx="457200" cy="457200"/>
+            <a:off x="5367528" y="1773936"/>
+            <a:ext cx="420624" cy="420624"/>
           </a:xfrm>
           <a:prstGeom prst="rect">
             <a:avLst/>
@@ -8231,7 +9686,7 @@
               <a:buNone/>
             </a:pPr>
             <a:r>
-              <a:rPr lang="en-US" sz="1700" b="1" dirty="0">
+              <a:rPr lang="en-US" sz="1500" b="1" dirty="0">
                 <a:solidFill>
                   <a:srgbClr val="12384F"/>
                 </a:solidFill>
@@ -8241,7 +9696,7 @@
               </a:rPr>
               <a:t>3</a:t>
             </a:r>
-            <a:endParaRPr lang="en-US" sz="1700" dirty="0"/>
+            <a:endParaRPr lang="en-US" sz="1500" dirty="0"/>
           </a:p>
         </p:txBody>
       </p:sp>
@@ -8253,24 +9708,24 @@
         </p:nvSpPr>
         <p:spPr>
           <a:xfrm>
-            <a:off x="786384" y="1828800"/>
-            <a:ext cx="2468880" cy="384048"/>
-          </a:xfrm>
-          <a:prstGeom prst="rect">
-            <a:avLst/>
-          </a:prstGeom>
-          <a:noFill/>
-          <a:ln/>
-        </p:spPr>
-        <p:txBody>
-          <a:bodyPr wrap="square" lIns="0" tIns="0" rIns="0" bIns="0" rtlCol="0" anchor="ctr"/>
-          <a:lstStyle/>
-          <a:p>
-            <a:pPr rtl="1" algn="r" indent="0" marL="0">
-              <a:buNone/>
-            </a:pPr>
-            <a:r>
-              <a:rPr lang="en-US" sz="1900" b="1" dirty="0">
+            <a:off x="3593592" y="1810512"/>
+            <a:ext cx="1691640" cy="365760"/>
+          </a:xfrm>
+          <a:prstGeom prst="rect">
+            <a:avLst/>
+          </a:prstGeom>
+          <a:noFill/>
+          <a:ln/>
+        </p:spPr>
+        <p:txBody>
+          <a:bodyPr wrap="square" lIns="0" tIns="0" rIns="0" bIns="0" rtlCol="0" anchor="ctr"/>
+          <a:lstStyle/>
+          <a:p>
+            <a:pPr rtl="1" algn="r" indent="0" marL="0">
+              <a:buNone/>
+            </a:pPr>
+            <a:r>
+              <a:rPr lang="en-US" sz="1600" b="1" dirty="0">
                 <a:solidFill>
                   <a:srgbClr val="FFFFFF"/>
                 </a:solidFill>
@@ -8278,22 +9733,233 @@
                 <a:ea typeface="Arial" pitchFamily="34" charset="-122"/>
                 <a:cs typeface="Arial" pitchFamily="34" charset="-120"/>
               </a:rPr>
+              <a:t>إضافة MDS</a:t>
+            </a:r>
+            <a:endParaRPr lang="en-US" sz="1600" dirty="0"/>
+          </a:p>
+        </p:txBody>
+      </p:sp>
+      <p:sp>
+        <p:nvSpPr>
+          <p:cNvPr id="20" name="Text 18"/>
+          <p:cNvSpPr/>
+          <p:nvPr/>
+        </p:nvSpPr>
+        <p:spPr>
+          <a:xfrm>
+            <a:off x="3593592" y="2322576"/>
+            <a:ext cx="2157984" cy="1188720"/>
+          </a:xfrm>
+          <a:prstGeom prst="rect">
+            <a:avLst/>
+          </a:prstGeom>
+          <a:noFill/>
+          <a:ln/>
+        </p:spPr>
+        <p:txBody>
+          <a:bodyPr wrap="square" lIns="0" tIns="0" rIns="0" bIns="0" rtlCol="0" anchor="ctr"/>
+          <a:lstStyle/>
+          <a:p>
+            <a:pPr rtl="1" algn="r" indent="0" marL="0">
+              <a:lnSpc>
+                <a:spcPct val="128000"/>
+              </a:lnSpc>
+              <a:buNone/>
+            </a:pPr>
+            <a:r>
+              <a:rPr lang="en-US" sz="1150" dirty="0">
+                <a:solidFill>
+                  <a:srgbClr val="9FC8E0"/>
+                </a:solidFill>
+                <a:latin typeface="Arial" pitchFamily="34" charset="0"/>
+                <a:ea typeface="Arial" pitchFamily="34" charset="-122"/>
+                <a:cs typeface="Arial" pitchFamily="34" charset="-120"/>
+              </a:rPr>
+              <a:t>استخراج حقول الاكتمال من UCAF، وإعادة التدريب، وقياس الأثر الثلاثي.</a:t>
+            </a:r>
+            <a:endParaRPr lang="en-US" sz="1150" dirty="0"/>
+          </a:p>
+        </p:txBody>
+      </p:sp>
+      <p:sp>
+        <p:nvSpPr>
+          <p:cNvPr id="21" name="Text 19"/>
+          <p:cNvSpPr/>
+          <p:nvPr/>
+        </p:nvSpPr>
+        <p:spPr>
+          <a:xfrm>
+            <a:off x="3593592" y="3602736"/>
+            <a:ext cx="2157984" cy="292608"/>
+          </a:xfrm>
+          <a:prstGeom prst="rect">
+            <a:avLst/>
+          </a:prstGeom>
+          <a:noFill/>
+          <a:ln/>
+        </p:spPr>
+        <p:txBody>
+          <a:bodyPr wrap="square" lIns="0" tIns="0" rIns="0" bIns="0" rtlCol="0" anchor="ctr"/>
+          <a:lstStyle/>
+          <a:p>
+            <a:pPr rtl="1" algn="r" indent="0" marL="0">
+              <a:buNone/>
+            </a:pPr>
+            <a:r>
+              <a:rPr lang="en-US" sz="1100" b="1" dirty="0">
+                <a:solidFill>
+                  <a:srgbClr val="7FE3C0"/>
+                </a:solidFill>
+                <a:latin typeface="Arial" pitchFamily="34" charset="0"/>
+                <a:ea typeface="Arial" pitchFamily="34" charset="-122"/>
+                <a:cs typeface="Arial" pitchFamily="34" charset="-120"/>
+              </a:rPr>
+              <a:t>3 أشهر</a:t>
+            </a:r>
+            <a:endParaRPr lang="en-US" sz="1100" dirty="0"/>
+          </a:p>
+        </p:txBody>
+      </p:sp>
+      <p:sp>
+        <p:nvSpPr>
+          <p:cNvPr id="22" name="Shape 20"/>
+          <p:cNvSpPr/>
+          <p:nvPr/>
+        </p:nvSpPr>
+        <p:spPr>
+          <a:xfrm>
+            <a:off x="566928" y="1572768"/>
+            <a:ext cx="2560320" cy="2487168"/>
+          </a:xfrm>
+          <a:prstGeom prst="roundRect">
+            <a:avLst>
+              <a:gd name="adj" fmla="val 2206"/>
+            </a:avLst>
+          </a:prstGeom>
+          <a:solidFill>
+            <a:srgbClr val="1B4A66"/>
+          </a:solidFill>
+          <a:ln w="12700">
+            <a:solidFill>
+              <a:srgbClr val="2A6288"/>
+            </a:solidFill>
+            <a:prstDash val="solid"/>
+          </a:ln>
+        </p:spPr>
+      </p:sp>
+      <p:sp>
+        <p:nvSpPr>
+          <p:cNvPr id="23" name="Shape 21"/>
+          <p:cNvSpPr/>
+          <p:nvPr/>
+        </p:nvSpPr>
+        <p:spPr>
+          <a:xfrm>
+            <a:off x="2542032" y="1773936"/>
+            <a:ext cx="420624" cy="420624"/>
+          </a:xfrm>
+          <a:prstGeom prst="ellipse">
+            <a:avLst/>
+          </a:prstGeom>
+          <a:solidFill>
+            <a:srgbClr val="9FC8E0"/>
+          </a:solidFill>
+          <a:ln w="12700">
+            <a:solidFill>
+              <a:srgbClr val="9FC8E0"/>
+            </a:solidFill>
+            <a:prstDash val="solid"/>
+          </a:ln>
+        </p:spPr>
+      </p:sp>
+      <p:sp>
+        <p:nvSpPr>
+          <p:cNvPr id="24" name="Text 22"/>
+          <p:cNvSpPr/>
+          <p:nvPr/>
+        </p:nvSpPr>
+        <p:spPr>
+          <a:xfrm>
+            <a:off x="2542032" y="1773936"/>
+            <a:ext cx="420624" cy="420624"/>
+          </a:xfrm>
+          <a:prstGeom prst="rect">
+            <a:avLst/>
+          </a:prstGeom>
+          <a:noFill/>
+          <a:ln/>
+        </p:spPr>
+        <p:txBody>
+          <a:bodyPr wrap="square" lIns="0" tIns="0" rIns="0" bIns="0" rtlCol="0" anchor="ctr"/>
+          <a:lstStyle/>
+          <a:p>
+            <a:pPr rtl="1" algn="ctr" indent="0" marL="0">
+              <a:buNone/>
+            </a:pPr>
+            <a:r>
+              <a:rPr lang="en-US" sz="1500" b="1" dirty="0">
+                <a:solidFill>
+                  <a:srgbClr val="12384F"/>
+                </a:solidFill>
+                <a:latin typeface="Arial" pitchFamily="34" charset="0"/>
+                <a:ea typeface="Arial" pitchFamily="34" charset="-122"/>
+                <a:cs typeface="Arial" pitchFamily="34" charset="-120"/>
+              </a:rPr>
+              <a:t>4</a:t>
+            </a:r>
+            <a:endParaRPr lang="en-US" sz="1500" dirty="0"/>
+          </a:p>
+        </p:txBody>
+      </p:sp>
+      <p:sp>
+        <p:nvSpPr>
+          <p:cNvPr id="25" name="Text 23"/>
+          <p:cNvSpPr/>
+          <p:nvPr/>
+        </p:nvSpPr>
+        <p:spPr>
+          <a:xfrm>
+            <a:off x="768096" y="1810512"/>
+            <a:ext cx="1691640" cy="365760"/>
+          </a:xfrm>
+          <a:prstGeom prst="rect">
+            <a:avLst/>
+          </a:prstGeom>
+          <a:noFill/>
+          <a:ln/>
+        </p:spPr>
+        <p:txBody>
+          <a:bodyPr wrap="square" lIns="0" tIns="0" rIns="0" bIns="0" rtlCol="0" anchor="ctr"/>
+          <a:lstStyle/>
+          <a:p>
+            <a:pPr rtl="1" algn="r" indent="0" marL="0">
+              <a:buNone/>
+            </a:pPr>
+            <a:r>
+              <a:rPr lang="en-US" sz="1600" b="1" dirty="0">
+                <a:solidFill>
+                  <a:srgbClr val="FFFFFF"/>
+                </a:solidFill>
+                <a:latin typeface="Arial" pitchFamily="34" charset="0"/>
+                <a:ea typeface="Arial" pitchFamily="34" charset="-122"/>
+                <a:cs typeface="Arial" pitchFamily="34" charset="-120"/>
+              </a:rPr>
               <a:t>التعميم والمتابعة</a:t>
             </a:r>
-            <a:endParaRPr lang="en-US" sz="1900" dirty="0"/>
-          </a:p>
-        </p:txBody>
-      </p:sp>
-      <p:sp>
-        <p:nvSpPr>
-          <p:cNvPr id="20" name="Text 18"/>
-          <p:cNvSpPr/>
-          <p:nvPr/>
-        </p:nvSpPr>
-        <p:spPr>
-          <a:xfrm>
-            <a:off x="786384" y="2395728"/>
-            <a:ext cx="3035808" cy="1097280"/>
+            <a:endParaRPr lang="en-US" sz="1600" dirty="0"/>
+          </a:p>
+        </p:txBody>
+      </p:sp>
+      <p:sp>
+        <p:nvSpPr>
+          <p:cNvPr id="26" name="Text 24"/>
+          <p:cNvSpPr/>
+          <p:nvPr/>
+        </p:nvSpPr>
+        <p:spPr>
+          <a:xfrm>
+            <a:off x="768096" y="2322576"/>
+            <a:ext cx="2157984" cy="1188720"/>
           </a:xfrm>
           <a:prstGeom prst="rect">
             <a:avLst/>
@@ -8307,12 +9973,12 @@
           <a:p>
             <a:pPr rtl="1" algn="r" indent="0" marL="0">
               <a:lnSpc>
-                <a:spcPct val="130000"/>
+                <a:spcPct val="128000"/>
               </a:lnSpc>
               <a:buNone/>
             </a:pPr>
             <a:r>
-              <a:rPr lang="en-US" sz="1250" dirty="0">
+              <a:rPr lang="en-US" sz="1150" dirty="0">
                 <a:solidFill>
                   <a:srgbClr val="9FC8E0"/>
                 </a:solidFill>
@@ -8322,36 +9988,36 @@
               </a:rPr>
               <a:t>التوسّع على مستوى التجمع، وإعادة تدريب ربع سنوية، ومتابعة أثر الاعتماد شهرياً.</a:t>
             </a:r>
-            <a:endParaRPr lang="en-US" sz="1250" dirty="0"/>
-          </a:p>
-        </p:txBody>
-      </p:sp>
-      <p:sp>
-        <p:nvSpPr>
-          <p:cNvPr id="21" name="Text 19"/>
-          <p:cNvSpPr/>
-          <p:nvPr/>
-        </p:nvSpPr>
-        <p:spPr>
-          <a:xfrm>
-            <a:off x="786384" y="3584448"/>
-            <a:ext cx="3035808" cy="310896"/>
-          </a:xfrm>
-          <a:prstGeom prst="rect">
-            <a:avLst/>
-          </a:prstGeom>
-          <a:noFill/>
-          <a:ln/>
-        </p:spPr>
-        <p:txBody>
-          <a:bodyPr wrap="square" lIns="0" tIns="0" rIns="0" bIns="0" rtlCol="0" anchor="ctr"/>
-          <a:lstStyle/>
-          <a:p>
-            <a:pPr rtl="1" algn="r" indent="0" marL="0">
-              <a:buNone/>
-            </a:pPr>
-            <a:r>
-              <a:rPr lang="en-US" sz="1150" b="1" dirty="0">
+            <a:endParaRPr lang="en-US" sz="1150" dirty="0"/>
+          </a:p>
+        </p:txBody>
+      </p:sp>
+      <p:sp>
+        <p:nvSpPr>
+          <p:cNvPr id="27" name="Text 25"/>
+          <p:cNvSpPr/>
+          <p:nvPr/>
+        </p:nvSpPr>
+        <p:spPr>
+          <a:xfrm>
+            <a:off x="768096" y="3602736"/>
+            <a:ext cx="2157984" cy="292608"/>
+          </a:xfrm>
+          <a:prstGeom prst="rect">
+            <a:avLst/>
+          </a:prstGeom>
+          <a:noFill/>
+          <a:ln/>
+        </p:spPr>
+        <p:txBody>
+          <a:bodyPr wrap="square" lIns="0" tIns="0" rIns="0" bIns="0" rtlCol="0" anchor="ctr"/>
+          <a:lstStyle/>
+          <a:p>
+            <a:pPr rtl="1" algn="r" indent="0" marL="0">
+              <a:buNone/>
+            </a:pPr>
+            <a:r>
+              <a:rPr lang="en-US" sz="1100" b="1" dirty="0">
                 <a:solidFill>
                   <a:srgbClr val="7FE3C0"/>
                 </a:solidFill>
@@ -8361,13 +10027,13 @@
               </a:rPr>
               <a:t>مستمرّ</a:t>
             </a:r>
-            <a:endParaRPr lang="en-US" sz="1150" dirty="0"/>
-          </a:p>
-        </p:txBody>
-      </p:sp>
-      <p:sp>
-        <p:nvSpPr>
-          <p:cNvPr id="22" name="Shape 20"/>
+            <a:endParaRPr lang="en-US" sz="1100" dirty="0"/>
+          </a:p>
+        </p:txBody>
+      </p:sp>
+      <p:sp>
+        <p:nvSpPr>
+          <p:cNvPr id="28" name="Shape 26"/>
           <p:cNvSpPr/>
           <p:nvPr/>
         </p:nvSpPr>
@@ -8394,7 +10060,7 @@
       </p:sp>
       <p:sp>
         <p:nvSpPr>
-          <p:cNvPr id="23" name="Text 21"/>
+          <p:cNvPr id="29" name="Text 27"/>
           <p:cNvSpPr/>
           <p:nvPr/>
         </p:nvSpPr>
@@ -8433,7 +10099,7 @@
       </p:sp>
       <p:sp>
         <p:nvSpPr>
-          <p:cNvPr id="24" name="Text 22"/>
+          <p:cNvPr id="30" name="Text 28"/>
           <p:cNvSpPr/>
           <p:nvPr/>
         </p:nvSpPr>
@@ -8475,7 +10141,7 @@
       </p:sp>
       <p:sp>
         <p:nvSpPr>
-          <p:cNvPr id="25" name="Text 23"/>
+          <p:cNvPr id="31" name="Text 29"/>
           <p:cNvSpPr/>
           <p:nvPr/>
         </p:nvSpPr>
@@ -12980,7 +14646,7 @@
                 <a:ea typeface="Arial" pitchFamily="34" charset="-122"/>
                 <a:cs typeface="Arial" pitchFamily="34" charset="-120"/>
               </a:rPr>
-              <a:t>مقابل 17.7 بالمئة لو خُمِّن السبب اعتباطاً، أي نحو أربعة أضعاف التخمين.</a:t>
+              <a:t>مقابل 17.7 بالمئة لو خُمِّن السبب اعتباطاً. والنموذج لا يقرأ المرفقات، بل يرتّب الأرجح من أنماط 19,741 طلباً سابقاً.</a:t>
             </a:r>
             <a:endParaRPr lang="en-US" sz="1200" dirty="0"/>
           </a:p>
@@ -14641,7 +16307,7 @@
                 <a:ea typeface="Arial" pitchFamily="34" charset="-122"/>
                 <a:cs typeface="Arial" pitchFamily="34" charset="-120"/>
               </a:rPr>
-              <a:t>مقيسة على 8,209 طلبات من آخر الفترة لم يرها النموذج أثناء التدريب · عتبة القرار 0.45 مختارة على شريحة تحقّق منفصلة.</a:t>
+              <a:t>تدريب 32,833 طلباً (يناير — 3 يونيو) · اختبار 8,209 طلبات لاحقة لم يرها النموذج · العتبة 0.45 مختارة على 4,925 طلباً من نهاية فترة التدريب، لا على الاختبار.</a:t>
             </a:r>
             <a:endParaRPr lang="en-US" sz="950" dirty="0"/>
           </a:p>

--- a/deck/سديد-عرض-تنفيذي.pptx
+++ b/deck/سديد-عرض-تنفيذي.pptx
@@ -1009,7 +1009,7 @@
           <a:p>
             <a:r>
               <a:rPr lang="en-US" dirty="0"/>
-              <a:t>افتتاحية: سديد يجيب عن سؤال واحد قبل رفع الطلب لشركة التأمين، وهو هل سيُعتمد بالكامل. المنصّة مبنيّة بالكامل وجاهزة، والعرض اليوم عن العائد لا عن التمويل.</a:t>
+              <a:t>افتتاحية: الإرسال آليّ ولا نتحكّم فيه. سديد يعمل على ما بعد الردّ وعلى ما قبل إنشاء الطلب — لا في مسار الإرسال. المنصّة مبنيّة وجاهزة، والعرض اليوم عن العائد لا عن التمويل.</a:t>
             </a:r>
             <a:endParaRPr lang="en-US" dirty="0"/>
           </a:p>
@@ -1185,7 +1185,7 @@
           <a:p>
             <a:r>
               <a:rPr lang="en-US" dirty="0"/>
-              <a:t>نسبة الإصلاح هي الافتراض الوحيد غير المقيس. حتى لو لم يُنتج إصلاحاً إلا خُمس التشخيصات، يبقى العائد 4.2 نقطة.</a:t>
+              <a:t>الصفّان الأوسطان قيمة تعمل اليوم بلا أي تعديل في الأنظمة. والصفّ الأخير هو مسار المنع، وهو الوحيد الذي يحتاج تعديلاً في النظام الصحي — ونسبة المنع فيه الافتراض الوحيد غير المقيس.</a:t>
             </a:r>
             <a:endParaRPr lang="en-US" dirty="0"/>
           </a:p>
@@ -1537,7 +1537,7 @@
           <a:p>
             <a:r>
               <a:rPr lang="en-US" dirty="0"/>
-              <a:t>الطلب مقصود صغيراً: قرار تشغيلي واحد بلا ميزانية، ونتيجته تحسم التعميم من عدمه.</a:t>
+              <a:t>الطلب شقّان: الأول يبدأ غداً بلا تعديل في أي نظام، والثاني دراسة لا التزام. المال الأكبر في الثاني، لكن الأول هو ما يثبت الجدوى قبل طلب أي تعديل تقني.</a:t>
             </a:r>
             <a:endParaRPr lang="en-US" dirty="0"/>
           </a:p>
@@ -1625,7 +1625,7 @@
           <a:p>
             <a:r>
               <a:rPr lang="en-US" dirty="0"/>
-              <a:t>الرقم الثالث هو الأكثر تحفّظاً في العرض كله: يفترض أن خُمس الحالات المُشخَّصة فقط قابلة للإصلاح قبل الرفع. تفصيله في شريحة نموذج العائد.</a:t>
+              <a:t>الرقم الثاني يعمل اليوم بلا تعديل في أي نظام. والثالث الأكثر تحفّظاً: يفترض أن خُمس حالات نقص البيانات فقط يُمنع رفضها. تفصيلهما في شريحتي نموذج العائد.</a:t>
             </a:r>
             <a:endParaRPr lang="en-US" dirty="0"/>
           </a:p>
@@ -1801,7 +1801,7 @@
           <a:p>
             <a:r>
               <a:rPr lang="en-US" dirty="0"/>
-              <a:t>النقطة الجوهرية أن سديد لا يستبدل فريق معالجة المرفوضات، بل يقلّص ما يصل إليه أصلاً.</a:t>
+              <a:t>هذه أهم شريحة في العرض. من يظنّ أن الأداة تعترض الإرسال سيرفضها فوراً لأنها تؤخّر المريض. اذكر صراحةً أنها لا تفعل.</a:t>
             </a:r>
             <a:endParaRPr lang="en-US" dirty="0"/>
           </a:p>
@@ -2749,7 +2749,7 @@
                 <a:ea typeface="Arial" pitchFamily="34" charset="-122"/>
                 <a:cs typeface="Arial" pitchFamily="34" charset="-120"/>
               </a:rPr>
-              <a:t>هل يُعتمد هذا الطلب بالكامل؟ الجواب قبل الرفع، لا بعد الرفض.</a:t>
+              <a:t>لماذا رُفض هذا الطلب، وما الذي يمنع رفض ما بعده؟</a:t>
             </a:r>
             <a:endParaRPr lang="en-US" sz="1700" dirty="0"/>
           </a:p>
@@ -3919,7 +3919,7 @@
                 <a:ea typeface="Arial" pitchFamily="34" charset="-122"/>
                 <a:cs typeface="Arial" pitchFamily="34" charset="-120"/>
               </a:rPr>
-              <a:t>مسار القيمة من 1,000 طلب موافقة إلى ريال مُستعاد</a:t>
+              <a:t>مسار القيمة من 1,000 طلب يُرسَل آلياً إلى ريال مُستعاد</a:t>
             </a:r>
             <a:endParaRPr lang="en-US" sz="3200" dirty="0"/>
           </a:p>
@@ -3958,7 +3958,7 @@
                 <a:ea typeface="Arial" pitchFamily="34" charset="-122"/>
                 <a:cs typeface="Arial" pitchFamily="34" charset="-120"/>
               </a:rPr>
-              <a:t>كل نسبة في المسار مقيسة على بيانات الاختبار، عدا الأخيرة فهي افتراض تشغيلي متحفّظ.</a:t>
+              <a:t>كل نسبة في المسار مقيسة على البيانات، عدا الأخيرة فهي افتراض تشغيلي متحفّظ.</a:t>
             </a:r>
             <a:endParaRPr lang="en-US" sz="1400" dirty="0"/>
           </a:p>
@@ -4063,7 +4063,7 @@
                 <a:ea typeface="Arial" pitchFamily="34" charset="-122"/>
                 <a:cs typeface="Arial" pitchFamily="34" charset="-120"/>
               </a:rPr>
-              <a:t>طلب يُرفَع لشركة التأمين</a:t>
+              <a:t>طلب يرسله النظام الصحي آلياً</a:t>
             </a:r>
             <a:endParaRPr lang="en-US" sz="1300" dirty="0"/>
           </a:p>
@@ -4168,7 +4168,7 @@
                 <a:ea typeface="Arial" pitchFamily="34" charset="-122"/>
                 <a:cs typeface="Arial" pitchFamily="34" charset="-120"/>
               </a:rPr>
-              <a:t>لن تصدر موافقته كاملة</a:t>
+              <a:t>يعود غير مكتمل إلى فريق الموافقات</a:t>
             </a:r>
             <a:endParaRPr lang="en-US" sz="1300" dirty="0"/>
           </a:p>
@@ -4207,7 +4207,7 @@
                 <a:ea typeface="Arial" pitchFamily="34" charset="-122"/>
                 <a:cs typeface="Arial" pitchFamily="34" charset="-120"/>
               </a:rPr>
-              <a:t>49.4% من المرفوع</a:t>
+              <a:t>49.4% من المرسَل</a:t>
             </a:r>
             <a:endParaRPr lang="en-US" sz="1050" dirty="0"/>
           </a:p>
@@ -4273,7 +4273,7 @@
                 <a:ea typeface="Arial" pitchFamily="34" charset="-122"/>
                 <a:cs typeface="Arial" pitchFamily="34" charset="-120"/>
               </a:rPr>
-              <a:t>367</a:t>
+              <a:t>473</a:t>
             </a:r>
             <a:endParaRPr lang="en-US" sz="1900" dirty="0"/>
           </a:p>
@@ -4312,7 +4312,7 @@
                 <a:ea typeface="Arial" pitchFamily="34" charset="-122"/>
                 <a:cs typeface="Arial" pitchFamily="34" charset="-120"/>
               </a:rPr>
-              <a:t>يلتقطه سديد قبل الرفع</a:t>
+              <a:t>يُصنَّف سببه آلياً بإجراء ونصّ نظامي</a:t>
             </a:r>
             <a:endParaRPr lang="en-US" sz="1300" dirty="0"/>
           </a:p>
@@ -4351,7 +4351,7 @@
                 <a:ea typeface="Arial" pitchFamily="34" charset="-122"/>
                 <a:cs typeface="Arial" pitchFamily="34" charset="-120"/>
               </a:rPr>
-              <a:t>74.4% استرجاع</a:t>
+              <a:t>95.8% تغطية التصنيف</a:t>
             </a:r>
             <a:endParaRPr lang="en-US" sz="1050" dirty="0"/>
           </a:p>
@@ -4417,7 +4417,7 @@
                 <a:ea typeface="Arial" pitchFamily="34" charset="-122"/>
                 <a:cs typeface="Arial" pitchFamily="34" charset="-120"/>
               </a:rPr>
-              <a:t>250</a:t>
+              <a:t>207</a:t>
             </a:r>
             <a:endParaRPr lang="en-US" sz="1900" dirty="0"/>
           </a:p>
@@ -4456,7 +4456,7 @@
                 <a:ea typeface="Arial" pitchFamily="34" charset="-122"/>
                 <a:cs typeface="Arial" pitchFamily="34" charset="-120"/>
               </a:rPr>
-              <a:t>يُشخَّص سببه الصحيح</a:t>
+              <a:t>سببه نقصٌ في الحد الأدنى للبيانات</a:t>
             </a:r>
             <a:endParaRPr lang="en-US" sz="1300" dirty="0"/>
           </a:p>
@@ -4495,7 +4495,7 @@
                 <a:ea typeface="Arial" pitchFamily="34" charset="-122"/>
                 <a:cs typeface="Arial" pitchFamily="34" charset="-120"/>
               </a:rPr>
-              <a:t>68.0% دقّة التشخيص</a:t>
+              <a:t>42% من غير المكتمل</a:t>
             </a:r>
             <a:endParaRPr lang="en-US" sz="1050" dirty="0"/>
           </a:p>
@@ -4561,7 +4561,7 @@
                 <a:ea typeface="Arial" pitchFamily="34" charset="-122"/>
                 <a:cs typeface="Arial" pitchFamily="34" charset="-120"/>
               </a:rPr>
-              <a:t>50 – 125</a:t>
+              <a:t>41 – 104</a:t>
             </a:r>
             <a:endParaRPr lang="en-US" sz="1900" dirty="0"/>
           </a:p>
@@ -4600,7 +4600,7 @@
                 <a:ea typeface="Arial" pitchFamily="34" charset="-122"/>
                 <a:cs typeface="Arial" pitchFamily="34" charset="-120"/>
               </a:rPr>
-              <a:t>يُصحَّح ويُرفَع مكتملاً</a:t>
+              <a:t>يُمنع رفضه بفرض الاكتمال</a:t>
             </a:r>
             <a:endParaRPr lang="en-US" sz="1300" dirty="0"/>
           </a:p>
@@ -4639,7 +4639,7 @@
                 <a:ea typeface="Arial" pitchFamily="34" charset="-122"/>
                 <a:cs typeface="Arial" pitchFamily="34" charset="-120"/>
               </a:rPr>
-              <a:t>20% – 50% نسبة الإصلاح (افتراض)</a:t>
+              <a:t>20% – 50% نسبة المنع (افتراض)</a:t>
             </a:r>
             <a:endParaRPr lang="en-US" sz="1050" dirty="0"/>
           </a:p>
@@ -4705,7 +4705,7 @@
                 <a:ea typeface="Arial" pitchFamily="34" charset="-122"/>
                 <a:cs typeface="Arial" pitchFamily="34" charset="-120"/>
               </a:rPr>
-              <a:t>كل طلب يتحوّل من «غير مكتمل» إلى «معتمد كاملاً» يستعيد 83.8 بالمئة من قيمته، فترتفع التغطية المعتمدة بمقدار 4.2 إلى 10.5 نقطة على قيمة كل ما يُرفَع.</a:t>
+              <a:t>كل طلب يتحوّل من «غير مكتمل» إلى «معتمد كاملاً» يستعيد 83.8 بالمئة من قيمته، فترتفع التغطية المعتمدة بمقدار 3.5 إلى 8.7 نقطة على قيمة كل ما يُرسَل.</a:t>
             </a:r>
             <a:endParaRPr lang="en-US" sz="1350" dirty="0"/>
           </a:p>
@@ -4854,7 +4854,7 @@
                 <a:ea typeface="Arial" pitchFamily="34" charset="-122"/>
                 <a:cs typeface="Arial" pitchFamily="34" charset="-120"/>
               </a:rPr>
-              <a:t>نحو 181,000 طلب موافقة سنوياً يمرّ عبر الفحص · القيم بملايين الريالات، تغطيةً معتمدة إضافية سنوياً · الأعمدة تمثّل نسبة الإصلاح المفترضة.</a:t>
+              <a:t>نحو 181,000 طلب سنوياً · القيم بملايين الريالات، تغطيةً معتمدة إضافية سنوياً · الأعمدة تمثّل نسبة ما يُمنع رفضه من حالات نقص البيانات.</a:t>
             </a:r>
             <a:endParaRPr lang="en-US" sz="1400" dirty="0"/>
           </a:p>
@@ -5302,7 +5302,7 @@
                 <a:ea typeface="Arial" pitchFamily="34" charset="-122"/>
                 <a:cs typeface="Arial" pitchFamily="34" charset="-120"/>
               </a:rPr>
-              <a:t>7.6</a:t>
+              <a:t>6.3</a:t>
             </a:r>
             <a:endParaRPr lang="en-US" sz="1500" dirty="0"/>
           </a:p>
@@ -5366,7 +5366,7 @@
                 <a:ea typeface="Arial" pitchFamily="34" charset="-122"/>
                 <a:cs typeface="Arial" pitchFamily="34" charset="-120"/>
               </a:rPr>
-              <a:t>11.4</a:t>
+              <a:t>9.4</a:t>
             </a:r>
             <a:endParaRPr lang="en-US" sz="1500" dirty="0"/>
           </a:p>
@@ -5430,7 +5430,7 @@
                 <a:ea typeface="Arial" pitchFamily="34" charset="-122"/>
                 <a:cs typeface="Arial" pitchFamily="34" charset="-120"/>
               </a:rPr>
-              <a:t>15.2</a:t>
+              <a:t>12.6</a:t>
             </a:r>
             <a:endParaRPr lang="en-US" sz="1500" dirty="0"/>
           </a:p>
@@ -5494,7 +5494,7 @@
                 <a:ea typeface="Arial" pitchFamily="34" charset="-122"/>
                 <a:cs typeface="Arial" pitchFamily="34" charset="-120"/>
               </a:rPr>
-              <a:t>18.9</a:t>
+              <a:t>15.7</a:t>
             </a:r>
             <a:endParaRPr lang="en-US" sz="1500" dirty="0"/>
           </a:p>
@@ -5622,7 +5622,7 @@
                 <a:ea typeface="Arial" pitchFamily="34" charset="-122"/>
                 <a:cs typeface="Arial" pitchFamily="34" charset="-120"/>
               </a:rPr>
-              <a:t>15.2</a:t>
+              <a:t>12.6</a:t>
             </a:r>
             <a:endParaRPr lang="en-US" sz="1500" dirty="0"/>
           </a:p>
@@ -5686,7 +5686,7 @@
                 <a:ea typeface="Arial" pitchFamily="34" charset="-122"/>
                 <a:cs typeface="Arial" pitchFamily="34" charset="-120"/>
               </a:rPr>
-              <a:t>22.7</a:t>
+              <a:t>18.9</a:t>
             </a:r>
             <a:endParaRPr lang="en-US" sz="1500" dirty="0"/>
           </a:p>
@@ -5750,7 +5750,7 @@
                 <a:ea typeface="Arial" pitchFamily="34" charset="-122"/>
                 <a:cs typeface="Arial" pitchFamily="34" charset="-120"/>
               </a:rPr>
-              <a:t>30.3</a:t>
+              <a:t>25.2</a:t>
             </a:r>
             <a:endParaRPr lang="en-US" sz="1500" dirty="0"/>
           </a:p>
@@ -5814,7 +5814,7 @@
                 <a:ea typeface="Arial" pitchFamily="34" charset="-122"/>
                 <a:cs typeface="Arial" pitchFamily="34" charset="-120"/>
               </a:rPr>
-              <a:t>37.9</a:t>
+              <a:t>31.5</a:t>
             </a:r>
             <a:endParaRPr lang="en-US" sz="1500" dirty="0"/>
           </a:p>
@@ -5942,7 +5942,7 @@
                 <a:ea typeface="Arial" pitchFamily="34" charset="-122"/>
                 <a:cs typeface="Arial" pitchFamily="34" charset="-120"/>
               </a:rPr>
-              <a:t>22.7</a:t>
+              <a:t>18.9</a:t>
             </a:r>
             <a:endParaRPr lang="en-US" sz="1500" dirty="0"/>
           </a:p>
@@ -6006,7 +6006,7 @@
                 <a:ea typeface="Arial" pitchFamily="34" charset="-122"/>
                 <a:cs typeface="Arial" pitchFamily="34" charset="-120"/>
               </a:rPr>
-              <a:t>34.1</a:t>
+              <a:t>28.3</a:t>
             </a:r>
             <a:endParaRPr lang="en-US" sz="1500" dirty="0"/>
           </a:p>
@@ -6070,7 +6070,7 @@
                 <a:ea typeface="Arial" pitchFamily="34" charset="-122"/>
                 <a:cs typeface="Arial" pitchFamily="34" charset="-120"/>
               </a:rPr>
-              <a:t>45.5</a:t>
+              <a:t>37.8</a:t>
             </a:r>
             <a:endParaRPr lang="en-US" sz="1500" dirty="0"/>
           </a:p>
@@ -6134,7 +6134,7 @@
                 <a:ea typeface="Arial" pitchFamily="34" charset="-122"/>
                 <a:cs typeface="Arial" pitchFamily="34" charset="-120"/>
               </a:rPr>
-              <a:t>56.8</a:t>
+              <a:t>47.2</a:t>
             </a:r>
             <a:endParaRPr lang="en-US" sz="1500" dirty="0"/>
           </a:p>
@@ -6262,7 +6262,7 @@
                 <a:ea typeface="Arial" pitchFamily="34" charset="-122"/>
                 <a:cs typeface="Arial" pitchFamily="34" charset="-120"/>
               </a:rPr>
-              <a:t>37.9</a:t>
+              <a:t>31.5</a:t>
             </a:r>
             <a:endParaRPr lang="en-US" sz="1500" dirty="0"/>
           </a:p>
@@ -6326,7 +6326,7 @@
                 <a:ea typeface="Arial" pitchFamily="34" charset="-122"/>
                 <a:cs typeface="Arial" pitchFamily="34" charset="-120"/>
               </a:rPr>
-              <a:t>56.8</a:t>
+              <a:t>47.2</a:t>
             </a:r>
             <a:endParaRPr lang="en-US" sz="1500" dirty="0"/>
           </a:p>
@@ -6390,7 +6390,7 @@
                 <a:ea typeface="Arial" pitchFamily="34" charset="-122"/>
                 <a:cs typeface="Arial" pitchFamily="34" charset="-120"/>
               </a:rPr>
-              <a:t>75.8</a:t>
+              <a:t>62.9</a:t>
             </a:r>
             <a:endParaRPr lang="en-US" sz="1500" dirty="0"/>
           </a:p>
@@ -6454,7 +6454,7 @@
                 <a:ea typeface="Arial" pitchFamily="34" charset="-122"/>
                 <a:cs typeface="Arial" pitchFamily="34" charset="-120"/>
               </a:rPr>
-              <a:t>94.7</a:t>
+              <a:t>78.7</a:t>
             </a:r>
             <a:endParaRPr lang="en-US" sz="1500" dirty="0"/>
           </a:p>
@@ -6527,7 +6527,7 @@
                 <a:ea typeface="Arial" pitchFamily="34" charset="-122"/>
                 <a:cs typeface="Arial" pitchFamily="34" charset="-120"/>
               </a:rPr>
-              <a:t>1,622 ريال</a:t>
+              <a:t>بلا كلفة تشغيل</a:t>
             </a:r>
             <a:endParaRPr lang="en-US" sz="2600" dirty="0"/>
           </a:p>
@@ -6569,7 +6569,7 @@
                 <a:ea typeface="Arial" pitchFamily="34" charset="-122"/>
                 <a:cs typeface="Arial" pitchFamily="34" charset="-120"/>
               </a:rPr>
-              <a:t>تغطية معتمدة إضافية عن كل ساعة مراجعة قبل الرفع، بأدنى قيمة طلب وأدنى نسبة إصلاح. ترتفع إلى 4,865 ريالاً عند متوسط طلب 3,000 ريال.</a:t>
+              <a:t>المنع قاعدة تحقّق في النظام الصحي، لا مراجعة بشرية. تُضبط مرّة واحدة ثم تعمل على كل طلب بلا وقت موظّف ولا كلفة متكرّرة.</a:t>
             </a:r>
             <a:endParaRPr lang="en-US" sz="1150" dirty="0"/>
           </a:p>
@@ -6684,7 +6684,7 @@
                 <a:ea typeface="Arial" pitchFamily="34" charset="-122"/>
                 <a:cs typeface="Arial" pitchFamily="34" charset="-120"/>
               </a:rPr>
-              <a:t>يفترض أن خُمس الحالات المُشخَّصة فقط قابلة للإصلاح قبل الرفع. أي رقم فوقه مكسب إضافي، لا شرط للجدوى.</a:t>
+              <a:t>يفترض أن خُمس حالات نقص البيانات فقط يُمنع رفضها. أي رقم فوقه مكسب إضافي، لا شرط للجدوى. ولا يشمل الجدول مكسب تسريع معالجة المرفوضات، وهو يعمل اليوم.</a:t>
             </a:r>
             <a:endParaRPr lang="en-US" sz="1200" dirty="0"/>
           </a:p>
@@ -7227,7 +7227,7 @@
                 <a:ea typeface="Arial" pitchFamily="34" charset="-122"/>
                 <a:cs typeface="Arial" pitchFamily="34" charset="-120"/>
               </a:rPr>
-              <a:t>الكلفة الوحيدة هي وقت المراجعة</a:t>
+              <a:t>لا عبء مراجعة إضافياً</a:t>
             </a:r>
             <a:endParaRPr lang="en-US" sz="1250" dirty="0"/>
           </a:p>
@@ -7269,7 +7269,7 @@
                 <a:ea typeface="Arial" pitchFamily="34" charset="-122"/>
                 <a:cs typeface="Arial" pitchFamily="34" charset="-120"/>
               </a:rPr>
-              <a:t>يُعلَّم 516 من كل 1,000 طلب للمراجعة قبل الرفع، والعتبة قابلة للرفع لتضييق هذا العدد.</a:t>
+              <a:t>الفريق يعالج المرفوضات أصلاً؛ سديد يختصر زمن تشخيصها ويرتّبها بالمبلغ، فيقلّل العبء لا يزيده.</a:t>
             </a:r>
             <a:endParaRPr lang="en-US" sz="1050" dirty="0"/>
           </a:p>
@@ -7462,7 +7462,7 @@
                 <a:ea typeface="Arial" pitchFamily="34" charset="-122"/>
                 <a:cs typeface="Arial" pitchFamily="34" charset="-120"/>
               </a:rPr>
-              <a:t>مساعد قرار لا بديل عن المراجعة</a:t>
+              <a:t>لا يوقف الإرسال ولا يؤخّره</a:t>
             </a:r>
             <a:endParaRPr lang="en-US" sz="1250" dirty="0"/>
           </a:p>
@@ -7504,7 +7504,7 @@
                 <a:ea typeface="Arial" pitchFamily="34" charset="-122"/>
                 <a:cs typeface="Arial" pitchFamily="34" charset="-120"/>
               </a:rPr>
-              <a:t>لا يُتّخذ قرار برفض خدمة لمريض بناءً عليه إطلاقاً، وهو لا يميّز الرفض الكامل من الخصم الجزئي.</a:t>
+              <a:t>الإرسال آليّ من النظام الصحي، وسديد يعمل بعد الردّ أو في إعداد البيانات — لا في مسار الإرسال نفسه.</a:t>
             </a:r>
             <a:endParaRPr lang="en-US" sz="1050" dirty="0"/>
           </a:p>
@@ -7666,7 +7666,7 @@
                 <a:ea typeface="Arial" pitchFamily="34" charset="-122"/>
                 <a:cs typeface="Arial" pitchFamily="34" charset="-120"/>
               </a:rPr>
-              <a:t>نحو 70 بالمئة من قوّته التنبّؤية في العقد والمستشفى والقسم، وهي حقول لا يملك الموظّف تغييرها قبل الرفع.</a:t>
+              <a:t>نحو 70 بالمئة من قوّته التنبّؤية في العقد والمستشفى والقسم، وهي حقول لا تُغيَّر بحال.</a:t>
             </a:r>
             <a:endParaRPr lang="en-US" sz="1050" dirty="0"/>
           </a:p>
@@ -7786,7 +7786,7 @@
                 <a:ea typeface="Arial" pitchFamily="34" charset="-122"/>
                 <a:cs typeface="Arial" pitchFamily="34" charset="-120"/>
               </a:rPr>
-              <a:t>يتدهور بتغيّر سياسات شركات التأمين</a:t>
+              <a:t>قواعد تصنيف الردود إنجليزية</a:t>
             </a:r>
             <a:endParaRPr lang="en-US" sz="1250" dirty="0"/>
           </a:p>
@@ -7828,7 +7828,7 @@
                 <a:ea typeface="Arial" pitchFamily="34" charset="-122"/>
                 <a:cs typeface="Arial" pitchFamily="34" charset="-120"/>
               </a:rPr>
-              <a:t>يُعاد التدريب كل ربع سنة، وهو إجراء مؤتمت بأمر واحد.</a:t>
+              <a:t>لو غيّرت شركة تأمين صياغة ردودها سقط التصنيف صامتاً — تُراقَب نسبة «سبب غير مصنّف» شهرياً.</a:t>
             </a:r>
             <a:endParaRPr lang="en-US" sz="1050" dirty="0"/>
           </a:p>
@@ -8016,7 +8016,7 @@
                 <a:ea typeface="Arial" pitchFamily="34" charset="-122"/>
                 <a:cs typeface="Arial" pitchFamily="34" charset="-120"/>
               </a:rPr>
-              <a:t>النموذج يعرف «مَن مقدّم الطلب» أكثر ممّا يعرف «ماذا قُدّم فيه». وهذه فجوة قابلة للإغلاق.</a:t>
+              <a:t>ما دام الإرسال آلياً، فالمنع الوحيد الممكن هو ألّا يخرج الطلب ناقصاً من النظام الصحي أصلاً.</a:t>
             </a:r>
             <a:endParaRPr lang="en-US" sz="1400" dirty="0"/>
           </a:p>
@@ -9032,7 +9032,7 @@
                 <a:ea typeface="Arial" pitchFamily="34" charset="-122"/>
                 <a:cs typeface="Arial" pitchFamily="34" charset="-120"/>
               </a:rPr>
-              <a:t>حقول MDS قابلة للتعديل بالكامل، فينتقل ثقل النموذج من «مَن أنت» إلى «ماذا قدّمت»، ويصير الإنذار قابلاً للتنفيذ.</a:t>
+              <a:t>قاعدة تحقّق في النظام الصحي تمنع خروج الطلب ناقصاً. تُضبط مرّة، ثم تعمل بلا وقت موظّف — وسديد يحدّد أي الحقول تستحقّ الفرض.</a:t>
             </a:r>
             <a:endParaRPr lang="en-US" sz="1100" dirty="0"/>
           </a:p>
@@ -9181,7 +9181,7 @@
                 <a:ea typeface="Arial" pitchFamily="34" charset="-122"/>
                 <a:cs typeface="Arial" pitchFamily="34" charset="-120"/>
               </a:rPr>
-              <a:t>أربع مراحل — أوّلها قرار واحد</a:t>
+              <a:t>من معالجة المرفوضات إلى منعها</a:t>
             </a:r>
             <a:endParaRPr lang="en-US" sz="3200" dirty="0"/>
           </a:p>
@@ -9311,7 +9311,7 @@
                 <a:ea typeface="Arial" pitchFamily="34" charset="-122"/>
                 <a:cs typeface="Arial" pitchFamily="34" charset="-120"/>
               </a:rPr>
-              <a:t>تشغيل تجريبي</a:t>
+              <a:t>تشغيل مع فريق الموافقات</a:t>
             </a:r>
             <a:endParaRPr lang="en-US" sz="1600" dirty="0"/>
           </a:p>
@@ -9353,7 +9353,7 @@
                 <a:ea typeface="Arial" pitchFamily="34" charset="-122"/>
                 <a:cs typeface="Arial" pitchFamily="34" charset="-120"/>
               </a:rPr>
-              <a:t>مستشفى واحد وأعلى ثلاثة عقود قيمةً، وتُقاس فيه نسبة الإصلاح الفعلية ميدانياً.</a:t>
+              <a:t>تصنيف المرفوضات الواردة وترتيبها بالمبلغ. يُقاس زمن المعالجة ونسبة نجاح إعادة الإرسال.</a:t>
             </a:r>
             <a:endParaRPr lang="en-US" sz="1150" dirty="0"/>
           </a:p>
@@ -9522,7 +9522,7 @@
                 <a:ea typeface="Arial" pitchFamily="34" charset="-122"/>
                 <a:cs typeface="Arial" pitchFamily="34" charset="-120"/>
               </a:rPr>
-              <a:t>إلزام الفحص</a:t>
+              <a:t>ربط بلوحة Power BI</a:t>
             </a:r>
             <a:endParaRPr lang="en-US" sz="1600" dirty="0"/>
           </a:p>
@@ -9564,7 +9564,7 @@
                 <a:ea typeface="Arial" pitchFamily="34" charset="-122"/>
                 <a:cs typeface="Arial" pitchFamily="34" charset="-120"/>
               </a:rPr>
-              <a:t>إدخال سديد خطوةً إلزامية قبل رفع الطلب، وربط مخرجاته بلوحة Power BI القائمة.</a:t>
+              <a:t>رصد الأنماط: أي العيادات والعقود والتشخيصات تُنتج الرفض بانتظام.</a:t>
             </a:r>
             <a:endParaRPr lang="en-US" sz="1150" dirty="0"/>
           </a:p>
@@ -9733,7 +9733,7 @@
                 <a:ea typeface="Arial" pitchFamily="34" charset="-122"/>
                 <a:cs typeface="Arial" pitchFamily="34" charset="-120"/>
               </a:rPr>
-              <a:t>إضافة MDS</a:t>
+              <a:t>قياس أثر MDS</a:t>
             </a:r>
             <a:endParaRPr lang="en-US" sz="1600" dirty="0"/>
           </a:p>
@@ -9775,7 +9775,7 @@
                 <a:ea typeface="Arial" pitchFamily="34" charset="-122"/>
                 <a:cs typeface="Arial" pitchFamily="34" charset="-120"/>
               </a:rPr>
-              <a:t>استخراج حقول الاكتمال من UCAF، وإعادة التدريب، وقياس الأثر الثلاثي.</a:t>
+              <a:t>استخراج حقول الاكتمال من UCAF، وإعادة التدريب، وتحديد الحقول التي تستحقّ الفرض.</a:t>
             </a:r>
             <a:endParaRPr lang="en-US" sz="1150" dirty="0"/>
           </a:p>
@@ -9944,7 +9944,7 @@
                 <a:ea typeface="Arial" pitchFamily="34" charset="-122"/>
                 <a:cs typeface="Arial" pitchFamily="34" charset="-120"/>
               </a:rPr>
-              <a:t>التعميم والمتابعة</a:t>
+              <a:t>الفرض في النظام الصحي</a:t>
             </a:r>
             <a:endParaRPr lang="en-US" sz="1600" dirty="0"/>
           </a:p>
@@ -9986,7 +9986,7 @@
                 <a:ea typeface="Arial" pitchFamily="34" charset="-122"/>
                 <a:cs typeface="Arial" pitchFamily="34" charset="-120"/>
               </a:rPr>
-              <a:t>التوسّع على مستوى التجمع، وإعادة تدريب ربع سنوية، ومتابعة أثر الاعتماد شهرياً.</a:t>
+              <a:t>قاعدة تحقّق تمنع خروج الطلب ناقصاً — بالشراكة مع تقنية المعلومات.</a:t>
             </a:r>
             <a:endParaRPr lang="en-US" sz="1150" dirty="0"/>
           </a:p>
@@ -10025,7 +10025,7 @@
                 <a:ea typeface="Arial" pitchFamily="34" charset="-122"/>
                 <a:cs typeface="Arial" pitchFamily="34" charset="-120"/>
               </a:rPr>
-              <a:t>مستمرّ</a:t>
+              <a:t>بعد القياس</a:t>
             </a:r>
             <a:endParaRPr lang="en-US" sz="1100" dirty="0"/>
           </a:p>
@@ -10133,7 +10133,7 @@
                 <a:ea typeface="Arial" pitchFamily="34" charset="-122"/>
                 <a:cs typeface="Arial" pitchFamily="34" charset="-120"/>
               </a:rPr>
-              <a:t>اعتماد التشغيل التجريبي في مستشفى واحد لمدة أربعة أسابيع، وتكليف إدارة أداء تنمية الإيرادات بقياس نسبة الإصلاح الفعلية ورفع نتيجتها.</a:t>
+              <a:t>اعتماد سديد أداةً لفريق الموافقات في معالجة المرفوضات لمدة أربعة أسابيع، وتكليف فريق مشترك مع تقنية المعلومات بدراسة فرض اكتمال البيانات في النظام الصحي.</a:t>
             </a:r>
             <a:endParaRPr lang="en-US" sz="1600" dirty="0"/>
           </a:p>
@@ -10545,7 +10545,7 @@
                 <a:ea typeface="Arial" pitchFamily="34" charset="-122"/>
                 <a:cs typeface="Arial" pitchFamily="34" charset="-120"/>
               </a:rPr>
-              <a:t>74.4%</a:t>
+              <a:t>95.8%</a:t>
             </a:r>
             <a:endParaRPr lang="en-US" sz="4400" dirty="0"/>
           </a:p>
@@ -10584,7 +10584,7 @@
                 <a:ea typeface="Arial" pitchFamily="34" charset="-122"/>
                 <a:cs typeface="Arial" pitchFamily="34" charset="-120"/>
               </a:rPr>
-              <a:t>من الطلبات غير المكتملة يلتقطها سديد</a:t>
+              <a:t>من ردود شركات التأمين تُصنَّف آلياً</a:t>
             </a:r>
             <a:endParaRPr lang="en-US" sz="1500" dirty="0"/>
           </a:p>
@@ -10623,7 +10623,7 @@
                 <a:ea typeface="Arial" pitchFamily="34" charset="-122"/>
                 <a:cs typeface="Arial" pitchFamily="34" charset="-120"/>
               </a:rPr>
-              <a:t>قبل الرفع، مع ترتيب أسبابها المرجّحة وإجراء تصحيحي لكل سبب.</a:t>
+              <a:t>من نصّ حرّ مبعثر إلى سبب معياري، مع إجراء تصحيحي ونصّ نظامي يسنده.</a:t>
             </a:r>
             <a:endParaRPr lang="en-US" sz="1150" dirty="0"/>
           </a:p>
@@ -10696,7 +10696,7 @@
                 <a:ea typeface="Arial" pitchFamily="34" charset="-122"/>
                 <a:cs typeface="Arial" pitchFamily="34" charset="-120"/>
               </a:rPr>
-              <a:t>‪+4.2%‬</a:t>
+              <a:t>‪+3.5%‬</a:t>
             </a:r>
             <a:endParaRPr lang="en-US" sz="4400" dirty="0"/>
           </a:p>
@@ -10774,7 +10774,7 @@
                 <a:ea typeface="Arial" pitchFamily="34" charset="-122"/>
                 <a:cs typeface="Arial" pitchFamily="34" charset="-120"/>
               </a:rPr>
-              <a:t>على قيمة ما يُرفَع، بأشدّ الافتراضات تحفّظاً، ويصل إلى 10.5 نقطة.</a:t>
+              <a:t>بفرض اكتمال الحد الأدنى للبيانات قبل الإرسال الآلي، ويصل إلى 8.7 نقطة.</a:t>
             </a:r>
             <a:endParaRPr lang="en-US" sz="1150" dirty="0"/>
           </a:p>
@@ -10889,7 +10889,7 @@
                 <a:ea typeface="Arial" pitchFamily="34" charset="-122"/>
                 <a:cs typeface="Arial" pitchFamily="34" charset="-120"/>
               </a:rPr>
-              <a:t>المنصّة مبنيّة ومُختبَرة وتعمل بالكامل، فلا ميزانية تطوير مطلوبة ولا خادم ولا كلفة تشغيل لكل طلب.</a:t>
+              <a:t>الإرسال آليّ من النظام الصحي عبر نفيس، فلا يعترض سديد مسار الإرسال ولا يؤخّره.</a:t>
             </a:r>
             <a:endParaRPr lang="en-US" sz="1500" dirty="0"/>
           </a:p>
@@ -10909,7 +10909,7 @@
                 <a:ea typeface="Arial" pitchFamily="34" charset="-122"/>
                 <a:cs typeface="Arial" pitchFamily="34" charset="-120"/>
               </a:rPr>
-              <a:t>المطلوب قرار تشغيلي واحد، وهو إدخال فحص سديد خطوةً إلزامية قبل رفع الطلب لشركة التأمين.</a:t>
+              <a:t>المطلوبان: اعتماده أداةً لفريق الموافقات في معالجة المرفوضات اليوم، ودراسة فرض اكتمال البيانات في النظام الصحي غداً.</a:t>
             </a:r>
             <a:endParaRPr lang="en-US" sz="1500" dirty="0"/>
           </a:p>
@@ -11650,7 +11650,7 @@
                 <a:ea typeface="Arial" pitchFamily="34" charset="-122"/>
                 <a:cs typeface="Arial" pitchFamily="34" charset="-120"/>
               </a:rPr>
-              <a:t>أين يقع القرار اليوم</a:t>
+              <a:t>الدورة كما هي فعلاً</a:t>
             </a:r>
             <a:endParaRPr lang="en-US" sz="1200" dirty="0"/>
           </a:p>
@@ -11689,7 +11689,7 @@
                 <a:ea typeface="Arial" pitchFamily="34" charset="-122"/>
                 <a:cs typeface="Arial" pitchFamily="34" charset="-120"/>
               </a:rPr>
-              <a:t>نكتشف الخلل بعد أن يصدر الرفض</a:t>
+              <a:t>الإرسال آليّ — والعمل البشريّ كلّه بعد الرفض</a:t>
             </a:r>
             <a:endParaRPr lang="en-US" sz="3200" dirty="0"/>
           </a:p>
@@ -11728,7 +11728,7 @@
                 <a:ea typeface="Arial" pitchFamily="34" charset="-122"/>
                 <a:cs typeface="Arial" pitchFamily="34" charset="-120"/>
               </a:rPr>
-              <a:t>المسار الحالي يضع كل جهد التصحيح بعد صدور الرفض، حين تكون كلفته أعلى واحتمال نجاحه أقل.</a:t>
+              <a:t>لا توجد لحظة يدوية قبل الإرسال، فالطلب يغادر النظام الصحي إلى نفيس دون تدخّل. ومن هنا يبدأ سديد.</a:t>
             </a:r>
             <a:endParaRPr lang="en-US" sz="1400" dirty="0"/>
           </a:p>
@@ -11736,61 +11736,22 @@
       </p:sp>
       <p:sp>
         <p:nvSpPr>
-          <p:cNvPr id="5" name="Text 3"/>
-          <p:cNvSpPr/>
-          <p:nvPr/>
-        </p:nvSpPr>
-        <p:spPr>
-          <a:xfrm>
-            <a:off x="10378440" y="2304288"/>
-            <a:ext cx="1234440" cy="457200"/>
-          </a:xfrm>
-          <a:prstGeom prst="rect">
-            <a:avLst/>
-          </a:prstGeom>
-          <a:noFill/>
-          <a:ln/>
-        </p:spPr>
-        <p:txBody>
-          <a:bodyPr wrap="square" lIns="0" tIns="0" rIns="0" bIns="0" rtlCol="0" anchor="ctr"/>
-          <a:lstStyle/>
-          <a:p>
-            <a:pPr rtl="1" algn="r" indent="0" marL="0">
-              <a:buNone/>
-            </a:pPr>
-            <a:r>
-              <a:rPr lang="en-US" sz="1500" b="1" dirty="0">
-                <a:solidFill>
-                  <a:srgbClr val="C4362F"/>
-                </a:solidFill>
-                <a:latin typeface="Arial" pitchFamily="34" charset="0"/>
-                <a:ea typeface="Arial" pitchFamily="34" charset="-122"/>
-                <a:cs typeface="Arial" pitchFamily="34" charset="-120"/>
-              </a:rPr>
-              <a:t>اليوم</a:t>
-            </a:r>
-            <a:endParaRPr lang="en-US" sz="1500" dirty="0"/>
-          </a:p>
-        </p:txBody>
-      </p:sp>
-      <p:sp>
-        <p:nvSpPr>
-          <p:cNvPr id="6" name="Shape 4"/>
-          <p:cNvSpPr/>
-          <p:nvPr/>
-        </p:nvSpPr>
-        <p:spPr>
-          <a:xfrm>
-            <a:off x="8193024" y="1847088"/>
-            <a:ext cx="1847088" cy="1371600"/>
+          <p:cNvPr id="5" name="Shape 3"/>
+          <p:cNvSpPr/>
+          <p:nvPr/>
+        </p:nvSpPr>
+        <p:spPr>
+          <a:xfrm>
+            <a:off x="9116568" y="1783080"/>
+            <a:ext cx="2487168" cy="1417320"/>
           </a:xfrm>
           <a:prstGeom prst="roundRect">
             <a:avLst>
-              <a:gd name="adj" fmla="val 4000"/>
+              <a:gd name="adj" fmla="val 3871"/>
             </a:avLst>
           </a:prstGeom>
           <a:solidFill>
-            <a:srgbClr val="EFF4F9"/>
+            <a:srgbClr val="FFFFFF"/>
           </a:solidFill>
           <a:ln w="12700">
             <a:solidFill>
@@ -11809,94 +11770,16 @@
       </p:sp>
       <p:sp>
         <p:nvSpPr>
-          <p:cNvPr id="7" name="Text 5"/>
-          <p:cNvSpPr/>
-          <p:nvPr/>
-        </p:nvSpPr>
-        <p:spPr>
-          <a:xfrm>
-            <a:off x="8321040" y="1975104"/>
-            <a:ext cx="1591056" cy="274320"/>
-          </a:xfrm>
-          <a:prstGeom prst="rect">
-            <a:avLst/>
-          </a:prstGeom>
-          <a:noFill/>
-          <a:ln/>
-        </p:spPr>
-        <p:txBody>
-          <a:bodyPr wrap="square" lIns="0" tIns="0" rIns="0" bIns="0" rtlCol="0" anchor="ctr"/>
-          <a:lstStyle/>
-          <a:p>
-            <a:pPr rtl="1" algn="r" indent="0" marL="0">
-              <a:buNone/>
-            </a:pPr>
-            <a:r>
-              <a:rPr lang="en-US" sz="1000" b="1" dirty="0">
-                <a:solidFill>
-                  <a:srgbClr val="4E657A"/>
-                </a:solidFill>
-                <a:latin typeface="Arial" pitchFamily="34" charset="0"/>
-                <a:ea typeface="Arial" pitchFamily="34" charset="-122"/>
-                <a:cs typeface="Arial" pitchFamily="34" charset="-120"/>
-              </a:rPr>
-              <a:t>الخطوة 1</a:t>
-            </a:r>
-            <a:endParaRPr lang="en-US" sz="1000" dirty="0"/>
-          </a:p>
-        </p:txBody>
-      </p:sp>
-      <p:sp>
-        <p:nvSpPr>
-          <p:cNvPr id="8" name="Text 6"/>
-          <p:cNvSpPr/>
-          <p:nvPr/>
-        </p:nvSpPr>
-        <p:spPr>
-          <a:xfrm>
-            <a:off x="8321040" y="2286000"/>
-            <a:ext cx="1591056" cy="822960"/>
-          </a:xfrm>
-          <a:prstGeom prst="rect">
-            <a:avLst/>
-          </a:prstGeom>
-          <a:noFill/>
-          <a:ln/>
-        </p:spPr>
-        <p:txBody>
-          <a:bodyPr wrap="square" lIns="0" tIns="0" rIns="0" bIns="0" rtlCol="0" anchor="ctr"/>
-          <a:lstStyle/>
-          <a:p>
-            <a:pPr rtl="1" algn="r" indent="0" marL="0">
-              <a:buNone/>
-            </a:pPr>
-            <a:r>
-              <a:rPr lang="en-US" sz="1200" dirty="0">
-                <a:solidFill>
-                  <a:srgbClr val="12384F"/>
-                </a:solidFill>
-                <a:latin typeface="Arial" pitchFamily="34" charset="0"/>
-                <a:ea typeface="Arial" pitchFamily="34" charset="-122"/>
-                <a:cs typeface="Arial" pitchFamily="34" charset="-120"/>
-              </a:rPr>
-              <a:t>يُرفَع الطلب كما هو</a:t>
-            </a:r>
-            <a:endParaRPr lang="en-US" sz="1200" dirty="0"/>
-          </a:p>
-        </p:txBody>
-      </p:sp>
-      <p:sp>
-        <p:nvSpPr>
-          <p:cNvPr id="9" name="Shape 7"/>
-          <p:cNvSpPr/>
-          <p:nvPr/>
-        </p:nvSpPr>
-        <p:spPr>
-          <a:xfrm flipH="1">
-            <a:off x="8010144" y="2441448"/>
-            <a:ext cx="164592" cy="182880"/>
-          </a:xfrm>
-          <a:prstGeom prst="rightArrow">
+          <p:cNvPr id="6" name="Shape 4"/>
+          <p:cNvSpPr/>
+          <p:nvPr/>
+        </p:nvSpPr>
+        <p:spPr>
+          <a:xfrm>
+            <a:off x="11073384" y="1938528"/>
+            <a:ext cx="347472" cy="347472"/>
+          </a:xfrm>
+          <a:prstGeom prst="ellipse">
             <a:avLst/>
           </a:prstGeom>
           <a:solidFill>
@@ -11912,22 +11795,167 @@
       </p:sp>
       <p:sp>
         <p:nvSpPr>
+          <p:cNvPr id="7" name="Text 5"/>
+          <p:cNvSpPr/>
+          <p:nvPr/>
+        </p:nvSpPr>
+        <p:spPr>
+          <a:xfrm>
+            <a:off x="11073384" y="1938528"/>
+            <a:ext cx="347472" cy="347472"/>
+          </a:xfrm>
+          <a:prstGeom prst="rect">
+            <a:avLst/>
+          </a:prstGeom>
+          <a:noFill/>
+          <a:ln/>
+        </p:spPr>
+        <p:txBody>
+          <a:bodyPr wrap="square" lIns="0" tIns="0" rIns="0" bIns="0" rtlCol="0" anchor="ctr"/>
+          <a:lstStyle/>
+          <a:p>
+            <a:pPr rtl="1" algn="ctr" indent="0" marL="0">
+              <a:buNone/>
+            </a:pPr>
+            <a:r>
+              <a:rPr lang="en-US" sz="1300" b="1" dirty="0">
+                <a:solidFill>
+                  <a:srgbClr val="4E657A"/>
+                </a:solidFill>
+                <a:latin typeface="Arial" pitchFamily="34" charset="0"/>
+                <a:ea typeface="Arial" pitchFamily="34" charset="-122"/>
+                <a:cs typeface="Arial" pitchFamily="34" charset="-120"/>
+              </a:rPr>
+              <a:t>1</a:t>
+            </a:r>
+            <a:endParaRPr lang="en-US" sz="1300" dirty="0"/>
+          </a:p>
+        </p:txBody>
+      </p:sp>
+      <p:sp>
+        <p:nvSpPr>
+          <p:cNvPr id="8" name="Text 6"/>
+          <p:cNvSpPr/>
+          <p:nvPr/>
+        </p:nvSpPr>
+        <p:spPr>
+          <a:xfrm>
+            <a:off x="9299448" y="1975104"/>
+            <a:ext cx="1737360" cy="292608"/>
+          </a:xfrm>
+          <a:prstGeom prst="rect">
+            <a:avLst/>
+          </a:prstGeom>
+          <a:noFill/>
+          <a:ln/>
+        </p:spPr>
+        <p:txBody>
+          <a:bodyPr wrap="square" lIns="0" tIns="0" rIns="0" bIns="0" rtlCol="0" anchor="ctr"/>
+          <a:lstStyle/>
+          <a:p>
+            <a:pPr rtl="1" algn="r" indent="0" marL="0">
+              <a:buNone/>
+            </a:pPr>
+            <a:r>
+              <a:rPr lang="en-US" sz="1350" b="1" dirty="0">
+                <a:solidFill>
+                  <a:srgbClr val="12384F"/>
+                </a:solidFill>
+                <a:latin typeface="Arial" pitchFamily="34" charset="0"/>
+                <a:ea typeface="Arial" pitchFamily="34" charset="-122"/>
+                <a:cs typeface="Arial" pitchFamily="34" charset="-120"/>
+              </a:rPr>
+              <a:t>النظام الصحي HIS</a:t>
+            </a:r>
+            <a:endParaRPr lang="en-US" sz="1350" dirty="0"/>
+          </a:p>
+        </p:txBody>
+      </p:sp>
+      <p:sp>
+        <p:nvSpPr>
+          <p:cNvPr id="9" name="Text 7"/>
+          <p:cNvSpPr/>
+          <p:nvPr/>
+        </p:nvSpPr>
+        <p:spPr>
+          <a:xfrm>
+            <a:off x="9299448" y="2377440"/>
+            <a:ext cx="2121408" cy="658368"/>
+          </a:xfrm>
+          <a:prstGeom prst="rect">
+            <a:avLst/>
+          </a:prstGeom>
+          <a:noFill/>
+          <a:ln/>
+        </p:spPr>
+        <p:txBody>
+          <a:bodyPr wrap="square" lIns="0" tIns="0" rIns="0" bIns="0" rtlCol="0" anchor="ctr"/>
+          <a:lstStyle/>
+          <a:p>
+            <a:pPr rtl="1" algn="r" indent="0" marL="0">
+              <a:lnSpc>
+                <a:spcPct val="120000"/>
+              </a:lnSpc>
+              <a:buNone/>
+            </a:pPr>
+            <a:r>
+              <a:rPr lang="en-US" sz="1150" dirty="0">
+                <a:solidFill>
+                  <a:srgbClr val="4E657A"/>
+                </a:solidFill>
+                <a:latin typeface="Arial" pitchFamily="34" charset="0"/>
+                <a:ea typeface="Arial" pitchFamily="34" charset="-122"/>
+                <a:cs typeface="Arial" pitchFamily="34" charset="-120"/>
+              </a:rPr>
+              <a:t>يُنشئ الطلب ويرسله آلياً</a:t>
+            </a:r>
+            <a:endParaRPr lang="en-US" sz="1150" dirty="0"/>
+          </a:p>
+        </p:txBody>
+      </p:sp>
+      <p:sp>
+        <p:nvSpPr>
           <p:cNvPr id="10" name="Shape 8"/>
           <p:cNvSpPr/>
           <p:nvPr/>
         </p:nvSpPr>
         <p:spPr>
-          <a:xfrm>
-            <a:off x="6144768" y="1847088"/>
-            <a:ext cx="1847088" cy="1371600"/>
+          <a:xfrm flipH="1">
+            <a:off x="8915400" y="2395728"/>
+            <a:ext cx="182880" cy="201168"/>
+          </a:xfrm>
+          <a:prstGeom prst="rightArrow">
+            <a:avLst/>
+          </a:prstGeom>
+          <a:solidFill>
+            <a:srgbClr val="D6E2ED"/>
+          </a:solidFill>
+          <a:ln w="12700">
+            <a:solidFill>
+              <a:srgbClr val="D6E2ED"/>
+            </a:solidFill>
+            <a:prstDash val="solid"/>
+          </a:ln>
+        </p:spPr>
+      </p:sp>
+      <p:sp>
+        <p:nvSpPr>
+          <p:cNvPr id="11" name="Shape 9"/>
+          <p:cNvSpPr/>
+          <p:nvPr/>
+        </p:nvSpPr>
+        <p:spPr>
+          <a:xfrm>
+            <a:off x="6391656" y="1783080"/>
+            <a:ext cx="2487168" cy="1417320"/>
           </a:xfrm>
           <a:prstGeom prst="roundRect">
             <a:avLst>
-              <a:gd name="adj" fmla="val 4000"/>
+              <a:gd name="adj" fmla="val 3871"/>
             </a:avLst>
           </a:prstGeom>
           <a:solidFill>
-            <a:srgbClr val="EFF4F9"/>
+            <a:srgbClr val="FFFFFF"/>
           </a:solidFill>
           <a:ln w="12700">
             <a:solidFill>
@@ -11946,94 +11974,16 @@
       </p:sp>
       <p:sp>
         <p:nvSpPr>
-          <p:cNvPr id="11" name="Text 9"/>
-          <p:cNvSpPr/>
-          <p:nvPr/>
-        </p:nvSpPr>
-        <p:spPr>
-          <a:xfrm>
-            <a:off x="6272784" y="1975104"/>
-            <a:ext cx="1591056" cy="274320"/>
-          </a:xfrm>
-          <a:prstGeom prst="rect">
-            <a:avLst/>
-          </a:prstGeom>
-          <a:noFill/>
-          <a:ln/>
-        </p:spPr>
-        <p:txBody>
-          <a:bodyPr wrap="square" lIns="0" tIns="0" rIns="0" bIns="0" rtlCol="0" anchor="ctr"/>
-          <a:lstStyle/>
-          <a:p>
-            <a:pPr rtl="1" algn="r" indent="0" marL="0">
-              <a:buNone/>
-            </a:pPr>
-            <a:r>
-              <a:rPr lang="en-US" sz="1000" b="1" dirty="0">
-                <a:solidFill>
-                  <a:srgbClr val="4E657A"/>
-                </a:solidFill>
-                <a:latin typeface="Arial" pitchFamily="34" charset="0"/>
-                <a:ea typeface="Arial" pitchFamily="34" charset="-122"/>
-                <a:cs typeface="Arial" pitchFamily="34" charset="-120"/>
-              </a:rPr>
-              <a:t>الخطوة 2</a:t>
-            </a:r>
-            <a:endParaRPr lang="en-US" sz="1000" dirty="0"/>
-          </a:p>
-        </p:txBody>
-      </p:sp>
-      <p:sp>
-        <p:nvSpPr>
-          <p:cNvPr id="12" name="Text 10"/>
-          <p:cNvSpPr/>
-          <p:nvPr/>
-        </p:nvSpPr>
-        <p:spPr>
-          <a:xfrm>
-            <a:off x="6272784" y="2286000"/>
-            <a:ext cx="1591056" cy="822960"/>
-          </a:xfrm>
-          <a:prstGeom prst="rect">
-            <a:avLst/>
-          </a:prstGeom>
-          <a:noFill/>
-          <a:ln/>
-        </p:spPr>
-        <p:txBody>
-          <a:bodyPr wrap="square" lIns="0" tIns="0" rIns="0" bIns="0" rtlCol="0" anchor="ctr"/>
-          <a:lstStyle/>
-          <a:p>
-            <a:pPr rtl="1" algn="r" indent="0" marL="0">
-              <a:buNone/>
-            </a:pPr>
-            <a:r>
-              <a:rPr lang="en-US" sz="1200" dirty="0">
-                <a:solidFill>
-                  <a:srgbClr val="12384F"/>
-                </a:solidFill>
-                <a:latin typeface="Arial" pitchFamily="34" charset="0"/>
-                <a:ea typeface="Arial" pitchFamily="34" charset="-122"/>
-                <a:cs typeface="Arial" pitchFamily="34" charset="-120"/>
-              </a:rPr>
-              <a:t>تردّ شركة التأمين بالرفض أو الخصم</a:t>
-            </a:r>
-            <a:endParaRPr lang="en-US" sz="1200" dirty="0"/>
-          </a:p>
-        </p:txBody>
-      </p:sp>
-      <p:sp>
-        <p:nvSpPr>
-          <p:cNvPr id="13" name="Shape 11"/>
-          <p:cNvSpPr/>
-          <p:nvPr/>
-        </p:nvSpPr>
-        <p:spPr>
-          <a:xfrm flipH="1">
-            <a:off x="5961888" y="2441448"/>
-            <a:ext cx="164592" cy="182880"/>
-          </a:xfrm>
-          <a:prstGeom prst="rightArrow">
+          <p:cNvPr id="12" name="Shape 10"/>
+          <p:cNvSpPr/>
+          <p:nvPr/>
+        </p:nvSpPr>
+        <p:spPr>
+          <a:xfrm>
+            <a:off x="8348472" y="1938528"/>
+            <a:ext cx="347472" cy="347472"/>
+          </a:xfrm>
+          <a:prstGeom prst="ellipse">
             <a:avLst/>
           </a:prstGeom>
           <a:solidFill>
@@ -12049,22 +11999,167 @@
       </p:sp>
       <p:sp>
         <p:nvSpPr>
-          <p:cNvPr id="14" name="Shape 12"/>
-          <p:cNvSpPr/>
-          <p:nvPr/>
-        </p:nvSpPr>
-        <p:spPr>
-          <a:xfrm>
-            <a:off x="4096512" y="1847088"/>
-            <a:ext cx="1847088" cy="1371600"/>
+          <p:cNvPr id="13" name="Text 11"/>
+          <p:cNvSpPr/>
+          <p:nvPr/>
+        </p:nvSpPr>
+        <p:spPr>
+          <a:xfrm>
+            <a:off x="8348472" y="1938528"/>
+            <a:ext cx="347472" cy="347472"/>
+          </a:xfrm>
+          <a:prstGeom prst="rect">
+            <a:avLst/>
+          </a:prstGeom>
+          <a:noFill/>
+          <a:ln/>
+        </p:spPr>
+        <p:txBody>
+          <a:bodyPr wrap="square" lIns="0" tIns="0" rIns="0" bIns="0" rtlCol="0" anchor="ctr"/>
+          <a:lstStyle/>
+          <a:p>
+            <a:pPr rtl="1" algn="ctr" indent="0" marL="0">
+              <a:buNone/>
+            </a:pPr>
+            <a:r>
+              <a:rPr lang="en-US" sz="1300" b="1" dirty="0">
+                <a:solidFill>
+                  <a:srgbClr val="4E657A"/>
+                </a:solidFill>
+                <a:latin typeface="Arial" pitchFamily="34" charset="0"/>
+                <a:ea typeface="Arial" pitchFamily="34" charset="-122"/>
+                <a:cs typeface="Arial" pitchFamily="34" charset="-120"/>
+              </a:rPr>
+              <a:t>2</a:t>
+            </a:r>
+            <a:endParaRPr lang="en-US" sz="1300" dirty="0"/>
+          </a:p>
+        </p:txBody>
+      </p:sp>
+      <p:sp>
+        <p:nvSpPr>
+          <p:cNvPr id="14" name="Text 12"/>
+          <p:cNvSpPr/>
+          <p:nvPr/>
+        </p:nvSpPr>
+        <p:spPr>
+          <a:xfrm>
+            <a:off x="6574536" y="1975104"/>
+            <a:ext cx="1737360" cy="292608"/>
+          </a:xfrm>
+          <a:prstGeom prst="rect">
+            <a:avLst/>
+          </a:prstGeom>
+          <a:noFill/>
+          <a:ln/>
+        </p:spPr>
+        <p:txBody>
+          <a:bodyPr wrap="square" lIns="0" tIns="0" rIns="0" bIns="0" rtlCol="0" anchor="ctr"/>
+          <a:lstStyle/>
+          <a:p>
+            <a:pPr rtl="1" algn="r" indent="0" marL="0">
+              <a:buNone/>
+            </a:pPr>
+            <a:r>
+              <a:rPr lang="en-US" sz="1350" b="1" dirty="0">
+                <a:solidFill>
+                  <a:srgbClr val="12384F"/>
+                </a:solidFill>
+                <a:latin typeface="Arial" pitchFamily="34" charset="0"/>
+                <a:ea typeface="Arial" pitchFamily="34" charset="-122"/>
+                <a:cs typeface="Arial" pitchFamily="34" charset="-120"/>
+              </a:rPr>
+              <a:t>منصّة نفيس</a:t>
+            </a:r>
+            <a:endParaRPr lang="en-US" sz="1350" dirty="0"/>
+          </a:p>
+        </p:txBody>
+      </p:sp>
+      <p:sp>
+        <p:nvSpPr>
+          <p:cNvPr id="15" name="Text 13"/>
+          <p:cNvSpPr/>
+          <p:nvPr/>
+        </p:nvSpPr>
+        <p:spPr>
+          <a:xfrm>
+            <a:off x="6574536" y="2377440"/>
+            <a:ext cx="2121408" cy="658368"/>
+          </a:xfrm>
+          <a:prstGeom prst="rect">
+            <a:avLst/>
+          </a:prstGeom>
+          <a:noFill/>
+          <a:ln/>
+        </p:spPr>
+        <p:txBody>
+          <a:bodyPr wrap="square" lIns="0" tIns="0" rIns="0" bIns="0" rtlCol="0" anchor="ctr"/>
+          <a:lstStyle/>
+          <a:p>
+            <a:pPr rtl="1" algn="r" indent="0" marL="0">
+              <a:lnSpc>
+                <a:spcPct val="120000"/>
+              </a:lnSpc>
+              <a:buNone/>
+            </a:pPr>
+            <a:r>
+              <a:rPr lang="en-US" sz="1150" dirty="0">
+                <a:solidFill>
+                  <a:srgbClr val="4E657A"/>
+                </a:solidFill>
+                <a:latin typeface="Arial" pitchFamily="34" charset="0"/>
+                <a:ea typeface="Arial" pitchFamily="34" charset="-122"/>
+                <a:cs typeface="Arial" pitchFamily="34" charset="-120"/>
+              </a:rPr>
+              <a:t>تمرّره إلى شركة التأمين</a:t>
+            </a:r>
+            <a:endParaRPr lang="en-US" sz="1150" dirty="0"/>
+          </a:p>
+        </p:txBody>
+      </p:sp>
+      <p:sp>
+        <p:nvSpPr>
+          <p:cNvPr id="16" name="Shape 14"/>
+          <p:cNvSpPr/>
+          <p:nvPr/>
+        </p:nvSpPr>
+        <p:spPr>
+          <a:xfrm flipH="1">
+            <a:off x="6190488" y="2395728"/>
+            <a:ext cx="182880" cy="201168"/>
+          </a:xfrm>
+          <a:prstGeom prst="rightArrow">
+            <a:avLst/>
+          </a:prstGeom>
+          <a:solidFill>
+            <a:srgbClr val="D6E2ED"/>
+          </a:solidFill>
+          <a:ln w="12700">
+            <a:solidFill>
+              <a:srgbClr val="D6E2ED"/>
+            </a:solidFill>
+            <a:prstDash val="solid"/>
+          </a:ln>
+        </p:spPr>
+      </p:sp>
+      <p:sp>
+        <p:nvSpPr>
+          <p:cNvPr id="17" name="Shape 15"/>
+          <p:cNvSpPr/>
+          <p:nvPr/>
+        </p:nvSpPr>
+        <p:spPr>
+          <a:xfrm>
+            <a:off x="3666744" y="1783080"/>
+            <a:ext cx="2487168" cy="1417320"/>
           </a:xfrm>
           <a:prstGeom prst="roundRect">
             <a:avLst>
-              <a:gd name="adj" fmla="val 4000"/>
+              <a:gd name="adj" fmla="val 3871"/>
             </a:avLst>
           </a:prstGeom>
           <a:solidFill>
-            <a:srgbClr val="EFF4F9"/>
+            <a:srgbClr val="FFFFFF"/>
           </a:solidFill>
           <a:ln w="12700">
             <a:solidFill>
@@ -12083,94 +12178,16 @@
       </p:sp>
       <p:sp>
         <p:nvSpPr>
-          <p:cNvPr id="15" name="Text 13"/>
-          <p:cNvSpPr/>
-          <p:nvPr/>
-        </p:nvSpPr>
-        <p:spPr>
-          <a:xfrm>
-            <a:off x="4224528" y="1975104"/>
-            <a:ext cx="1591056" cy="274320"/>
-          </a:xfrm>
-          <a:prstGeom prst="rect">
-            <a:avLst/>
-          </a:prstGeom>
-          <a:noFill/>
-          <a:ln/>
-        </p:spPr>
-        <p:txBody>
-          <a:bodyPr wrap="square" lIns="0" tIns="0" rIns="0" bIns="0" rtlCol="0" anchor="ctr"/>
-          <a:lstStyle/>
-          <a:p>
-            <a:pPr rtl="1" algn="r" indent="0" marL="0">
-              <a:buNone/>
-            </a:pPr>
-            <a:r>
-              <a:rPr lang="en-US" sz="1000" b="1" dirty="0">
-                <a:solidFill>
-                  <a:srgbClr val="4E657A"/>
-                </a:solidFill>
-                <a:latin typeface="Arial" pitchFamily="34" charset="0"/>
-                <a:ea typeface="Arial" pitchFamily="34" charset="-122"/>
-                <a:cs typeface="Arial" pitchFamily="34" charset="-120"/>
-              </a:rPr>
-              <a:t>الخطوة 3</a:t>
-            </a:r>
-            <a:endParaRPr lang="en-US" sz="1000" dirty="0"/>
-          </a:p>
-        </p:txBody>
-      </p:sp>
-      <p:sp>
-        <p:nvSpPr>
-          <p:cNvPr id="16" name="Text 14"/>
-          <p:cNvSpPr/>
-          <p:nvPr/>
-        </p:nvSpPr>
-        <p:spPr>
-          <a:xfrm>
-            <a:off x="4224528" y="2286000"/>
-            <a:ext cx="1591056" cy="822960"/>
-          </a:xfrm>
-          <a:prstGeom prst="rect">
-            <a:avLst/>
-          </a:prstGeom>
-          <a:noFill/>
-          <a:ln/>
-        </p:spPr>
-        <p:txBody>
-          <a:bodyPr wrap="square" lIns="0" tIns="0" rIns="0" bIns="0" rtlCol="0" anchor="ctr"/>
-          <a:lstStyle/>
-          <a:p>
-            <a:pPr rtl="1" algn="r" indent="0" marL="0">
-              <a:buNone/>
-            </a:pPr>
-            <a:r>
-              <a:rPr lang="en-US" sz="1200" dirty="0">
-                <a:solidFill>
-                  <a:srgbClr val="12384F"/>
-                </a:solidFill>
-                <a:latin typeface="Arial" pitchFamily="34" charset="0"/>
-                <a:ea typeface="Arial" pitchFamily="34" charset="-122"/>
-                <a:cs typeface="Arial" pitchFamily="34" charset="-120"/>
-              </a:rPr>
-              <a:t>يُجمَّع الناقص ويُعاد رفع الطلب</a:t>
-            </a:r>
-            <a:endParaRPr lang="en-US" sz="1200" dirty="0"/>
-          </a:p>
-        </p:txBody>
-      </p:sp>
-      <p:sp>
-        <p:nvSpPr>
-          <p:cNvPr id="17" name="Shape 15"/>
-          <p:cNvSpPr/>
-          <p:nvPr/>
-        </p:nvSpPr>
-        <p:spPr>
-          <a:xfrm flipH="1">
-            <a:off x="3913632" y="2441448"/>
-            <a:ext cx="164592" cy="182880"/>
-          </a:xfrm>
-          <a:prstGeom prst="rightArrow">
+          <p:cNvPr id="18" name="Shape 16"/>
+          <p:cNvSpPr/>
+          <p:nvPr/>
+        </p:nvSpPr>
+        <p:spPr>
+          <a:xfrm>
+            <a:off x="5623560" y="1938528"/>
+            <a:ext cx="347472" cy="347472"/>
+          </a:xfrm>
+          <a:prstGeom prst="ellipse">
             <a:avLst/>
           </a:prstGeom>
           <a:solidFill>
@@ -12186,26 +12203,144 @@
       </p:sp>
       <p:sp>
         <p:nvSpPr>
-          <p:cNvPr id="18" name="Shape 16"/>
-          <p:cNvSpPr/>
-          <p:nvPr/>
-        </p:nvSpPr>
-        <p:spPr>
-          <a:xfrm>
-            <a:off x="2048256" y="1847088"/>
-            <a:ext cx="1847088" cy="1371600"/>
-          </a:xfrm>
-          <a:prstGeom prst="roundRect">
-            <a:avLst>
-              <a:gd name="adj" fmla="val 4000"/>
-            </a:avLst>
+          <p:cNvPr id="19" name="Text 17"/>
+          <p:cNvSpPr/>
+          <p:nvPr/>
+        </p:nvSpPr>
+        <p:spPr>
+          <a:xfrm>
+            <a:off x="5623560" y="1938528"/>
+            <a:ext cx="347472" cy="347472"/>
+          </a:xfrm>
+          <a:prstGeom prst="rect">
+            <a:avLst/>
+          </a:prstGeom>
+          <a:noFill/>
+          <a:ln/>
+        </p:spPr>
+        <p:txBody>
+          <a:bodyPr wrap="square" lIns="0" tIns="0" rIns="0" bIns="0" rtlCol="0" anchor="ctr"/>
+          <a:lstStyle/>
+          <a:p>
+            <a:pPr rtl="1" algn="ctr" indent="0" marL="0">
+              <a:buNone/>
+            </a:pPr>
+            <a:r>
+              <a:rPr lang="en-US" sz="1300" b="1" dirty="0">
+                <a:solidFill>
+                  <a:srgbClr val="4E657A"/>
+                </a:solidFill>
+                <a:latin typeface="Arial" pitchFamily="34" charset="0"/>
+                <a:ea typeface="Arial" pitchFamily="34" charset="-122"/>
+                <a:cs typeface="Arial" pitchFamily="34" charset="-120"/>
+              </a:rPr>
+              <a:t>3</a:t>
+            </a:r>
+            <a:endParaRPr lang="en-US" sz="1300" dirty="0"/>
+          </a:p>
+        </p:txBody>
+      </p:sp>
+      <p:sp>
+        <p:nvSpPr>
+          <p:cNvPr id="20" name="Text 18"/>
+          <p:cNvSpPr/>
+          <p:nvPr/>
+        </p:nvSpPr>
+        <p:spPr>
+          <a:xfrm>
+            <a:off x="3849624" y="1975104"/>
+            <a:ext cx="1737360" cy="292608"/>
+          </a:xfrm>
+          <a:prstGeom prst="rect">
+            <a:avLst/>
+          </a:prstGeom>
+          <a:noFill/>
+          <a:ln/>
+        </p:spPr>
+        <p:txBody>
+          <a:bodyPr wrap="square" lIns="0" tIns="0" rIns="0" bIns="0" rtlCol="0" anchor="ctr"/>
+          <a:lstStyle/>
+          <a:p>
+            <a:pPr rtl="1" algn="r" indent="0" marL="0">
+              <a:buNone/>
+            </a:pPr>
+            <a:r>
+              <a:rPr lang="en-US" sz="1350" b="1" dirty="0">
+                <a:solidFill>
+                  <a:srgbClr val="12384F"/>
+                </a:solidFill>
+                <a:latin typeface="Arial" pitchFamily="34" charset="0"/>
+                <a:ea typeface="Arial" pitchFamily="34" charset="-122"/>
+                <a:cs typeface="Arial" pitchFamily="34" charset="-120"/>
+              </a:rPr>
+              <a:t>شركة التأمين</a:t>
+            </a:r>
+            <a:endParaRPr lang="en-US" sz="1350" dirty="0"/>
+          </a:p>
+        </p:txBody>
+      </p:sp>
+      <p:sp>
+        <p:nvSpPr>
+          <p:cNvPr id="21" name="Text 19"/>
+          <p:cNvSpPr/>
+          <p:nvPr/>
+        </p:nvSpPr>
+        <p:spPr>
+          <a:xfrm>
+            <a:off x="3849624" y="2377440"/>
+            <a:ext cx="2121408" cy="658368"/>
+          </a:xfrm>
+          <a:prstGeom prst="rect">
+            <a:avLst/>
+          </a:prstGeom>
+          <a:noFill/>
+          <a:ln/>
+        </p:spPr>
+        <p:txBody>
+          <a:bodyPr wrap="square" lIns="0" tIns="0" rIns="0" bIns="0" rtlCol="0" anchor="ctr"/>
+          <a:lstStyle/>
+          <a:p>
+            <a:pPr rtl="1" algn="r" indent="0" marL="0">
+              <a:lnSpc>
+                <a:spcPct val="120000"/>
+              </a:lnSpc>
+              <a:buNone/>
+            </a:pPr>
+            <a:r>
+              <a:rPr lang="en-US" sz="1150" dirty="0">
+                <a:solidFill>
+                  <a:srgbClr val="4E657A"/>
+                </a:solidFill>
+                <a:latin typeface="Arial" pitchFamily="34" charset="0"/>
+                <a:ea typeface="Arial" pitchFamily="34" charset="-122"/>
+                <a:cs typeface="Arial" pitchFamily="34" charset="-120"/>
+              </a:rPr>
+              <a:t>تردّ بالموافقة أو الرفض أو الخصم</a:t>
+            </a:r>
+            <a:endParaRPr lang="en-US" sz="1150" dirty="0"/>
+          </a:p>
+        </p:txBody>
+      </p:sp>
+      <p:sp>
+        <p:nvSpPr>
+          <p:cNvPr id="22" name="Shape 20"/>
+          <p:cNvSpPr/>
+          <p:nvPr/>
+        </p:nvSpPr>
+        <p:spPr>
+          <a:xfrm flipH="1">
+            <a:off x="3465576" y="2395728"/>
+            <a:ext cx="182880" cy="201168"/>
+          </a:xfrm>
+          <a:prstGeom prst="rightArrow">
+            <a:avLst/>
           </a:prstGeom>
           <a:solidFill>
-            <a:srgbClr val="C4362F"/>
+            <a:srgbClr val="D6E2ED"/>
           </a:solidFill>
           <a:ln w="12700">
             <a:solidFill>
-              <a:srgbClr val="C4362F"/>
+              <a:srgbClr val="D6E2ED"/>
             </a:solidFill>
             <a:prstDash val="solid"/>
           </a:ln>
@@ -12213,139 +12348,240 @@
       </p:sp>
       <p:sp>
         <p:nvSpPr>
-          <p:cNvPr id="19" name="Text 17"/>
-          <p:cNvSpPr/>
-          <p:nvPr/>
-        </p:nvSpPr>
-        <p:spPr>
-          <a:xfrm>
-            <a:off x="2176272" y="1975104"/>
-            <a:ext cx="1591056" cy="274320"/>
-          </a:xfrm>
-          <a:prstGeom prst="rect">
-            <a:avLst/>
-          </a:prstGeom>
-          <a:noFill/>
-          <a:ln/>
-        </p:spPr>
-        <p:txBody>
-          <a:bodyPr wrap="square" lIns="0" tIns="0" rIns="0" bIns="0" rtlCol="0" anchor="ctr"/>
-          <a:lstStyle/>
-          <a:p>
-            <a:pPr rtl="1" algn="r" indent="0" marL="0">
-              <a:buNone/>
-            </a:pPr>
-            <a:r>
-              <a:rPr lang="en-US" sz="1000" b="1" dirty="0">
-                <a:solidFill>
-                  <a:srgbClr val="FFFFFF"/>
-                </a:solidFill>
-                <a:latin typeface="Arial" pitchFamily="34" charset="0"/>
-                <a:ea typeface="Arial" pitchFamily="34" charset="-122"/>
-                <a:cs typeface="Arial" pitchFamily="34" charset="-120"/>
-              </a:rPr>
-              <a:t>النتيجة</a:t>
-            </a:r>
-            <a:endParaRPr lang="en-US" sz="1000" dirty="0"/>
-          </a:p>
-        </p:txBody>
-      </p:sp>
-      <p:sp>
-        <p:nvSpPr>
-          <p:cNvPr id="20" name="Text 18"/>
-          <p:cNvSpPr/>
-          <p:nvPr/>
-        </p:nvSpPr>
-        <p:spPr>
-          <a:xfrm>
-            <a:off x="2176272" y="2286000"/>
-            <a:ext cx="1591056" cy="822960"/>
-          </a:xfrm>
-          <a:prstGeom prst="rect">
-            <a:avLst/>
-          </a:prstGeom>
-          <a:noFill/>
-          <a:ln/>
-        </p:spPr>
-        <p:txBody>
-          <a:bodyPr wrap="square" lIns="0" tIns="0" rIns="0" bIns="0" rtlCol="0" anchor="ctr"/>
-          <a:lstStyle/>
-          <a:p>
-            <a:pPr rtl="1" algn="r" indent="0" marL="0">
-              <a:buNone/>
-            </a:pPr>
-            <a:r>
-              <a:rPr lang="en-US" sz="1200" dirty="0">
-                <a:solidFill>
-                  <a:srgbClr val="FFFFFF"/>
-                </a:solidFill>
-                <a:latin typeface="Arial" pitchFamily="34" charset="0"/>
-                <a:ea typeface="Arial" pitchFamily="34" charset="-122"/>
-                <a:cs typeface="Arial" pitchFamily="34" charset="-120"/>
-              </a:rPr>
-              <a:t>تأخّر في بدء الخدمة، وجزء يُرفض نهائياً</a:t>
-            </a:r>
-            <a:endParaRPr lang="en-US" sz="1200" dirty="0"/>
-          </a:p>
-        </p:txBody>
-      </p:sp>
-      <p:sp>
-        <p:nvSpPr>
-          <p:cNvPr id="21" name="Text 19"/>
-          <p:cNvSpPr/>
-          <p:nvPr/>
-        </p:nvSpPr>
-        <p:spPr>
-          <a:xfrm>
-            <a:off x="10378440" y="4078224"/>
-            <a:ext cx="1234440" cy="457200"/>
-          </a:xfrm>
-          <a:prstGeom prst="rect">
-            <a:avLst/>
-          </a:prstGeom>
-          <a:noFill/>
-          <a:ln/>
-        </p:spPr>
-        <p:txBody>
-          <a:bodyPr wrap="square" lIns="0" tIns="0" rIns="0" bIns="0" rtlCol="0" anchor="ctr"/>
-          <a:lstStyle/>
-          <a:p>
-            <a:pPr rtl="1" algn="r" indent="0" marL="0">
-              <a:buNone/>
-            </a:pPr>
-            <a:r>
-              <a:rPr lang="en-US" sz="1500" b="1" dirty="0">
-                <a:solidFill>
-                  <a:srgbClr val="0B7A5E"/>
-                </a:solidFill>
-                <a:latin typeface="Arial" pitchFamily="34" charset="0"/>
-                <a:ea typeface="Arial" pitchFamily="34" charset="-122"/>
-                <a:cs typeface="Arial" pitchFamily="34" charset="-120"/>
-              </a:rPr>
-              <a:t>مع سديد</a:t>
-            </a:r>
-            <a:endParaRPr lang="en-US" sz="1500" dirty="0"/>
-          </a:p>
-        </p:txBody>
-      </p:sp>
-      <p:sp>
-        <p:nvSpPr>
-          <p:cNvPr id="22" name="Shape 20"/>
-          <p:cNvSpPr/>
-          <p:nvPr/>
-        </p:nvSpPr>
-        <p:spPr>
-          <a:xfrm>
-            <a:off x="8193024" y="3621024"/>
-            <a:ext cx="1847088" cy="1371600"/>
+          <p:cNvPr id="23" name="Shape 21"/>
+          <p:cNvSpPr/>
+          <p:nvPr/>
+        </p:nvSpPr>
+        <p:spPr>
+          <a:xfrm>
+            <a:off x="941832" y="1783080"/>
+            <a:ext cx="2487168" cy="1417320"/>
           </a:xfrm>
           <a:prstGeom prst="roundRect">
             <a:avLst>
-              <a:gd name="adj" fmla="val 4000"/>
+              <a:gd name="adj" fmla="val 3871"/>
             </a:avLst>
           </a:prstGeom>
           <a:solidFill>
             <a:srgbClr val="EFF4F9"/>
+          </a:solidFill>
+          <a:ln w="19050">
+            <a:solidFill>
+              <a:srgbClr val="1B6FA8"/>
+            </a:solidFill>
+            <a:prstDash val="solid"/>
+          </a:ln>
+          <a:effectLst>
+            <a:outerShdw sx="100000" sy="100000" kx="0" ky="0" algn="bl" rotWithShape="0" blurRad="127000" dist="25400" dir="5400000">
+              <a:srgbClr val="12384F">
+                <a:alpha val="10000"/>
+              </a:srgbClr>
+            </a:outerShdw>
+          </a:effectLst>
+        </p:spPr>
+      </p:sp>
+      <p:sp>
+        <p:nvSpPr>
+          <p:cNvPr id="24" name="Shape 22"/>
+          <p:cNvSpPr/>
+          <p:nvPr/>
+        </p:nvSpPr>
+        <p:spPr>
+          <a:xfrm>
+            <a:off x="2898648" y="1938528"/>
+            <a:ext cx="347472" cy="347472"/>
+          </a:xfrm>
+          <a:prstGeom prst="ellipse">
+            <a:avLst/>
+          </a:prstGeom>
+          <a:solidFill>
+            <a:srgbClr val="1B6FA8"/>
+          </a:solidFill>
+          <a:ln w="12700">
+            <a:solidFill>
+              <a:srgbClr val="1B6FA8"/>
+            </a:solidFill>
+            <a:prstDash val="solid"/>
+          </a:ln>
+        </p:spPr>
+      </p:sp>
+      <p:sp>
+        <p:nvSpPr>
+          <p:cNvPr id="25" name="Text 23"/>
+          <p:cNvSpPr/>
+          <p:nvPr/>
+        </p:nvSpPr>
+        <p:spPr>
+          <a:xfrm>
+            <a:off x="2898648" y="1938528"/>
+            <a:ext cx="347472" cy="347472"/>
+          </a:xfrm>
+          <a:prstGeom prst="rect">
+            <a:avLst/>
+          </a:prstGeom>
+          <a:noFill/>
+          <a:ln/>
+        </p:spPr>
+        <p:txBody>
+          <a:bodyPr wrap="square" lIns="0" tIns="0" rIns="0" bIns="0" rtlCol="0" anchor="ctr"/>
+          <a:lstStyle/>
+          <a:p>
+            <a:pPr rtl="1" algn="ctr" indent="0" marL="0">
+              <a:buNone/>
+            </a:pPr>
+            <a:r>
+              <a:rPr lang="en-US" sz="1300" b="1" dirty="0">
+                <a:solidFill>
+                  <a:srgbClr val="FFFFFF"/>
+                </a:solidFill>
+                <a:latin typeface="Arial" pitchFamily="34" charset="0"/>
+                <a:ea typeface="Arial" pitchFamily="34" charset="-122"/>
+                <a:cs typeface="Arial" pitchFamily="34" charset="-120"/>
+              </a:rPr>
+              <a:t>4</a:t>
+            </a:r>
+            <a:endParaRPr lang="en-US" sz="1300" dirty="0"/>
+          </a:p>
+        </p:txBody>
+      </p:sp>
+      <p:sp>
+        <p:nvSpPr>
+          <p:cNvPr id="26" name="Text 24"/>
+          <p:cNvSpPr/>
+          <p:nvPr/>
+        </p:nvSpPr>
+        <p:spPr>
+          <a:xfrm>
+            <a:off x="1124712" y="1975104"/>
+            <a:ext cx="1737360" cy="292608"/>
+          </a:xfrm>
+          <a:prstGeom prst="rect">
+            <a:avLst/>
+          </a:prstGeom>
+          <a:noFill/>
+          <a:ln/>
+        </p:spPr>
+        <p:txBody>
+          <a:bodyPr wrap="square" lIns="0" tIns="0" rIns="0" bIns="0" rtlCol="0" anchor="ctr"/>
+          <a:lstStyle/>
+          <a:p>
+            <a:pPr rtl="1" algn="r" indent="0" marL="0">
+              <a:buNone/>
+            </a:pPr>
+            <a:r>
+              <a:rPr lang="en-US" sz="1350" b="1" dirty="0">
+                <a:solidFill>
+                  <a:srgbClr val="12384F"/>
+                </a:solidFill>
+                <a:latin typeface="Arial" pitchFamily="34" charset="0"/>
+                <a:ea typeface="Arial" pitchFamily="34" charset="-122"/>
+                <a:cs typeface="Arial" pitchFamily="34" charset="-120"/>
+              </a:rPr>
+              <a:t>فريق الموافقات</a:t>
+            </a:r>
+            <a:endParaRPr lang="en-US" sz="1350" dirty="0"/>
+          </a:p>
+        </p:txBody>
+      </p:sp>
+      <p:sp>
+        <p:nvSpPr>
+          <p:cNvPr id="27" name="Text 25"/>
+          <p:cNvSpPr/>
+          <p:nvPr/>
+        </p:nvSpPr>
+        <p:spPr>
+          <a:xfrm>
+            <a:off x="1124712" y="2377440"/>
+            <a:ext cx="2121408" cy="658368"/>
+          </a:xfrm>
+          <a:prstGeom prst="rect">
+            <a:avLst/>
+          </a:prstGeom>
+          <a:noFill/>
+          <a:ln/>
+        </p:spPr>
+        <p:txBody>
+          <a:bodyPr wrap="square" lIns="0" tIns="0" rIns="0" bIns="0" rtlCol="0" anchor="ctr"/>
+          <a:lstStyle/>
+          <a:p>
+            <a:pPr rtl="1" algn="r" indent="0" marL="0">
+              <a:lnSpc>
+                <a:spcPct val="120000"/>
+              </a:lnSpc>
+              <a:buNone/>
+            </a:pPr>
+            <a:r>
+              <a:rPr lang="en-US" sz="1150" dirty="0">
+                <a:solidFill>
+                  <a:srgbClr val="4E657A"/>
+                </a:solidFill>
+                <a:latin typeface="Arial" pitchFamily="34" charset="0"/>
+                <a:ea typeface="Arial" pitchFamily="34" charset="-122"/>
+                <a:cs typeface="Arial" pitchFamily="34" charset="-120"/>
+              </a:rPr>
+              <a:t>يعالج المرفوضات ويعيد إرسالها</a:t>
+            </a:r>
+            <a:endParaRPr lang="en-US" sz="1150" dirty="0"/>
+          </a:p>
+        </p:txBody>
+      </p:sp>
+      <p:sp>
+        <p:nvSpPr>
+          <p:cNvPr id="28" name="Text 26"/>
+          <p:cNvSpPr/>
+          <p:nvPr/>
+        </p:nvSpPr>
+        <p:spPr>
+          <a:xfrm>
+            <a:off x="557784" y="3346704"/>
+            <a:ext cx="11045952" cy="310896"/>
+          </a:xfrm>
+          <a:prstGeom prst="rect">
+            <a:avLst/>
+          </a:prstGeom>
+          <a:noFill/>
+          <a:ln/>
+        </p:spPr>
+        <p:txBody>
+          <a:bodyPr wrap="square" lIns="0" tIns="0" rIns="0" bIns="0" rtlCol="0" anchor="ctr"/>
+          <a:lstStyle/>
+          <a:p>
+            <a:pPr rtl="1" algn="ctr" indent="0" marL="0">
+              <a:buNone/>
+            </a:pPr>
+            <a:r>
+              <a:rPr lang="en-US" sz="1250" b="1" dirty="0">
+                <a:solidFill>
+                  <a:srgbClr val="C4362F"/>
+                </a:solidFill>
+                <a:latin typeface="Arial" pitchFamily="34" charset="0"/>
+                <a:ea typeface="Arial" pitchFamily="34" charset="-122"/>
+                <a:cs typeface="Arial" pitchFamily="34" charset="-120"/>
+              </a:rPr>
+              <a:t>494 من كل 1,000 طلب تعود غير مكتملة — وكلّها تقع على فريق الموافقات.</a:t>
+            </a:r>
+            <a:endParaRPr lang="en-US" sz="1250" dirty="0"/>
+          </a:p>
+        </p:txBody>
+      </p:sp>
+      <p:sp>
+        <p:nvSpPr>
+          <p:cNvPr id="29" name="Shape 27"/>
+          <p:cNvSpPr/>
+          <p:nvPr/>
+        </p:nvSpPr>
+        <p:spPr>
+          <a:xfrm>
+            <a:off x="6281928" y="3840480"/>
+            <a:ext cx="5321808" cy="2084832"/>
+          </a:xfrm>
+          <a:prstGeom prst="roundRect">
+            <a:avLst>
+              <a:gd name="adj" fmla="val 2632"/>
+            </a:avLst>
+          </a:prstGeom>
+          <a:solidFill>
+            <a:srgbClr val="FFFFFF"/>
           </a:solidFill>
           <a:ln w="12700">
             <a:solidFill>
@@ -12364,30 +12600,111 @@
       </p:sp>
       <p:sp>
         <p:nvSpPr>
-          <p:cNvPr id="23" name="Text 21"/>
-          <p:cNvSpPr/>
-          <p:nvPr/>
-        </p:nvSpPr>
-        <p:spPr>
-          <a:xfrm>
-            <a:off x="8321040" y="3749040"/>
-            <a:ext cx="1591056" cy="274320"/>
-          </a:xfrm>
-          <a:prstGeom prst="rect">
-            <a:avLst/>
-          </a:prstGeom>
-          <a:noFill/>
-          <a:ln/>
-        </p:spPr>
-        <p:txBody>
-          <a:bodyPr wrap="square" lIns="0" tIns="0" rIns="0" bIns="0" rtlCol="0" anchor="ctr"/>
-          <a:lstStyle/>
-          <a:p>
-            <a:pPr rtl="1" algn="r" indent="0" marL="0">
-              <a:buNone/>
-            </a:pPr>
-            <a:r>
-              <a:rPr lang="en-US" sz="1000" b="1" dirty="0">
+          <p:cNvPr id="30" name="Text 28"/>
+          <p:cNvSpPr/>
+          <p:nvPr/>
+        </p:nvSpPr>
+        <p:spPr>
+          <a:xfrm>
+            <a:off x="6537960" y="4023360"/>
+            <a:ext cx="4809744" cy="274320"/>
+          </a:xfrm>
+          <a:prstGeom prst="rect">
+            <a:avLst/>
+          </a:prstGeom>
+          <a:noFill/>
+          <a:ln/>
+        </p:spPr>
+        <p:txBody>
+          <a:bodyPr wrap="square" lIns="0" tIns="0" rIns="0" bIns="0" rtlCol="0" anchor="ctr"/>
+          <a:lstStyle/>
+          <a:p>
+            <a:pPr rtl="1" algn="r" indent="0" marL="0">
+              <a:buNone/>
+            </a:pPr>
+            <a:r>
+              <a:rPr lang="en-US" sz="1150" b="1" spc="100" kern="0" dirty="0">
+                <a:solidFill>
+                  <a:srgbClr val="0B7A5E"/>
+                </a:solidFill>
+                <a:latin typeface="Arial" pitchFamily="34" charset="0"/>
+                <a:ea typeface="Arial" pitchFamily="34" charset="-122"/>
+                <a:cs typeface="Arial" pitchFamily="34" charset="-120"/>
+              </a:rPr>
+              <a:t>اليوم</a:t>
+            </a:r>
+            <a:endParaRPr lang="en-US" sz="1150" dirty="0"/>
+          </a:p>
+        </p:txBody>
+      </p:sp>
+      <p:sp>
+        <p:nvSpPr>
+          <p:cNvPr id="31" name="Text 29"/>
+          <p:cNvSpPr/>
+          <p:nvPr/>
+        </p:nvSpPr>
+        <p:spPr>
+          <a:xfrm>
+            <a:off x="6537960" y="4334256"/>
+            <a:ext cx="4809744" cy="347472"/>
+          </a:xfrm>
+          <a:prstGeom prst="rect">
+            <a:avLst/>
+          </a:prstGeom>
+          <a:noFill/>
+          <a:ln/>
+        </p:spPr>
+        <p:txBody>
+          <a:bodyPr wrap="square" lIns="0" tIns="0" rIns="0" bIns="0" rtlCol="0" anchor="ctr"/>
+          <a:lstStyle/>
+          <a:p>
+            <a:pPr rtl="1" algn="r" indent="0" marL="0">
+              <a:buNone/>
+            </a:pPr>
+            <a:r>
+              <a:rPr lang="en-US" sz="1700" b="1" dirty="0">
+                <a:solidFill>
+                  <a:srgbClr val="12384F"/>
+                </a:solidFill>
+                <a:latin typeface="Arial" pitchFamily="34" charset="0"/>
+                <a:ea typeface="Arial" pitchFamily="34" charset="-122"/>
+                <a:cs typeface="Arial" pitchFamily="34" charset="-120"/>
+              </a:rPr>
+              <a:t>عند معالجة المرفوضات</a:t>
+            </a:r>
+            <a:endParaRPr lang="en-US" sz="1700" dirty="0"/>
+          </a:p>
+        </p:txBody>
+      </p:sp>
+      <p:sp>
+        <p:nvSpPr>
+          <p:cNvPr id="32" name="Text 30"/>
+          <p:cNvSpPr/>
+          <p:nvPr/>
+        </p:nvSpPr>
+        <p:spPr>
+          <a:xfrm>
+            <a:off x="6537960" y="4773168"/>
+            <a:ext cx="4809744" cy="1005840"/>
+          </a:xfrm>
+          <a:prstGeom prst="rect">
+            <a:avLst/>
+          </a:prstGeom>
+          <a:noFill/>
+          <a:ln/>
+        </p:spPr>
+        <p:txBody>
+          <a:bodyPr wrap="square" lIns="0" tIns="0" rIns="0" bIns="0" rtlCol="0" anchor="ctr"/>
+          <a:lstStyle/>
+          <a:p>
+            <a:pPr rtl="1" algn="r" indent="0" marL="0">
+              <a:lnSpc>
+                <a:spcPct val="128000"/>
+              </a:lnSpc>
+              <a:buNone/>
+            </a:pPr>
+            <a:r>
+              <a:rPr lang="en-US" sz="1200" dirty="0">
                 <a:solidFill>
                   <a:srgbClr val="4E657A"/>
                 </a:solidFill>
@@ -12395,46 +12712,7 @@
                 <a:ea typeface="Arial" pitchFamily="34" charset="-122"/>
                 <a:cs typeface="Arial" pitchFamily="34" charset="-120"/>
               </a:rPr>
-              <a:t>الخطوة 1</a:t>
-            </a:r>
-            <a:endParaRPr lang="en-US" sz="1000" dirty="0"/>
-          </a:p>
-        </p:txBody>
-      </p:sp>
-      <p:sp>
-        <p:nvSpPr>
-          <p:cNvPr id="24" name="Text 22"/>
-          <p:cNvSpPr/>
-          <p:nvPr/>
-        </p:nvSpPr>
-        <p:spPr>
-          <a:xfrm>
-            <a:off x="8321040" y="4059936"/>
-            <a:ext cx="1591056" cy="822960"/>
-          </a:xfrm>
-          <a:prstGeom prst="rect">
-            <a:avLst/>
-          </a:prstGeom>
-          <a:noFill/>
-          <a:ln/>
-        </p:spPr>
-        <p:txBody>
-          <a:bodyPr wrap="square" lIns="0" tIns="0" rIns="0" bIns="0" rtlCol="0" anchor="ctr"/>
-          <a:lstStyle/>
-          <a:p>
-            <a:pPr rtl="1" algn="r" indent="0" marL="0">
-              <a:buNone/>
-            </a:pPr>
-            <a:r>
-              <a:rPr lang="en-US" sz="1200" dirty="0">
-                <a:solidFill>
-                  <a:srgbClr val="12384F"/>
-                </a:solidFill>
-                <a:latin typeface="Arial" pitchFamily="34" charset="0"/>
-                <a:ea typeface="Arial" pitchFamily="34" charset="-122"/>
-                <a:cs typeface="Arial" pitchFamily="34" charset="-120"/>
-              </a:rPr>
-              <a:t>سديد يقيس احتمال عدم الاكتمال</a:t>
+              <a:t>يصنّف ردّ شركة التأمين إلى سبب معياري، ويُلحق به إجراءً تصحيحياً ونصّاً نظامياً، ويرتّب الطابور بالمبلغ المعرّض للخطر. لا يحتاج تعديلاً في أي نظام.</a:t>
             </a:r>
             <a:endParaRPr lang="en-US" sz="1200" dirty="0"/>
           </a:p>
@@ -12442,47 +12720,22 @@
       </p:sp>
       <p:sp>
         <p:nvSpPr>
-          <p:cNvPr id="25" name="Shape 23"/>
-          <p:cNvSpPr/>
-          <p:nvPr/>
-        </p:nvSpPr>
-        <p:spPr>
-          <a:xfrm flipH="1">
-            <a:off x="8010144" y="4215384"/>
-            <a:ext cx="164592" cy="182880"/>
-          </a:xfrm>
-          <a:prstGeom prst="rightArrow">
-            <a:avLst/>
-          </a:prstGeom>
-          <a:solidFill>
-            <a:srgbClr val="D6E2ED"/>
-          </a:solidFill>
-          <a:ln w="12700">
-            <a:solidFill>
-              <a:srgbClr val="D6E2ED"/>
-            </a:solidFill>
-            <a:prstDash val="solid"/>
-          </a:ln>
-        </p:spPr>
-      </p:sp>
-      <p:sp>
-        <p:nvSpPr>
-          <p:cNvPr id="26" name="Shape 24"/>
-          <p:cNvSpPr/>
-          <p:nvPr/>
-        </p:nvSpPr>
-        <p:spPr>
-          <a:xfrm>
-            <a:off x="6144768" y="3621024"/>
-            <a:ext cx="1847088" cy="1371600"/>
+          <p:cNvPr id="33" name="Shape 31"/>
+          <p:cNvSpPr/>
+          <p:nvPr/>
+        </p:nvSpPr>
+        <p:spPr>
+          <a:xfrm>
+            <a:off x="557784" y="3840480"/>
+            <a:ext cx="5321808" cy="2084832"/>
           </a:xfrm>
           <a:prstGeom prst="roundRect">
             <a:avLst>
-              <a:gd name="adj" fmla="val 4000"/>
+              <a:gd name="adj" fmla="val 2632"/>
             </a:avLst>
           </a:prstGeom>
           <a:solidFill>
-            <a:srgbClr val="EFF4F9"/>
+            <a:srgbClr val="FFFFFF"/>
           </a:solidFill>
           <a:ln w="12700">
             <a:solidFill>
@@ -12501,30 +12754,111 @@
       </p:sp>
       <p:sp>
         <p:nvSpPr>
-          <p:cNvPr id="27" name="Text 25"/>
-          <p:cNvSpPr/>
-          <p:nvPr/>
-        </p:nvSpPr>
-        <p:spPr>
-          <a:xfrm>
-            <a:off x="6272784" y="3749040"/>
-            <a:ext cx="1591056" cy="274320"/>
-          </a:xfrm>
-          <a:prstGeom prst="rect">
-            <a:avLst/>
-          </a:prstGeom>
-          <a:noFill/>
-          <a:ln/>
-        </p:spPr>
-        <p:txBody>
-          <a:bodyPr wrap="square" lIns="0" tIns="0" rIns="0" bIns="0" rtlCol="0" anchor="ctr"/>
-          <a:lstStyle/>
-          <a:p>
-            <a:pPr rtl="1" algn="r" indent="0" marL="0">
-              <a:buNone/>
-            </a:pPr>
-            <a:r>
-              <a:rPr lang="en-US" sz="1000" b="1" dirty="0">
+          <p:cNvPr id="34" name="Text 32"/>
+          <p:cNvSpPr/>
+          <p:nvPr/>
+        </p:nvSpPr>
+        <p:spPr>
+          <a:xfrm>
+            <a:off x="813816" y="4023360"/>
+            <a:ext cx="4809744" cy="274320"/>
+          </a:xfrm>
+          <a:prstGeom prst="rect">
+            <a:avLst/>
+          </a:prstGeom>
+          <a:noFill/>
+          <a:ln/>
+        </p:spPr>
+        <p:txBody>
+          <a:bodyPr wrap="square" lIns="0" tIns="0" rIns="0" bIns="0" rtlCol="0" anchor="ctr"/>
+          <a:lstStyle/>
+          <a:p>
+            <a:pPr rtl="1" algn="r" indent="0" marL="0">
+              <a:buNone/>
+            </a:pPr>
+            <a:r>
+              <a:rPr lang="en-US" sz="1150" b="1" spc="100" kern="0" dirty="0">
+                <a:solidFill>
+                  <a:srgbClr val="1B6FA8"/>
+                </a:solidFill>
+                <a:latin typeface="Arial" pitchFamily="34" charset="0"/>
+                <a:ea typeface="Arial" pitchFamily="34" charset="-122"/>
+                <a:cs typeface="Arial" pitchFamily="34" charset="-120"/>
+              </a:rPr>
+              <a:t>المرحلة التالية</a:t>
+            </a:r>
+            <a:endParaRPr lang="en-US" sz="1150" dirty="0"/>
+          </a:p>
+        </p:txBody>
+      </p:sp>
+      <p:sp>
+        <p:nvSpPr>
+          <p:cNvPr id="35" name="Text 33"/>
+          <p:cNvSpPr/>
+          <p:nvPr/>
+        </p:nvSpPr>
+        <p:spPr>
+          <a:xfrm>
+            <a:off x="813816" y="4334256"/>
+            <a:ext cx="4809744" cy="347472"/>
+          </a:xfrm>
+          <a:prstGeom prst="rect">
+            <a:avLst/>
+          </a:prstGeom>
+          <a:noFill/>
+          <a:ln/>
+        </p:spPr>
+        <p:txBody>
+          <a:bodyPr wrap="square" lIns="0" tIns="0" rIns="0" bIns="0" rtlCol="0" anchor="ctr"/>
+          <a:lstStyle/>
+          <a:p>
+            <a:pPr rtl="1" algn="r" indent="0" marL="0">
+              <a:buNone/>
+            </a:pPr>
+            <a:r>
+              <a:rPr lang="en-US" sz="1700" b="1" dirty="0">
+                <a:solidFill>
+                  <a:srgbClr val="12384F"/>
+                </a:solidFill>
+                <a:latin typeface="Arial" pitchFamily="34" charset="0"/>
+                <a:ea typeface="Arial" pitchFamily="34" charset="-122"/>
+                <a:cs typeface="Arial" pitchFamily="34" charset="-120"/>
+              </a:rPr>
+              <a:t>في المنبع داخل النظام الصحي</a:t>
+            </a:r>
+            <a:endParaRPr lang="en-US" sz="1700" dirty="0"/>
+          </a:p>
+        </p:txBody>
+      </p:sp>
+      <p:sp>
+        <p:nvSpPr>
+          <p:cNvPr id="36" name="Text 34"/>
+          <p:cNvSpPr/>
+          <p:nvPr/>
+        </p:nvSpPr>
+        <p:spPr>
+          <a:xfrm>
+            <a:off x="813816" y="4773168"/>
+            <a:ext cx="4809744" cy="1005840"/>
+          </a:xfrm>
+          <a:prstGeom prst="rect">
+            <a:avLst/>
+          </a:prstGeom>
+          <a:noFill/>
+          <a:ln/>
+        </p:spPr>
+        <p:txBody>
+          <a:bodyPr wrap="square" lIns="0" tIns="0" rIns="0" bIns="0" rtlCol="0" anchor="ctr"/>
+          <a:lstStyle/>
+          <a:p>
+            <a:pPr rtl="1" algn="r" indent="0" marL="0">
+              <a:lnSpc>
+                <a:spcPct val="128000"/>
+              </a:lnSpc>
+              <a:buNone/>
+            </a:pPr>
+            <a:r>
+              <a:rPr lang="en-US" sz="1200" dirty="0">
                 <a:solidFill>
                   <a:srgbClr val="4E657A"/>
                 </a:solidFill>
@@ -12532,46 +12866,7 @@
                 <a:ea typeface="Arial" pitchFamily="34" charset="-122"/>
                 <a:cs typeface="Arial" pitchFamily="34" charset="-120"/>
               </a:rPr>
-              <a:t>الخطوة 2</a:t>
-            </a:r>
-            <a:endParaRPr lang="en-US" sz="1000" dirty="0"/>
-          </a:p>
-        </p:txBody>
-      </p:sp>
-      <p:sp>
-        <p:nvSpPr>
-          <p:cNvPr id="28" name="Text 26"/>
-          <p:cNvSpPr/>
-          <p:nvPr/>
-        </p:nvSpPr>
-        <p:spPr>
-          <a:xfrm>
-            <a:off x="6272784" y="4059936"/>
-            <a:ext cx="1591056" cy="822960"/>
-          </a:xfrm>
-          <a:prstGeom prst="rect">
-            <a:avLst/>
-          </a:prstGeom>
-          <a:noFill/>
-          <a:ln/>
-        </p:spPr>
-        <p:txBody>
-          <a:bodyPr wrap="square" lIns="0" tIns="0" rIns="0" bIns="0" rtlCol="0" anchor="ctr"/>
-          <a:lstStyle/>
-          <a:p>
-            <a:pPr rtl="1" algn="r" indent="0" marL="0">
-              <a:buNone/>
-            </a:pPr>
-            <a:r>
-              <a:rPr lang="en-US" sz="1200" dirty="0">
-                <a:solidFill>
-                  <a:srgbClr val="12384F"/>
-                </a:solidFill>
-                <a:latin typeface="Arial" pitchFamily="34" charset="0"/>
-                <a:ea typeface="Arial" pitchFamily="34" charset="-122"/>
-                <a:cs typeface="Arial" pitchFamily="34" charset="-120"/>
-              </a:rPr>
-              <a:t>يرتّب الأسباب المرجّحة للردّ</a:t>
+              <a:t>فرض اكتمال الحد الأدنى للبيانات قبل الإرسال الآلي. سديد يحدّد أي الحقول تُنتج الرفض فعلاً، فيُفرض ما يُجدي منها لا كلّها.</a:t>
             </a:r>
             <a:endParaRPr lang="en-US" sz="1200" dirty="0"/>
           </a:p>
@@ -12579,89 +12874,30 @@
       </p:sp>
       <p:sp>
         <p:nvSpPr>
-          <p:cNvPr id="29" name="Shape 27"/>
-          <p:cNvSpPr/>
-          <p:nvPr/>
-        </p:nvSpPr>
-        <p:spPr>
-          <a:xfrm flipH="1">
-            <a:off x="5961888" y="4215384"/>
-            <a:ext cx="164592" cy="182880"/>
-          </a:xfrm>
-          <a:prstGeom prst="rightArrow">
-            <a:avLst/>
-          </a:prstGeom>
-          <a:solidFill>
-            <a:srgbClr val="D6E2ED"/>
-          </a:solidFill>
-          <a:ln w="12700">
-            <a:solidFill>
-              <a:srgbClr val="D6E2ED"/>
-            </a:solidFill>
-            <a:prstDash val="solid"/>
-          </a:ln>
-        </p:spPr>
-      </p:sp>
-      <p:sp>
-        <p:nvSpPr>
-          <p:cNvPr id="30" name="Shape 28"/>
-          <p:cNvSpPr/>
-          <p:nvPr/>
-        </p:nvSpPr>
-        <p:spPr>
-          <a:xfrm>
-            <a:off x="4096512" y="3621024"/>
-            <a:ext cx="1847088" cy="1371600"/>
-          </a:xfrm>
-          <a:prstGeom prst="roundRect">
-            <a:avLst>
-              <a:gd name="adj" fmla="val 4000"/>
-            </a:avLst>
-          </a:prstGeom>
-          <a:solidFill>
-            <a:srgbClr val="EFF4F9"/>
-          </a:solidFill>
-          <a:ln w="12700">
-            <a:solidFill>
-              <a:srgbClr val="D6E2ED"/>
-            </a:solidFill>
-            <a:prstDash val="solid"/>
-          </a:ln>
-          <a:effectLst>
-            <a:outerShdw sx="100000" sy="100000" kx="0" ky="0" algn="bl" rotWithShape="0" blurRad="127000" dist="25400" dir="5400000">
-              <a:srgbClr val="12384F">
-                <a:alpha val="10000"/>
-              </a:srgbClr>
-            </a:outerShdw>
-          </a:effectLst>
-        </p:spPr>
-      </p:sp>
-      <p:sp>
-        <p:nvSpPr>
-          <p:cNvPr id="31" name="Text 29"/>
-          <p:cNvSpPr/>
-          <p:nvPr/>
-        </p:nvSpPr>
-        <p:spPr>
-          <a:xfrm>
-            <a:off x="4224528" y="3749040"/>
-            <a:ext cx="1591056" cy="274320"/>
-          </a:xfrm>
-          <a:prstGeom prst="rect">
-            <a:avLst/>
-          </a:prstGeom>
-          <a:noFill/>
-          <a:ln/>
-        </p:spPr>
-        <p:txBody>
-          <a:bodyPr wrap="square" lIns="0" tIns="0" rIns="0" bIns="0" rtlCol="0" anchor="ctr"/>
-          <a:lstStyle/>
-          <a:p>
-            <a:pPr rtl="1" algn="r" indent="0" marL="0">
-              <a:buNone/>
-            </a:pPr>
-            <a:r>
-              <a:rPr lang="en-US" sz="1000" b="1" dirty="0">
+          <p:cNvPr id="37" name="Text 35"/>
+          <p:cNvSpPr/>
+          <p:nvPr/>
+        </p:nvSpPr>
+        <p:spPr>
+          <a:xfrm>
+            <a:off x="548640" y="6345936"/>
+            <a:ext cx="11064240" cy="274320"/>
+          </a:xfrm>
+          <a:prstGeom prst="rect">
+            <a:avLst/>
+          </a:prstGeom>
+          <a:noFill/>
+          <a:ln/>
+        </p:spPr>
+        <p:txBody>
+          <a:bodyPr wrap="square" lIns="0" tIns="0" rIns="0" bIns="0" rtlCol="0" anchor="ctr"/>
+          <a:lstStyle/>
+          <a:p>
+            <a:pPr rtl="1" algn="r" indent="0" marL="0">
+              <a:buNone/>
+            </a:pPr>
+            <a:r>
+              <a:rPr lang="en-US" sz="950" i="1" dirty="0">
                 <a:solidFill>
                   <a:srgbClr val="4E657A"/>
                 </a:solidFill>
@@ -12669,244 +12905,9 @@
                 <a:ea typeface="Arial" pitchFamily="34" charset="-122"/>
                 <a:cs typeface="Arial" pitchFamily="34" charset="-120"/>
               </a:rPr>
-              <a:t>الخطوة 3</a:t>
-            </a:r>
-            <a:endParaRPr lang="en-US" sz="1000" dirty="0"/>
-          </a:p>
-        </p:txBody>
-      </p:sp>
-      <p:sp>
-        <p:nvSpPr>
-          <p:cNvPr id="32" name="Text 30"/>
-          <p:cNvSpPr/>
-          <p:nvPr/>
-        </p:nvSpPr>
-        <p:spPr>
-          <a:xfrm>
-            <a:off x="4224528" y="4059936"/>
-            <a:ext cx="1591056" cy="822960"/>
-          </a:xfrm>
-          <a:prstGeom prst="rect">
-            <a:avLst/>
-          </a:prstGeom>
-          <a:noFill/>
-          <a:ln/>
-        </p:spPr>
-        <p:txBody>
-          <a:bodyPr wrap="square" lIns="0" tIns="0" rIns="0" bIns="0" rtlCol="0" anchor="ctr"/>
-          <a:lstStyle/>
-          <a:p>
-            <a:pPr rtl="1" algn="r" indent="0" marL="0">
-              <a:buNone/>
-            </a:pPr>
-            <a:r>
-              <a:rPr lang="en-US" sz="1200" dirty="0">
-                <a:solidFill>
-                  <a:srgbClr val="12384F"/>
-                </a:solidFill>
-                <a:latin typeface="Arial" pitchFamily="34" charset="0"/>
-                <a:ea typeface="Arial" pitchFamily="34" charset="-122"/>
-                <a:cs typeface="Arial" pitchFamily="34" charset="-120"/>
-              </a:rPr>
-              <a:t>يُستكمَل الناقص قبل الرفع</a:t>
-            </a:r>
-            <a:endParaRPr lang="en-US" sz="1200" dirty="0"/>
-          </a:p>
-        </p:txBody>
-      </p:sp>
-      <p:sp>
-        <p:nvSpPr>
-          <p:cNvPr id="33" name="Shape 31"/>
-          <p:cNvSpPr/>
-          <p:nvPr/>
-        </p:nvSpPr>
-        <p:spPr>
-          <a:xfrm flipH="1">
-            <a:off x="3913632" y="4215384"/>
-            <a:ext cx="164592" cy="182880"/>
-          </a:xfrm>
-          <a:prstGeom prst="rightArrow">
-            <a:avLst/>
-          </a:prstGeom>
-          <a:solidFill>
-            <a:srgbClr val="D6E2ED"/>
-          </a:solidFill>
-          <a:ln w="12700">
-            <a:solidFill>
-              <a:srgbClr val="D6E2ED"/>
-            </a:solidFill>
-            <a:prstDash val="solid"/>
-          </a:ln>
-        </p:spPr>
-      </p:sp>
-      <p:sp>
-        <p:nvSpPr>
-          <p:cNvPr id="34" name="Shape 32"/>
-          <p:cNvSpPr/>
-          <p:nvPr/>
-        </p:nvSpPr>
-        <p:spPr>
-          <a:xfrm>
-            <a:off x="2048256" y="3621024"/>
-            <a:ext cx="1847088" cy="1371600"/>
-          </a:xfrm>
-          <a:prstGeom prst="roundRect">
-            <a:avLst>
-              <a:gd name="adj" fmla="val 4000"/>
-            </a:avLst>
-          </a:prstGeom>
-          <a:solidFill>
-            <a:srgbClr val="0B7A5E"/>
-          </a:solidFill>
-          <a:ln w="12700">
-            <a:solidFill>
-              <a:srgbClr val="0B7A5E"/>
-            </a:solidFill>
-            <a:prstDash val="solid"/>
-          </a:ln>
-        </p:spPr>
-      </p:sp>
-      <p:sp>
-        <p:nvSpPr>
-          <p:cNvPr id="35" name="Text 33"/>
-          <p:cNvSpPr/>
-          <p:nvPr/>
-        </p:nvSpPr>
-        <p:spPr>
-          <a:xfrm>
-            <a:off x="2176272" y="3749040"/>
-            <a:ext cx="1591056" cy="274320"/>
-          </a:xfrm>
-          <a:prstGeom prst="rect">
-            <a:avLst/>
-          </a:prstGeom>
-          <a:noFill/>
-          <a:ln/>
-        </p:spPr>
-        <p:txBody>
-          <a:bodyPr wrap="square" lIns="0" tIns="0" rIns="0" bIns="0" rtlCol="0" anchor="ctr"/>
-          <a:lstStyle/>
-          <a:p>
-            <a:pPr rtl="1" algn="r" indent="0" marL="0">
-              <a:buNone/>
-            </a:pPr>
-            <a:r>
-              <a:rPr lang="en-US" sz="1000" b="1" dirty="0">
-                <a:solidFill>
-                  <a:srgbClr val="FFFFFF"/>
-                </a:solidFill>
-                <a:latin typeface="Arial" pitchFamily="34" charset="0"/>
-                <a:ea typeface="Arial" pitchFamily="34" charset="-122"/>
-                <a:cs typeface="Arial" pitchFamily="34" charset="-120"/>
-              </a:rPr>
-              <a:t>النتيجة</a:t>
-            </a:r>
-            <a:endParaRPr lang="en-US" sz="1000" dirty="0"/>
-          </a:p>
-        </p:txBody>
-      </p:sp>
-      <p:sp>
-        <p:nvSpPr>
-          <p:cNvPr id="36" name="Text 34"/>
-          <p:cNvSpPr/>
-          <p:nvPr/>
-        </p:nvSpPr>
-        <p:spPr>
-          <a:xfrm>
-            <a:off x="2176272" y="4059936"/>
-            <a:ext cx="1591056" cy="822960"/>
-          </a:xfrm>
-          <a:prstGeom prst="rect">
-            <a:avLst/>
-          </a:prstGeom>
-          <a:noFill/>
-          <a:ln/>
-        </p:spPr>
-        <p:txBody>
-          <a:bodyPr wrap="square" lIns="0" tIns="0" rIns="0" bIns="0" rtlCol="0" anchor="ctr"/>
-          <a:lstStyle/>
-          <a:p>
-            <a:pPr rtl="1" algn="r" indent="0" marL="0">
-              <a:buNone/>
-            </a:pPr>
-            <a:r>
-              <a:rPr lang="en-US" sz="1200" dirty="0">
-                <a:solidFill>
-                  <a:srgbClr val="FFFFFF"/>
-                </a:solidFill>
-                <a:latin typeface="Arial" pitchFamily="34" charset="0"/>
-                <a:ea typeface="Arial" pitchFamily="34" charset="-122"/>
-                <a:cs typeface="Arial" pitchFamily="34" charset="-120"/>
-              </a:rPr>
-              <a:t>يُرفَع مكتملاً من أول مرّة</a:t>
-            </a:r>
-            <a:endParaRPr lang="en-US" sz="1200" dirty="0"/>
-          </a:p>
-        </p:txBody>
-      </p:sp>
-      <p:sp>
-        <p:nvSpPr>
-          <p:cNvPr id="37" name="Shape 35"/>
-          <p:cNvSpPr/>
-          <p:nvPr/>
-        </p:nvSpPr>
-        <p:spPr>
-          <a:xfrm>
-            <a:off x="557784" y="5394960"/>
-            <a:ext cx="11045952" cy="731520"/>
-          </a:xfrm>
-          <a:prstGeom prst="roundRect">
-            <a:avLst>
-              <a:gd name="adj" fmla="val 7500"/>
-            </a:avLst>
-          </a:prstGeom>
-          <a:solidFill>
-            <a:srgbClr val="EFF4F9"/>
-          </a:solidFill>
-          <a:ln w="12700">
-            <a:solidFill>
-              <a:srgbClr val="D6E2ED"/>
-            </a:solidFill>
-            <a:prstDash val="solid"/>
-          </a:ln>
-        </p:spPr>
-      </p:sp>
-      <p:sp>
-        <p:nvSpPr>
-          <p:cNvPr id="38" name="Text 36"/>
-          <p:cNvSpPr/>
-          <p:nvPr/>
-        </p:nvSpPr>
-        <p:spPr>
-          <a:xfrm>
-            <a:off x="868680" y="5541264"/>
-            <a:ext cx="10424160" cy="457200"/>
-          </a:xfrm>
-          <a:prstGeom prst="rect">
-            <a:avLst/>
-          </a:prstGeom>
-          <a:noFill/>
-          <a:ln/>
-        </p:spPr>
-        <p:txBody>
-          <a:bodyPr wrap="square" lIns="0" tIns="0" rIns="0" bIns="0" rtlCol="0" anchor="ctr"/>
-          <a:lstStyle/>
-          <a:p>
-            <a:pPr rtl="1" algn="r" indent="0" marL="0">
-              <a:buNone/>
-            </a:pPr>
-            <a:r>
-              <a:rPr lang="en-US" sz="1400" b="1" dirty="0">
-                <a:solidFill>
-                  <a:srgbClr val="12384F"/>
-                </a:solidFill>
-                <a:latin typeface="Arial" pitchFamily="34" charset="0"/>
-                <a:ea typeface="Arial" pitchFamily="34" charset="-122"/>
-                <a:cs typeface="Arial" pitchFamily="34" charset="-120"/>
-              </a:rPr>
-              <a:t>التصحيح قبل الرفع أرخص من إعادة الطلب بعد الرفض، فهو لا يستهلك دورة مراجعة لدى شركة التأمين ولا يؤخّر بدء الخدمة.</a:t>
-            </a:r>
-            <a:endParaRPr lang="en-US" sz="1400" dirty="0"/>
+              <a:t>سديد لا يعترض الإرسال الآلي ولا يؤخّر بدء الخدمة — يعمل على طرفي الدورة لا في منتصفها.</a:t>
+            </a:r>
+            <a:endParaRPr lang="en-US" sz="950" dirty="0"/>
           </a:p>
         </p:txBody>
       </p:sp>
@@ -13232,7 +13233,7 @@
                 <a:ea typeface="Arial" pitchFamily="34" charset="-122"/>
                 <a:cs typeface="Arial" pitchFamily="34" charset="-120"/>
               </a:rPr>
-              <a:t>احتمال ألّا تصدر الموافقة كاملة، مقارَناً بالمعدّل العام، مع تقدير المبلغ المتوقّع اعتماده والمبلغ المعرّض للخطر بالريال.</a:t>
+              <a:t>احتمال ألّا تصدر الموافقة كاملة والمبلغ المعرّض للخطر بالريال — لترتيب طابور المعالجة بالمال، ولرصد الأنماط المتكرّرة في لوحة Power BI.</a:t>
             </a:r>
             <a:endParaRPr lang="en-US" sz="1300" dirty="0"/>
           </a:p>
@@ -13450,7 +13451,7 @@
                 <a:ea typeface="Arial" pitchFamily="34" charset="-122"/>
                 <a:cs typeface="Arial" pitchFamily="34" charset="-120"/>
               </a:rPr>
-              <a:t>أرجح أسباب عدم الموافقة مرتّبة، ومع كل سبب إجراء تصحيحي محدّد يُنفَّذ قبل الرفع، لا تنبيه مجرّد.</a:t>
+              <a:t>يحوّل ردّ شركة التأمين من نصّ حرّ مبعثر إلى سبب معياري، ومع كل سبب إجراء تصحيحي محدّد قبل إعادة الإرسال.</a:t>
             </a:r>
             <a:endParaRPr lang="en-US" sz="1300" dirty="0"/>
           </a:p>
@@ -14277,7 +14278,7 @@
                 <a:ea typeface="Arial" pitchFamily="34" charset="-122"/>
                 <a:cs typeface="Arial" pitchFamily="34" charset="-120"/>
               </a:rPr>
-              <a:t>إحالة مباشرة إلى الأسباب المرجّحة وإجرائها التصحيحي قبل الرفع.</a:t>
+              <a:t>إحالة مباشرة إلى الأسباب المرجّحة وإجرائها التصحيحي قبل إعادة الإرسال.</a:t>
             </a:r>
             <a:endParaRPr lang="en-US" sz="1150" dirty="0"/>
           </a:p>
@@ -14387,7 +14388,7 @@
                 <a:ea typeface="Arial" pitchFamily="34" charset="-122"/>
                 <a:cs typeface="Arial" pitchFamily="34" charset="-120"/>
               </a:rPr>
-              <a:t>من التنبّؤ إلى إجراء</a:t>
+              <a:t>من ردّ شركة التأمين إلى إجراء</a:t>
             </a:r>
             <a:endParaRPr lang="en-US" sz="1200" dirty="0"/>
           </a:p>
@@ -14426,7 +14427,7 @@
                 <a:ea typeface="Arial" pitchFamily="34" charset="-122"/>
                 <a:cs typeface="Arial" pitchFamily="34" charset="-120"/>
               </a:rPr>
-              <a:t>المهمّ ليس أنّ الطلب سيُردّ، بل ما الذي ينقصه</a:t>
+              <a:t>الردّ يصل نصّاً مبعثراً — وسديد يحوّله إلى بند عمل</a:t>
             </a:r>
             <a:endParaRPr lang="en-US" sz="3200" dirty="0"/>
           </a:p>
@@ -14465,7 +14466,7 @@
                 <a:ea typeface="Arial" pitchFamily="34" charset="-122"/>
                 <a:cs typeface="Arial" pitchFamily="34" charset="-120"/>
               </a:rPr>
-              <a:t>كل سبب متوقَّع يتحوّل إلى بند عمل يحمل سؤال تحقّق، وإجراءً تصحيحياً، ونصّاً نظامياً يسنده.</a:t>
+              <a:t>‏4,844 نصّ ردٍّ مختلف صُنِّفت إلى 16 سبباً معيارياً بتغطية 95.8%، ومع كل سبب سؤال تحقّق وإجراء ونصّ نظامي.</a:t>
             </a:r>
             <a:endParaRPr lang="en-US" sz="1400" dirty="0"/>
           </a:p>
@@ -14562,7 +14563,7 @@
                 <a:ea typeface="Arial" pitchFamily="34" charset="-122"/>
                 <a:cs typeface="Arial" pitchFamily="34" charset="-120"/>
               </a:rPr>
-              <a:t>68.0%</a:t>
+              <a:t>95.8%</a:t>
             </a:r>
             <a:endParaRPr lang="en-US" sz="3800" dirty="0"/>
           </a:p>
@@ -14604,7 +14605,7 @@
                 <a:ea typeface="Arial" pitchFamily="34" charset="-122"/>
                 <a:cs typeface="Arial" pitchFamily="34" charset="-120"/>
               </a:rPr>
-              <a:t>من الحالات يكون السبب الصحيح ضمن الأسباب الثلاثة الأولى</a:t>
+              <a:t>من ردود شركات التأمين يصنّفها سديد آلياً إلى سبب معياري</a:t>
             </a:r>
             <a:endParaRPr lang="en-US" sz="1300" dirty="0"/>
           </a:p>
@@ -14638,7 +14639,7 @@
               <a:buNone/>
             </a:pPr>
             <a:r>
-              <a:rPr lang="en-US" sz="1200" dirty="0">
+              <a:rPr lang="en-US" sz="1150" dirty="0">
                 <a:solidFill>
                   <a:srgbClr val="7BA0B8"/>
                 </a:solidFill>
@@ -14646,9 +14647,9 @@
                 <a:ea typeface="Arial" pitchFamily="34" charset="-122"/>
                 <a:cs typeface="Arial" pitchFamily="34" charset="-120"/>
               </a:rPr>
-              <a:t>مقابل 17.7 بالمئة لو خُمِّن السبب اعتباطاً. والنموذج لا يقرأ المرفقات، بل يرتّب الأرجح من أنماط 19,741 طلباً سابقاً.</a:t>
-            </a:r>
-            <a:endParaRPr lang="en-US" sz="1200" dirty="0"/>
+              <a:t>وهذه الطبقة تعمل اليوم على المرفوضات الفعلية بلا تعديل في أي نظام. ويتنبّأ سديد بالسبب مسبقاً كذلك، بدقّة 68 بالمئة ضمن الثلاثة الأولى.</a:t>
+            </a:r>
+            <a:endParaRPr lang="en-US" sz="1150" dirty="0"/>
           </a:p>
         </p:txBody>
       </p:sp>
@@ -14754,7 +14755,7 @@
                 <a:ea typeface="Arial" pitchFamily="34" charset="-122"/>
                 <a:cs typeface="Arial" pitchFamily="34" charset="-120"/>
               </a:rPr>
-              <a:t>أرفق تقرير الطوارئ والتاريخ المرضي ونتائج التحاليل قبل الرفع.</a:t>
+              <a:t>أرفق تقرير الطوارئ والتاريخ المرضي ونتائج التحاليل قبل إعادة الإرسال.</a:t>
             </a:r>
             <a:endParaRPr lang="en-US" sz="1100" dirty="0"/>
           </a:p>
@@ -15009,7 +15010,7 @@
                 <a:ea typeface="Arial" pitchFamily="34" charset="-122"/>
                 <a:cs typeface="Arial" pitchFamily="34" charset="-120"/>
               </a:rPr>
-              <a:t>نماذج من الأسباب الستة عشر المعيارية، ومع كل سبب إجراؤه التصحيحي كما يعرضه سديد.</a:t>
+              <a:t>نماذج من الأسباب الستة عشر المعيارية، ومع كل سبب إجراؤه التصحيحي ونصّه النظامي كما يعرضه سديد.</a:t>
             </a:r>
             <a:endParaRPr lang="en-US" sz="950" dirty="0"/>
           </a:p>
